--- a/docs/presentacion/SumiClas-presentacion.pptx
+++ b/docs/presentacion/SumiClas-presentacion.pptx
@@ -413,7 +413,7 @@
             <a:pPr indent="0" algn="r">
               <a:buNone/>
             </a:pPr>
-            <a:fld id="{D4E8A8FF-12D6-4CF5-9216-A177B80A7C3F}" type="slidenum">
+            <a:fld id="{EEA0EAFA-5685-4157-9A00-00D500CF099A}" type="slidenum">
               <a:rPr lang="es-ES" sz="1400" b="0" u="none" strike="noStrike">
                 <a:solidFill>
                   <a:srgbClr val="000000"/>
@@ -460,7 +460,7 @@
       </p:grpSpPr>
       <p:sp>
         <p:nvSpPr>
-          <p:cNvPr id="355" name="PlaceHolder 1"/>
+          <p:cNvPr id="354" name="PlaceHolder 1"/>
           <p:cNvSpPr>
             <a:spLocks noGrp="1"/>
           </p:cNvSpPr>
@@ -483,7 +483,7 @@
       </p:sp>
       <p:sp>
         <p:nvSpPr>
-          <p:cNvPr id="356" name="PlaceHolder 2"/>
+          <p:cNvPr id="355" name="PlaceHolder 2"/>
           <p:cNvSpPr>
             <a:spLocks noGrp="1"/>
           </p:cNvSpPr>
@@ -514,6 +514,9 @@
                 <a:spcPct val="100000"/>
               </a:lnSpc>
               <a:buNone/>
+              <a:tabLst>
+                <a:tab pos="0" algn="l"/>
+              </a:tabLst>
             </a:pPr>
             <a:r>
               <a:rPr lang="es-ES" sz="2000" b="0" u="none" strike="noStrike">
@@ -539,7 +542,7 @@
       </p:sp>
       <p:sp>
         <p:nvSpPr>
-          <p:cNvPr id="357" name="PlaceHolder 3"/>
+          <p:cNvPr id="356" name="PlaceHolder 3"/>
           <p:cNvSpPr>
             <a:spLocks noGrp="1"/>
           </p:cNvSpPr>
@@ -570,6 +573,9 @@
                 <a:spcPct val="100000"/>
               </a:lnSpc>
               <a:buNone/>
+              <a:tabLst>
+                <a:tab pos="0" algn="l"/>
+              </a:tabLst>
               <a:defRPr lang="en-US" sz="1800" b="0" u="none" strike="noStrike">
                 <a:solidFill>
                   <a:schemeClr val="dk1"/>
@@ -587,8 +593,11 @@
                 <a:spcPct val="100000"/>
               </a:lnSpc>
               <a:buNone/>
+              <a:tabLst>
+                <a:tab pos="0" algn="l"/>
+              </a:tabLst>
             </a:pPr>
-            <a:fld id="{5002A0C7-5DCC-4241-8BF2-7C6AD7F8AE1F}" type="slidenum">
+            <a:fld id="{1A39B994-DD78-44D2-93E0-D596F3E68B36}" type="slidenum">
               <a:rPr lang="en-US" sz="1800" b="0" u="none" strike="noStrike">
                 <a:solidFill>
                   <a:schemeClr val="dk1"/>
@@ -635,7 +644,7 @@
       </p:grpSpPr>
       <p:sp>
         <p:nvSpPr>
-          <p:cNvPr id="382" name="PlaceHolder 1"/>
+          <p:cNvPr id="381" name="PlaceHolder 1"/>
           <p:cNvSpPr>
             <a:spLocks noGrp="1"/>
           </p:cNvSpPr>
@@ -658,7 +667,7 @@
       </p:sp>
       <p:sp>
         <p:nvSpPr>
-          <p:cNvPr id="383" name="PlaceHolder 2"/>
+          <p:cNvPr id="382" name="PlaceHolder 2"/>
           <p:cNvSpPr>
             <a:spLocks noGrp="1"/>
           </p:cNvSpPr>
@@ -689,6 +698,9 @@
                 <a:spcPct val="100000"/>
               </a:lnSpc>
               <a:buNone/>
+              <a:tabLst>
+                <a:tab pos="0" algn="l"/>
+              </a:tabLst>
             </a:pPr>
             <a:r>
               <a:rPr lang="es-ES" sz="2000" b="0" u="none" strike="noStrike">
@@ -714,7 +726,7 @@
       </p:sp>
       <p:sp>
         <p:nvSpPr>
-          <p:cNvPr id="384" name="PlaceHolder 3"/>
+          <p:cNvPr id="383" name="PlaceHolder 3"/>
           <p:cNvSpPr>
             <a:spLocks noGrp="1"/>
           </p:cNvSpPr>
@@ -745,6 +757,9 @@
                 <a:spcPct val="100000"/>
               </a:lnSpc>
               <a:buNone/>
+              <a:tabLst>
+                <a:tab pos="0" algn="l"/>
+              </a:tabLst>
               <a:defRPr lang="en-US" sz="1800" b="0" u="none" strike="noStrike">
                 <a:solidFill>
                   <a:schemeClr val="dk1"/>
@@ -762,8 +777,11 @@
                 <a:spcPct val="100000"/>
               </a:lnSpc>
               <a:buNone/>
+              <a:tabLst>
+                <a:tab pos="0" algn="l"/>
+              </a:tabLst>
             </a:pPr>
-            <a:fld id="{C57C2466-890C-4F3C-A5D8-90D95B4DBF4E}" type="slidenum">
+            <a:fld id="{41444639-2AC4-41D3-B7E7-BD4C2A277E4C}" type="slidenum">
               <a:rPr lang="en-US" sz="1800" b="0" u="none" strike="noStrike">
                 <a:solidFill>
                   <a:schemeClr val="dk1"/>
@@ -810,7 +828,7 @@
       </p:grpSpPr>
       <p:sp>
         <p:nvSpPr>
-          <p:cNvPr id="385" name="PlaceHolder 1"/>
+          <p:cNvPr id="384" name="PlaceHolder 1"/>
           <p:cNvSpPr>
             <a:spLocks noGrp="1"/>
           </p:cNvSpPr>
@@ -833,7 +851,7 @@
       </p:sp>
       <p:sp>
         <p:nvSpPr>
-          <p:cNvPr id="386" name="PlaceHolder 2"/>
+          <p:cNvPr id="385" name="PlaceHolder 2"/>
           <p:cNvSpPr>
             <a:spLocks noGrp="1"/>
           </p:cNvSpPr>
@@ -864,6 +882,9 @@
                 <a:spcPct val="100000"/>
               </a:lnSpc>
               <a:buNone/>
+              <a:tabLst>
+                <a:tab pos="0" algn="l"/>
+              </a:tabLst>
             </a:pPr>
             <a:r>
               <a:rPr lang="es-ES" sz="2000" b="0" u="none" strike="noStrike">
@@ -889,7 +910,7 @@
       </p:sp>
       <p:sp>
         <p:nvSpPr>
-          <p:cNvPr id="387" name="PlaceHolder 3"/>
+          <p:cNvPr id="386" name="PlaceHolder 3"/>
           <p:cNvSpPr>
             <a:spLocks noGrp="1"/>
           </p:cNvSpPr>
@@ -920,6 +941,9 @@
                 <a:spcPct val="100000"/>
               </a:lnSpc>
               <a:buNone/>
+              <a:tabLst>
+                <a:tab pos="0" algn="l"/>
+              </a:tabLst>
               <a:defRPr lang="en-US" sz="1800" b="0" u="none" strike="noStrike">
                 <a:solidFill>
                   <a:schemeClr val="dk1"/>
@@ -937,8 +961,11 @@
                 <a:spcPct val="100000"/>
               </a:lnSpc>
               <a:buNone/>
+              <a:tabLst>
+                <a:tab pos="0" algn="l"/>
+              </a:tabLst>
             </a:pPr>
-            <a:fld id="{596839DC-EA6A-4DB0-8F5C-7D26E2C716D0}" type="slidenum">
+            <a:fld id="{103C2FD2-ACEB-4236-901E-1F9B2D2BB1FA}" type="slidenum">
               <a:rPr lang="en-US" sz="1800" b="0" u="none" strike="noStrike">
                 <a:solidFill>
                   <a:schemeClr val="dk1"/>
@@ -985,7 +1012,7 @@
       </p:grpSpPr>
       <p:sp>
         <p:nvSpPr>
-          <p:cNvPr id="388" name="PlaceHolder 1"/>
+          <p:cNvPr id="387" name="PlaceHolder 1"/>
           <p:cNvSpPr>
             <a:spLocks noGrp="1"/>
           </p:cNvSpPr>
@@ -1008,7 +1035,7 @@
       </p:sp>
       <p:sp>
         <p:nvSpPr>
-          <p:cNvPr id="389" name="PlaceHolder 2"/>
+          <p:cNvPr id="388" name="PlaceHolder 2"/>
           <p:cNvSpPr>
             <a:spLocks noGrp="1"/>
           </p:cNvSpPr>
@@ -1039,6 +1066,9 @@
                 <a:spcPct val="100000"/>
               </a:lnSpc>
               <a:buNone/>
+              <a:tabLst>
+                <a:tab pos="0" algn="l"/>
+              </a:tabLst>
             </a:pPr>
             <a:r>
               <a:rPr lang="es-ES" sz="2000" b="0" u="none" strike="noStrike">
@@ -1064,7 +1094,7 @@
       </p:sp>
       <p:sp>
         <p:nvSpPr>
-          <p:cNvPr id="390" name="PlaceHolder 3"/>
+          <p:cNvPr id="389" name="PlaceHolder 3"/>
           <p:cNvSpPr>
             <a:spLocks noGrp="1"/>
           </p:cNvSpPr>
@@ -1095,6 +1125,9 @@
                 <a:spcPct val="100000"/>
               </a:lnSpc>
               <a:buNone/>
+              <a:tabLst>
+                <a:tab pos="0" algn="l"/>
+              </a:tabLst>
               <a:defRPr lang="en-US" sz="1800" b="0" u="none" strike="noStrike">
                 <a:solidFill>
                   <a:schemeClr val="dk1"/>
@@ -1112,8 +1145,11 @@
                 <a:spcPct val="100000"/>
               </a:lnSpc>
               <a:buNone/>
+              <a:tabLst>
+                <a:tab pos="0" algn="l"/>
+              </a:tabLst>
             </a:pPr>
-            <a:fld id="{9E277B60-9E60-40D5-BB4E-72AD56FCBDAF}" type="slidenum">
+            <a:fld id="{C3E56A8E-4AB4-439B-BE39-49DA3C1A2D5E}" type="slidenum">
               <a:rPr lang="en-US" sz="1800" b="0" u="none" strike="noStrike">
                 <a:solidFill>
                   <a:schemeClr val="dk1"/>
@@ -1160,7 +1196,7 @@
       </p:grpSpPr>
       <p:sp>
         <p:nvSpPr>
-          <p:cNvPr id="391" name="PlaceHolder 1"/>
+          <p:cNvPr id="390" name="PlaceHolder 1"/>
           <p:cNvSpPr>
             <a:spLocks noGrp="1"/>
           </p:cNvSpPr>
@@ -1183,7 +1219,7 @@
       </p:sp>
       <p:sp>
         <p:nvSpPr>
-          <p:cNvPr id="392" name="PlaceHolder 2"/>
+          <p:cNvPr id="391" name="PlaceHolder 2"/>
           <p:cNvSpPr>
             <a:spLocks noGrp="1"/>
           </p:cNvSpPr>
@@ -1214,6 +1250,9 @@
                 <a:spcPct val="100000"/>
               </a:lnSpc>
               <a:buNone/>
+              <a:tabLst>
+                <a:tab pos="0" algn="l"/>
+              </a:tabLst>
             </a:pPr>
             <a:r>
               <a:rPr lang="es-ES" sz="2000" b="0" u="none" strike="noStrike">
@@ -1239,7 +1278,7 @@
       </p:sp>
       <p:sp>
         <p:nvSpPr>
-          <p:cNvPr id="393" name="PlaceHolder 3"/>
+          <p:cNvPr id="392" name="PlaceHolder 3"/>
           <p:cNvSpPr>
             <a:spLocks noGrp="1"/>
           </p:cNvSpPr>
@@ -1270,6 +1309,9 @@
                 <a:spcPct val="100000"/>
               </a:lnSpc>
               <a:buNone/>
+              <a:tabLst>
+                <a:tab pos="0" algn="l"/>
+              </a:tabLst>
               <a:defRPr lang="en-US" sz="1800" b="0" u="none" strike="noStrike">
                 <a:solidFill>
                   <a:schemeClr val="dk1"/>
@@ -1287,8 +1329,11 @@
                 <a:spcPct val="100000"/>
               </a:lnSpc>
               <a:buNone/>
+              <a:tabLst>
+                <a:tab pos="0" algn="l"/>
+              </a:tabLst>
             </a:pPr>
-            <a:fld id="{6D8E5B8A-2AA2-48CF-B3F1-E14A73E7D90C}" type="slidenum">
+            <a:fld id="{504D759A-DA3C-4C45-B742-4CBDD104B048}" type="slidenum">
               <a:rPr lang="en-US" sz="1800" b="0" u="none" strike="noStrike">
                 <a:solidFill>
                   <a:schemeClr val="dk1"/>
@@ -1335,7 +1380,7 @@
       </p:grpSpPr>
       <p:sp>
         <p:nvSpPr>
-          <p:cNvPr id="394" name="PlaceHolder 1"/>
+          <p:cNvPr id="393" name="PlaceHolder 1"/>
           <p:cNvSpPr>
             <a:spLocks noGrp="1"/>
           </p:cNvSpPr>
@@ -1358,7 +1403,7 @@
       </p:sp>
       <p:sp>
         <p:nvSpPr>
-          <p:cNvPr id="395" name="PlaceHolder 2"/>
+          <p:cNvPr id="394" name="PlaceHolder 2"/>
           <p:cNvSpPr>
             <a:spLocks noGrp="1"/>
           </p:cNvSpPr>
@@ -1389,6 +1434,9 @@
                 <a:spcPct val="100000"/>
               </a:lnSpc>
               <a:buNone/>
+              <a:tabLst>
+                <a:tab pos="0" algn="l"/>
+              </a:tabLst>
             </a:pPr>
             <a:r>
               <a:rPr lang="en-US" sz="2000" b="0" u="none" strike="noStrike">
@@ -1414,7 +1462,7 @@
       </p:sp>
       <p:sp>
         <p:nvSpPr>
-          <p:cNvPr id="396" name="PlaceHolder 3"/>
+          <p:cNvPr id="395" name="PlaceHolder 3"/>
           <p:cNvSpPr>
             <a:spLocks noGrp="1"/>
           </p:cNvSpPr>
@@ -1445,6 +1493,9 @@
                 <a:spcPct val="100000"/>
               </a:lnSpc>
               <a:buNone/>
+              <a:tabLst>
+                <a:tab pos="0" algn="l"/>
+              </a:tabLst>
               <a:defRPr lang="en-US" sz="1800" b="0" u="none" strike="noStrike">
                 <a:solidFill>
                   <a:schemeClr val="dk1"/>
@@ -1462,8 +1513,11 @@
                 <a:spcPct val="100000"/>
               </a:lnSpc>
               <a:buNone/>
+              <a:tabLst>
+                <a:tab pos="0" algn="l"/>
+              </a:tabLst>
             </a:pPr>
-            <a:fld id="{C4FCD44D-8D3C-4EB0-BC8B-24A4CBA5DB1F}" type="slidenum">
+            <a:fld id="{B508B44B-B0FD-4C4E-B9B8-192E9340D751}" type="slidenum">
               <a:rPr lang="en-US" sz="1800" b="0" u="none" strike="noStrike">
                 <a:solidFill>
                   <a:schemeClr val="dk1"/>
@@ -1510,7 +1564,7 @@
       </p:grpSpPr>
       <p:sp>
         <p:nvSpPr>
-          <p:cNvPr id="358" name="PlaceHolder 1"/>
+          <p:cNvPr id="357" name="PlaceHolder 1"/>
           <p:cNvSpPr>
             <a:spLocks noGrp="1"/>
           </p:cNvSpPr>
@@ -1533,7 +1587,7 @@
       </p:sp>
       <p:sp>
         <p:nvSpPr>
-          <p:cNvPr id="359" name="PlaceHolder 2"/>
+          <p:cNvPr id="358" name="PlaceHolder 2"/>
           <p:cNvSpPr>
             <a:spLocks noGrp="1"/>
           </p:cNvSpPr>
@@ -1564,6 +1618,9 @@
                 <a:spcPct val="100000"/>
               </a:lnSpc>
               <a:buNone/>
+              <a:tabLst>
+                <a:tab pos="0" algn="l"/>
+              </a:tabLst>
             </a:pPr>
             <a:r>
               <a:rPr lang="en-US" sz="2000" b="0" u="none" strike="noStrike">
@@ -1589,7 +1646,7 @@
       </p:sp>
       <p:sp>
         <p:nvSpPr>
-          <p:cNvPr id="360" name="PlaceHolder 3"/>
+          <p:cNvPr id="359" name="PlaceHolder 3"/>
           <p:cNvSpPr>
             <a:spLocks noGrp="1"/>
           </p:cNvSpPr>
@@ -1620,6 +1677,9 @@
                 <a:spcPct val="100000"/>
               </a:lnSpc>
               <a:buNone/>
+              <a:tabLst>
+                <a:tab pos="0" algn="l"/>
+              </a:tabLst>
               <a:defRPr lang="en-US" sz="1800" b="0" u="none" strike="noStrike">
                 <a:solidFill>
                   <a:schemeClr val="dk1"/>
@@ -1637,8 +1697,11 @@
                 <a:spcPct val="100000"/>
               </a:lnSpc>
               <a:buNone/>
+              <a:tabLst>
+                <a:tab pos="0" algn="l"/>
+              </a:tabLst>
             </a:pPr>
-            <a:fld id="{903E6F85-B77A-4F3E-B98B-501A16EC87A8}" type="slidenum">
+            <a:fld id="{75C49AC8-BD25-4551-8EF2-9C1B1AF6E7E1}" type="slidenum">
               <a:rPr lang="en-US" sz="1800" b="0" u="none" strike="noStrike">
                 <a:solidFill>
                   <a:schemeClr val="dk1"/>
@@ -1685,7 +1748,7 @@
       </p:grpSpPr>
       <p:sp>
         <p:nvSpPr>
-          <p:cNvPr id="361" name="PlaceHolder 1"/>
+          <p:cNvPr id="360" name="PlaceHolder 1"/>
           <p:cNvSpPr>
             <a:spLocks noGrp="1"/>
           </p:cNvSpPr>
@@ -1708,7 +1771,7 @@
       </p:sp>
       <p:sp>
         <p:nvSpPr>
-          <p:cNvPr id="362" name="PlaceHolder 2"/>
+          <p:cNvPr id="361" name="PlaceHolder 2"/>
           <p:cNvSpPr>
             <a:spLocks noGrp="1"/>
           </p:cNvSpPr>
@@ -1739,6 +1802,9 @@
                 <a:spcPct val="100000"/>
               </a:lnSpc>
               <a:buNone/>
+              <a:tabLst>
+                <a:tab pos="0" algn="l"/>
+              </a:tabLst>
             </a:pPr>
             <a:r>
               <a:rPr lang="en-US" sz="2000" b="0" u="none" strike="noStrike">
@@ -1764,7 +1830,7 @@
       </p:sp>
       <p:sp>
         <p:nvSpPr>
-          <p:cNvPr id="363" name="PlaceHolder 3"/>
+          <p:cNvPr id="362" name="PlaceHolder 3"/>
           <p:cNvSpPr>
             <a:spLocks noGrp="1"/>
           </p:cNvSpPr>
@@ -1795,6 +1861,9 @@
                 <a:spcPct val="100000"/>
               </a:lnSpc>
               <a:buNone/>
+              <a:tabLst>
+                <a:tab pos="0" algn="l"/>
+              </a:tabLst>
               <a:defRPr lang="en-US" sz="1800" b="0" u="none" strike="noStrike">
                 <a:solidFill>
                   <a:schemeClr val="dk1"/>
@@ -1812,8 +1881,11 @@
                 <a:spcPct val="100000"/>
               </a:lnSpc>
               <a:buNone/>
+              <a:tabLst>
+                <a:tab pos="0" algn="l"/>
+              </a:tabLst>
             </a:pPr>
-            <a:fld id="{256E1E6E-2B84-4A08-BD33-1429A9388FE7}" type="slidenum">
+            <a:fld id="{08659800-0F48-41CB-BE0F-5EC7BA680019}" type="slidenum">
               <a:rPr lang="en-US" sz="1800" b="0" u="none" strike="noStrike">
                 <a:solidFill>
                   <a:schemeClr val="dk1"/>
@@ -1860,7 +1932,7 @@
       </p:grpSpPr>
       <p:sp>
         <p:nvSpPr>
-          <p:cNvPr id="364" name="PlaceHolder 1"/>
+          <p:cNvPr id="363" name="PlaceHolder 1"/>
           <p:cNvSpPr>
             <a:spLocks noGrp="1"/>
           </p:cNvSpPr>
@@ -1883,7 +1955,7 @@
       </p:sp>
       <p:sp>
         <p:nvSpPr>
-          <p:cNvPr id="365" name="PlaceHolder 2"/>
+          <p:cNvPr id="364" name="PlaceHolder 2"/>
           <p:cNvSpPr>
             <a:spLocks noGrp="1"/>
           </p:cNvSpPr>
@@ -1914,6 +1986,9 @@
                 <a:spcPct val="100000"/>
               </a:lnSpc>
               <a:buNone/>
+              <a:tabLst>
+                <a:tab pos="0" algn="l"/>
+              </a:tabLst>
             </a:pPr>
             <a:r>
               <a:rPr lang="es-ES" sz="2000" b="0" u="none" strike="noStrike">
@@ -1939,7 +2014,7 @@
       </p:sp>
       <p:sp>
         <p:nvSpPr>
-          <p:cNvPr id="366" name="PlaceHolder 3"/>
+          <p:cNvPr id="365" name="PlaceHolder 3"/>
           <p:cNvSpPr>
             <a:spLocks noGrp="1"/>
           </p:cNvSpPr>
@@ -1970,6 +2045,9 @@
                 <a:spcPct val="100000"/>
               </a:lnSpc>
               <a:buNone/>
+              <a:tabLst>
+                <a:tab pos="0" algn="l"/>
+              </a:tabLst>
               <a:defRPr lang="en-US" sz="1800" b="0" u="none" strike="noStrike">
                 <a:solidFill>
                   <a:schemeClr val="dk1"/>
@@ -1987,8 +2065,11 @@
                 <a:spcPct val="100000"/>
               </a:lnSpc>
               <a:buNone/>
+              <a:tabLst>
+                <a:tab pos="0" algn="l"/>
+              </a:tabLst>
             </a:pPr>
-            <a:fld id="{3694E619-6979-4944-AF8E-5FEC1B05A064}" type="slidenum">
+            <a:fld id="{E2D50460-4775-45AB-8D30-BE0DE75F557B}" type="slidenum">
               <a:rPr lang="en-US" sz="1800" b="0" u="none" strike="noStrike">
                 <a:solidFill>
                   <a:schemeClr val="dk1"/>
@@ -2035,7 +2116,7 @@
       </p:grpSpPr>
       <p:sp>
         <p:nvSpPr>
-          <p:cNvPr id="367" name="PlaceHolder 1"/>
+          <p:cNvPr id="366" name="PlaceHolder 1"/>
           <p:cNvSpPr>
             <a:spLocks noGrp="1"/>
           </p:cNvSpPr>
@@ -2058,7 +2139,7 @@
       </p:sp>
       <p:sp>
         <p:nvSpPr>
-          <p:cNvPr id="368" name="PlaceHolder 2"/>
+          <p:cNvPr id="367" name="PlaceHolder 2"/>
           <p:cNvSpPr>
             <a:spLocks noGrp="1"/>
           </p:cNvSpPr>
@@ -2089,6 +2170,9 @@
                 <a:spcPct val="100000"/>
               </a:lnSpc>
               <a:buNone/>
+              <a:tabLst>
+                <a:tab pos="0" algn="l"/>
+              </a:tabLst>
             </a:pPr>
             <a:r>
               <a:rPr lang="es-ES" sz="2000" b="0" u="none" strike="noStrike">
@@ -2114,7 +2198,7 @@
       </p:sp>
       <p:sp>
         <p:nvSpPr>
-          <p:cNvPr id="369" name="PlaceHolder 3"/>
+          <p:cNvPr id="368" name="PlaceHolder 3"/>
           <p:cNvSpPr>
             <a:spLocks noGrp="1"/>
           </p:cNvSpPr>
@@ -2145,6 +2229,9 @@
                 <a:spcPct val="100000"/>
               </a:lnSpc>
               <a:buNone/>
+              <a:tabLst>
+                <a:tab pos="0" algn="l"/>
+              </a:tabLst>
               <a:defRPr lang="en-US" sz="1800" b="0" u="none" strike="noStrike">
                 <a:solidFill>
                   <a:schemeClr val="dk1"/>
@@ -2162,8 +2249,11 @@
                 <a:spcPct val="100000"/>
               </a:lnSpc>
               <a:buNone/>
+              <a:tabLst>
+                <a:tab pos="0" algn="l"/>
+              </a:tabLst>
             </a:pPr>
-            <a:fld id="{CD25F71D-7C35-499D-8FEF-A78F975198B9}" type="slidenum">
+            <a:fld id="{54774C72-23E6-46DB-B5C6-FBA6A31D4D29}" type="slidenum">
               <a:rPr lang="en-US" sz="1800" b="0" u="none" strike="noStrike">
                 <a:solidFill>
                   <a:schemeClr val="dk1"/>
@@ -2210,7 +2300,7 @@
       </p:grpSpPr>
       <p:sp>
         <p:nvSpPr>
-          <p:cNvPr id="370" name="PlaceHolder 1"/>
+          <p:cNvPr id="369" name="PlaceHolder 1"/>
           <p:cNvSpPr>
             <a:spLocks noGrp="1"/>
           </p:cNvSpPr>
@@ -2233,7 +2323,7 @@
       </p:sp>
       <p:sp>
         <p:nvSpPr>
-          <p:cNvPr id="371" name="PlaceHolder 2"/>
+          <p:cNvPr id="370" name="PlaceHolder 2"/>
           <p:cNvSpPr>
             <a:spLocks noGrp="1"/>
           </p:cNvSpPr>
@@ -2264,6 +2354,9 @@
                 <a:spcPct val="100000"/>
               </a:lnSpc>
               <a:buNone/>
+              <a:tabLst>
+                <a:tab pos="0" algn="l"/>
+              </a:tabLst>
             </a:pPr>
             <a:r>
               <a:rPr lang="es-ES" sz="2000" b="0" u="none" strike="noStrike">
@@ -2289,7 +2382,7 @@
       </p:sp>
       <p:sp>
         <p:nvSpPr>
-          <p:cNvPr id="372" name="PlaceHolder 3"/>
+          <p:cNvPr id="371" name="PlaceHolder 3"/>
           <p:cNvSpPr>
             <a:spLocks noGrp="1"/>
           </p:cNvSpPr>
@@ -2320,6 +2413,9 @@
                 <a:spcPct val="100000"/>
               </a:lnSpc>
               <a:buNone/>
+              <a:tabLst>
+                <a:tab pos="0" algn="l"/>
+              </a:tabLst>
               <a:defRPr lang="en-US" sz="1800" b="0" u="none" strike="noStrike">
                 <a:solidFill>
                   <a:schemeClr val="dk1"/>
@@ -2337,8 +2433,11 @@
                 <a:spcPct val="100000"/>
               </a:lnSpc>
               <a:buNone/>
+              <a:tabLst>
+                <a:tab pos="0" algn="l"/>
+              </a:tabLst>
             </a:pPr>
-            <a:fld id="{986FE219-8183-4520-BF41-7503D8971FCB}" type="slidenum">
+            <a:fld id="{4FA4F0DB-94D1-410A-A78C-ACF17399E1FE}" type="slidenum">
               <a:rPr lang="en-US" sz="1800" b="0" u="none" strike="noStrike">
                 <a:solidFill>
                   <a:schemeClr val="dk1"/>
@@ -2385,7 +2484,7 @@
       </p:grpSpPr>
       <p:sp>
         <p:nvSpPr>
-          <p:cNvPr id="373" name="PlaceHolder 1"/>
+          <p:cNvPr id="372" name="PlaceHolder 1"/>
           <p:cNvSpPr>
             <a:spLocks noGrp="1"/>
           </p:cNvSpPr>
@@ -2408,7 +2507,7 @@
       </p:sp>
       <p:sp>
         <p:nvSpPr>
-          <p:cNvPr id="374" name="PlaceHolder 2"/>
+          <p:cNvPr id="373" name="PlaceHolder 2"/>
           <p:cNvSpPr>
             <a:spLocks noGrp="1"/>
           </p:cNvSpPr>
@@ -2439,6 +2538,9 @@
                 <a:spcPct val="100000"/>
               </a:lnSpc>
               <a:buNone/>
+              <a:tabLst>
+                <a:tab pos="0" algn="l"/>
+              </a:tabLst>
             </a:pPr>
             <a:r>
               <a:rPr lang="en-US" sz="2000" b="0" u="none" strike="noStrike">
@@ -2464,7 +2566,7 @@
       </p:sp>
       <p:sp>
         <p:nvSpPr>
-          <p:cNvPr id="375" name="PlaceHolder 3"/>
+          <p:cNvPr id="374" name="PlaceHolder 3"/>
           <p:cNvSpPr>
             <a:spLocks noGrp="1"/>
           </p:cNvSpPr>
@@ -2495,6 +2597,9 @@
                 <a:spcPct val="100000"/>
               </a:lnSpc>
               <a:buNone/>
+              <a:tabLst>
+                <a:tab pos="0" algn="l"/>
+              </a:tabLst>
               <a:defRPr lang="en-US" sz="1800" b="0" u="none" strike="noStrike">
                 <a:solidFill>
                   <a:schemeClr val="dk1"/>
@@ -2512,8 +2617,11 @@
                 <a:spcPct val="100000"/>
               </a:lnSpc>
               <a:buNone/>
+              <a:tabLst>
+                <a:tab pos="0" algn="l"/>
+              </a:tabLst>
             </a:pPr>
-            <a:fld id="{1D449D66-2C4F-488B-A282-8735D26C836E}" type="slidenum">
+            <a:fld id="{1721CCCB-89FE-4064-848F-DAA361DE745C}" type="slidenum">
               <a:rPr lang="en-US" sz="1800" b="0" u="none" strike="noStrike">
                 <a:solidFill>
                   <a:schemeClr val="dk1"/>
@@ -2560,7 +2668,7 @@
       </p:grpSpPr>
       <p:sp>
         <p:nvSpPr>
-          <p:cNvPr id="376" name="PlaceHolder 1"/>
+          <p:cNvPr id="375" name="PlaceHolder 1"/>
           <p:cNvSpPr>
             <a:spLocks noGrp="1"/>
           </p:cNvSpPr>
@@ -2583,7 +2691,7 @@
       </p:sp>
       <p:sp>
         <p:nvSpPr>
-          <p:cNvPr id="377" name="PlaceHolder 2"/>
+          <p:cNvPr id="376" name="PlaceHolder 2"/>
           <p:cNvSpPr>
             <a:spLocks noGrp="1"/>
           </p:cNvSpPr>
@@ -2614,6 +2722,9 @@
                 <a:spcPct val="100000"/>
               </a:lnSpc>
               <a:buNone/>
+              <a:tabLst>
+                <a:tab pos="0" algn="l"/>
+              </a:tabLst>
             </a:pPr>
             <a:r>
               <a:rPr lang="es-ES" sz="2000" b="0" u="none" strike="noStrike">
@@ -2639,7 +2750,7 @@
       </p:sp>
       <p:sp>
         <p:nvSpPr>
-          <p:cNvPr id="378" name="PlaceHolder 3"/>
+          <p:cNvPr id="377" name="PlaceHolder 3"/>
           <p:cNvSpPr>
             <a:spLocks noGrp="1"/>
           </p:cNvSpPr>
@@ -2670,6 +2781,9 @@
                 <a:spcPct val="100000"/>
               </a:lnSpc>
               <a:buNone/>
+              <a:tabLst>
+                <a:tab pos="0" algn="l"/>
+              </a:tabLst>
               <a:defRPr lang="en-US" sz="1800" b="0" u="none" strike="noStrike">
                 <a:solidFill>
                   <a:schemeClr val="dk1"/>
@@ -2687,8 +2801,11 @@
                 <a:spcPct val="100000"/>
               </a:lnSpc>
               <a:buNone/>
+              <a:tabLst>
+                <a:tab pos="0" algn="l"/>
+              </a:tabLst>
             </a:pPr>
-            <a:fld id="{A347E245-7660-475D-BC3E-4132ABC702FB}" type="slidenum">
+            <a:fld id="{30038DE5-EEDE-420D-A2C3-10CA653E6EEC}" type="slidenum">
               <a:rPr lang="en-US" sz="1800" b="0" u="none" strike="noStrike">
                 <a:solidFill>
                   <a:schemeClr val="dk1"/>
@@ -2735,7 +2852,7 @@
       </p:grpSpPr>
       <p:sp>
         <p:nvSpPr>
-          <p:cNvPr id="379" name="PlaceHolder 1"/>
+          <p:cNvPr id="378" name="PlaceHolder 1"/>
           <p:cNvSpPr>
             <a:spLocks noGrp="1"/>
           </p:cNvSpPr>
@@ -2758,7 +2875,7 @@
       </p:sp>
       <p:sp>
         <p:nvSpPr>
-          <p:cNvPr id="380" name="PlaceHolder 2"/>
+          <p:cNvPr id="379" name="PlaceHolder 2"/>
           <p:cNvSpPr>
             <a:spLocks noGrp="1"/>
           </p:cNvSpPr>
@@ -2789,6 +2906,9 @@
                 <a:spcPct val="100000"/>
               </a:lnSpc>
               <a:buNone/>
+              <a:tabLst>
+                <a:tab pos="0" algn="l"/>
+              </a:tabLst>
             </a:pPr>
             <a:r>
               <a:rPr lang="es-ES" sz="2000" b="0" u="none" strike="noStrike">
@@ -2814,7 +2934,7 @@
       </p:sp>
       <p:sp>
         <p:nvSpPr>
-          <p:cNvPr id="381" name="PlaceHolder 3"/>
+          <p:cNvPr id="380" name="PlaceHolder 3"/>
           <p:cNvSpPr>
             <a:spLocks noGrp="1"/>
           </p:cNvSpPr>
@@ -2845,6 +2965,9 @@
                 <a:spcPct val="100000"/>
               </a:lnSpc>
               <a:buNone/>
+              <a:tabLst>
+                <a:tab pos="0" algn="l"/>
+              </a:tabLst>
               <a:defRPr lang="en-US" sz="1800" b="0" u="none" strike="noStrike">
                 <a:solidFill>
                   <a:schemeClr val="dk1"/>
@@ -2862,8 +2985,11 @@
                 <a:spcPct val="100000"/>
               </a:lnSpc>
               <a:buNone/>
+              <a:tabLst>
+                <a:tab pos="0" algn="l"/>
+              </a:tabLst>
             </a:pPr>
-            <a:fld id="{0F7D7AD3-8A23-40FD-9F8F-C0BB913CDDC2}" type="slidenum">
+            <a:fld id="{800A83D3-EEE9-429C-9B6D-A1727503771B}" type="slidenum">
               <a:rPr lang="en-US" sz="1800" b="0" u="none" strike="noStrike">
                 <a:solidFill>
                   <a:schemeClr val="dk1"/>
@@ -2960,7 +3086,7 @@
         <p:spPr>
           <a:xfrm>
             <a:off x="457200" y="205200"/>
-            <a:ext cx="8229240" cy="858600"/>
+            <a:ext cx="8228880" cy="858240"/>
           </a:xfrm>
           <a:prstGeom prst="rect">
             <a:avLst/>
@@ -2976,7 +3102,13 @@
           </a:bodyPr>
           <a:lstStyle>
             <a:lvl1pPr indent="0" algn="l">
+              <a:lnSpc>
+                <a:spcPct val="100000"/>
+              </a:lnSpc>
               <a:buNone/>
+              <a:tabLst>
+                <a:tab pos="0" algn="l"/>
+              </a:tabLst>
               <a:defRPr lang="es-ES" sz="1800" b="0" u="none" strike="noStrike">
                 <a:solidFill>
                   <a:schemeClr val="dk1"/>
@@ -2989,7 +3121,13 @@
           </a:lstStyle>
           <a:p>
             <a:pPr indent="0" algn="l">
+              <a:lnSpc>
+                <a:spcPct val="100000"/>
+              </a:lnSpc>
               <a:buNone/>
+              <a:tabLst>
+                <a:tab pos="0" algn="l"/>
+              </a:tabLst>
             </a:pPr>
             <a:r>
               <a:rPr lang="es-ES" sz="1800" b="0" u="none" strike="noStrike">
@@ -3026,7 +3164,7 @@
         <p:spPr>
           <a:xfrm>
             <a:off x="457200" y="1203480"/>
-            <a:ext cx="8229240" cy="2982960"/>
+            <a:ext cx="8228880" cy="2982600"/>
           </a:xfrm>
           <a:prstGeom prst="rect">
             <a:avLst/>
@@ -3038,10 +3176,13 @@
         </p:spPr>
         <p:txBody>
           <a:bodyPr lIns="0" tIns="0" rIns="0" bIns="0" anchor="t">
-            <a:normAutofit/>
+            <a:normAutofit lnSpcReduction="9999"/>
           </a:bodyPr>
           <a:lstStyle>
             <a:lvl1pPr algn="l">
+              <a:lnSpc>
+                <a:spcPct val="100000"/>
+              </a:lnSpc>
               <a:spcBef>
                 <a:spcPts val="1417"/>
               </a:spcBef>
@@ -3061,6 +3202,9 @@
               </a:defRPr>
             </a:lvl1pPr>
             <a:lvl2pPr lvl="1" algn="l">
+              <a:lnSpc>
+                <a:spcPct val="100000"/>
+              </a:lnSpc>
               <a:spcBef>
                 <a:spcPts val="1134"/>
               </a:spcBef>
@@ -3080,6 +3224,9 @@
               </a:defRPr>
             </a:lvl2pPr>
             <a:lvl3pPr lvl="2" algn="l">
+              <a:lnSpc>
+                <a:spcPct val="100000"/>
+              </a:lnSpc>
               <a:spcBef>
                 <a:spcPts val="850"/>
               </a:spcBef>
@@ -3099,6 +3246,9 @@
               </a:defRPr>
             </a:lvl3pPr>
             <a:lvl4pPr lvl="3" algn="l">
+              <a:lnSpc>
+                <a:spcPct val="100000"/>
+              </a:lnSpc>
               <a:spcBef>
                 <a:spcPts val="567"/>
               </a:spcBef>
@@ -3118,6 +3268,9 @@
               </a:defRPr>
             </a:lvl4pPr>
             <a:lvl5pPr lvl="4" algn="l">
+              <a:lnSpc>
+                <a:spcPct val="100000"/>
+              </a:lnSpc>
               <a:spcBef>
                 <a:spcPts val="283"/>
               </a:spcBef>
@@ -3137,6 +3290,9 @@
               </a:defRPr>
             </a:lvl5pPr>
             <a:lvl6pPr lvl="5" algn="l">
+              <a:lnSpc>
+                <a:spcPct val="100000"/>
+              </a:lnSpc>
               <a:spcBef>
                 <a:spcPts val="283"/>
               </a:spcBef>
@@ -3156,6 +3312,9 @@
               </a:defRPr>
             </a:lvl6pPr>
             <a:lvl7pPr lvl="6" algn="l">
+              <a:lnSpc>
+                <a:spcPct val="100000"/>
+              </a:lnSpc>
               <a:spcBef>
                 <a:spcPts val="283"/>
               </a:spcBef>
@@ -3177,6 +3336,9 @@
           </a:lstStyle>
           <a:p>
             <a:pPr marL="432000" indent="-324000" algn="l">
+              <a:lnSpc>
+                <a:spcPct val="100000"/>
+              </a:lnSpc>
               <a:spcBef>
                 <a:spcPts val="1417"/>
               </a:spcBef>
@@ -3209,6 +3371,9 @@
           </a:p>
           <a:p>
             <a:pPr marL="864000" lvl="1" indent="-324000" algn="l">
+              <a:lnSpc>
+                <a:spcPct val="100000"/>
+              </a:lnSpc>
               <a:spcBef>
                 <a:spcPts val="1134"/>
               </a:spcBef>
@@ -3241,6 +3406,9 @@
           </a:p>
           <a:p>
             <a:pPr marL="1296000" lvl="2" indent="-288000" algn="l">
+              <a:lnSpc>
+                <a:spcPct val="100000"/>
+              </a:lnSpc>
               <a:spcBef>
                 <a:spcPts val="850"/>
               </a:spcBef>
@@ -3273,6 +3441,9 @@
           </a:p>
           <a:p>
             <a:pPr marL="1728000" lvl="3" indent="-216000" algn="l">
+              <a:lnSpc>
+                <a:spcPct val="100000"/>
+              </a:lnSpc>
               <a:spcBef>
                 <a:spcPts val="567"/>
               </a:spcBef>
@@ -3305,6 +3476,9 @@
           </a:p>
           <a:p>
             <a:pPr marL="2160000" lvl="4" indent="-216000" algn="l">
+              <a:lnSpc>
+                <a:spcPct val="100000"/>
+              </a:lnSpc>
               <a:spcBef>
                 <a:spcPts val="283"/>
               </a:spcBef>
@@ -3337,6 +3511,9 @@
           </a:p>
           <a:p>
             <a:pPr marL="2592000" lvl="5" indent="-216000" algn="l">
+              <a:lnSpc>
+                <a:spcPct val="100000"/>
+              </a:lnSpc>
               <a:spcBef>
                 <a:spcPts val="283"/>
               </a:spcBef>
@@ -3369,6 +3546,9 @@
           </a:p>
           <a:p>
             <a:pPr marL="3024000" lvl="6" indent="-216000" algn="l">
+              <a:lnSpc>
+                <a:spcPct val="100000"/>
+              </a:lnSpc>
               <a:spcBef>
                 <a:spcPts val="283"/>
               </a:spcBef>
@@ -3446,7 +3626,7 @@
         <p:spPr>
           <a:xfrm>
             <a:off x="548640" y="365760"/>
-            <a:ext cx="8046360" cy="731160"/>
+            <a:ext cx="8046000" cy="730800"/>
           </a:xfrm>
           <a:prstGeom prst="rect">
             <a:avLst/>
@@ -3462,7 +3642,13 @@
           </a:bodyPr>
           <a:lstStyle>
             <a:lvl1pPr indent="0" algn="l">
+              <a:lnSpc>
+                <a:spcPct val="100000"/>
+              </a:lnSpc>
               <a:buNone/>
+              <a:tabLst>
+                <a:tab pos="0" algn="l"/>
+              </a:tabLst>
               <a:defRPr lang="es-ES" sz="3600" b="0" u="none" strike="noStrike">
                 <a:solidFill>
                   <a:schemeClr val="dk1"/>
@@ -3475,7 +3661,13 @@
           </a:lstStyle>
           <a:p>
             <a:pPr indent="0" algn="l">
+              <a:lnSpc>
+                <a:spcPct val="100000"/>
+              </a:lnSpc>
               <a:buNone/>
+              <a:tabLst>
+                <a:tab pos="0" algn="l"/>
+              </a:tabLst>
             </a:pPr>
             <a:r>
               <a:rPr lang="es-ES" sz="3600" b="0" u="none" strike="noStrike">
@@ -3512,7 +3704,7 @@
         <p:spPr>
           <a:xfrm>
             <a:off x="8229600" y="4754880"/>
-            <a:ext cx="456840" cy="228240"/>
+            <a:ext cx="456480" cy="227880"/>
           </a:xfrm>
           <a:prstGeom prst="rect">
             <a:avLst/>
@@ -3532,6 +3724,9 @@
                 <a:spcPct val="100000"/>
               </a:lnSpc>
               <a:buNone/>
+              <a:tabLst>
+                <a:tab pos="0" algn="l"/>
+              </a:tabLst>
               <a:defRPr lang="en-US" sz="1000" b="0" u="none" strike="noStrike">
                 <a:solidFill>
                   <a:srgbClr val="94A3B8"/>
@@ -3548,8 +3743,11 @@
                 <a:spcPct val="100000"/>
               </a:lnSpc>
               <a:buNone/>
+              <a:tabLst>
+                <a:tab pos="0" algn="l"/>
+              </a:tabLst>
             </a:pPr>
-            <a:fld id="{323124F7-8EE7-4DA2-AA37-62DB544D6BD1}" type="slidenum">
+            <a:fld id="{22ED2BBA-AF46-4357-BD0A-6A31892619C4}" type="slidenum">
               <a:rPr lang="en-US" sz="1000" b="0" u="none" strike="noStrike">
                 <a:solidFill>
                   <a:srgbClr val="94A3B8"/>
@@ -3584,7 +3782,7 @@
         <p:spPr>
           <a:xfrm>
             <a:off x="546120" y="4737240"/>
-            <a:ext cx="304560" cy="244800"/>
+            <a:ext cx="304200" cy="244440"/>
           </a:xfrm>
           <a:prstGeom prst="rect">
             <a:avLst/>
@@ -3604,7 +3802,7 @@
         <p:spPr>
           <a:xfrm>
             <a:off x="888840" y="4711680"/>
-            <a:ext cx="734760" cy="184320"/>
+            <a:ext cx="734400" cy="183960"/>
           </a:xfrm>
           <a:prstGeom prst="rect">
             <a:avLst/>
@@ -3709,7 +3907,7 @@
         <p:spPr>
           <a:xfrm>
             <a:off x="457200" y="1203480"/>
-            <a:ext cx="8229240" cy="2982960"/>
+            <a:ext cx="8228880" cy="2982600"/>
           </a:xfrm>
           <a:prstGeom prst="rect">
             <a:avLst/>
@@ -3721,10 +3919,13 @@
         </p:spPr>
         <p:txBody>
           <a:bodyPr lIns="0" tIns="0" rIns="0" bIns="0" anchor="t">
-            <a:normAutofit/>
+            <a:normAutofit lnSpcReduction="9999"/>
           </a:bodyPr>
           <a:lstStyle>
             <a:lvl1pPr algn="l">
+              <a:lnSpc>
+                <a:spcPct val="100000"/>
+              </a:lnSpc>
               <a:spcBef>
                 <a:spcPts val="1417"/>
               </a:spcBef>
@@ -3744,6 +3945,9 @@
               </a:defRPr>
             </a:lvl1pPr>
             <a:lvl2pPr lvl="1" algn="l">
+              <a:lnSpc>
+                <a:spcPct val="100000"/>
+              </a:lnSpc>
               <a:spcBef>
                 <a:spcPts val="1134"/>
               </a:spcBef>
@@ -3763,6 +3967,9 @@
               </a:defRPr>
             </a:lvl2pPr>
             <a:lvl3pPr lvl="2" algn="l">
+              <a:lnSpc>
+                <a:spcPct val="100000"/>
+              </a:lnSpc>
               <a:spcBef>
                 <a:spcPts val="850"/>
               </a:spcBef>
@@ -3782,6 +3989,9 @@
               </a:defRPr>
             </a:lvl3pPr>
             <a:lvl4pPr lvl="3" algn="l">
+              <a:lnSpc>
+                <a:spcPct val="100000"/>
+              </a:lnSpc>
               <a:spcBef>
                 <a:spcPts val="567"/>
               </a:spcBef>
@@ -3801,6 +4011,9 @@
               </a:defRPr>
             </a:lvl4pPr>
             <a:lvl5pPr lvl="4" algn="l">
+              <a:lnSpc>
+                <a:spcPct val="100000"/>
+              </a:lnSpc>
               <a:spcBef>
                 <a:spcPts val="283"/>
               </a:spcBef>
@@ -3820,6 +4033,9 @@
               </a:defRPr>
             </a:lvl5pPr>
             <a:lvl6pPr lvl="5" algn="l">
+              <a:lnSpc>
+                <a:spcPct val="100000"/>
+              </a:lnSpc>
               <a:spcBef>
                 <a:spcPts val="283"/>
               </a:spcBef>
@@ -3839,6 +4055,9 @@
               </a:defRPr>
             </a:lvl6pPr>
             <a:lvl7pPr lvl="6" algn="l">
+              <a:lnSpc>
+                <a:spcPct val="100000"/>
+              </a:lnSpc>
               <a:spcBef>
                 <a:spcPts val="283"/>
               </a:spcBef>
@@ -3860,6 +4079,9 @@
           </a:lstStyle>
           <a:p>
             <a:pPr marL="432000" indent="-324000" algn="l">
+              <a:lnSpc>
+                <a:spcPct val="100000"/>
+              </a:lnSpc>
               <a:spcBef>
                 <a:spcPts val="1417"/>
               </a:spcBef>
@@ -3892,6 +4114,9 @@
           </a:p>
           <a:p>
             <a:pPr marL="864000" lvl="1" indent="-324000" algn="l">
+              <a:lnSpc>
+                <a:spcPct val="100000"/>
+              </a:lnSpc>
               <a:spcBef>
                 <a:spcPts val="1134"/>
               </a:spcBef>
@@ -3924,6 +4149,9 @@
           </a:p>
           <a:p>
             <a:pPr marL="1296000" lvl="2" indent="-288000" algn="l">
+              <a:lnSpc>
+                <a:spcPct val="100000"/>
+              </a:lnSpc>
               <a:spcBef>
                 <a:spcPts val="850"/>
               </a:spcBef>
@@ -3956,6 +4184,9 @@
           </a:p>
           <a:p>
             <a:pPr marL="1728000" lvl="3" indent="-216000" algn="l">
+              <a:lnSpc>
+                <a:spcPct val="100000"/>
+              </a:lnSpc>
               <a:spcBef>
                 <a:spcPts val="567"/>
               </a:spcBef>
@@ -3988,6 +4219,9 @@
           </a:p>
           <a:p>
             <a:pPr marL="2160000" lvl="4" indent="-216000" algn="l">
+              <a:lnSpc>
+                <a:spcPct val="100000"/>
+              </a:lnSpc>
               <a:spcBef>
                 <a:spcPts val="283"/>
               </a:spcBef>
@@ -4020,6 +4254,9 @@
           </a:p>
           <a:p>
             <a:pPr marL="2592000" lvl="5" indent="-216000" algn="l">
+              <a:lnSpc>
+                <a:spcPct val="100000"/>
+              </a:lnSpc>
               <a:spcBef>
                 <a:spcPts val="283"/>
               </a:spcBef>
@@ -4052,6 +4289,9 @@
           </a:p>
           <a:p>
             <a:pPr marL="3024000" lvl="6" indent="-216000" algn="l">
+              <a:lnSpc>
+                <a:spcPct val="100000"/>
+              </a:lnSpc>
               <a:spcBef>
                 <a:spcPts val="283"/>
               </a:spcBef>
@@ -4146,7 +4386,7 @@
         <p:spPr>
           <a:xfrm>
             <a:off x="6035040" y="-1371600"/>
-            <a:ext cx="4205880" cy="4205880"/>
+            <a:ext cx="4205520" cy="4205520"/>
           </a:xfrm>
           <a:prstGeom prst="ellipse">
             <a:avLst/>
@@ -4192,7 +4432,7 @@
         <p:spPr>
           <a:xfrm>
             <a:off x="-1280160" y="3200400"/>
-            <a:ext cx="4023000" cy="4023000"/>
+            <a:ext cx="4022640" cy="4022640"/>
           </a:xfrm>
           <a:prstGeom prst="ellipse">
             <a:avLst/>
@@ -4238,7 +4478,7 @@
         <p:spPr>
           <a:xfrm>
             <a:off x="4206240" y="3931920"/>
-            <a:ext cx="2011320" cy="2011320"/>
+            <a:ext cx="2010960" cy="2010960"/>
           </a:xfrm>
           <a:prstGeom prst="ellipse">
             <a:avLst/>
@@ -4284,7 +4524,7 @@
         <p:spPr>
           <a:xfrm>
             <a:off x="548640" y="1234440"/>
-            <a:ext cx="4937400" cy="1096920"/>
+            <a:ext cx="4937040" cy="1096560"/>
           </a:xfrm>
           <a:prstGeom prst="rect">
             <a:avLst/>
@@ -4393,7 +4633,7 @@
         <p:spPr>
           <a:xfrm>
             <a:off x="548640" y="2423160"/>
-            <a:ext cx="4754520" cy="456840"/>
+            <a:ext cx="4754160" cy="456480"/>
           </a:xfrm>
           <a:prstGeom prst="rect">
             <a:avLst/>
@@ -4453,7 +4693,7 @@
         <p:spPr>
           <a:xfrm>
             <a:off x="548640" y="4069080"/>
-            <a:ext cx="4937400" cy="319680"/>
+            <a:ext cx="4937040" cy="319320"/>
           </a:xfrm>
           <a:prstGeom prst="rect">
             <a:avLst/>
@@ -4513,7 +4753,7 @@
         <p:spPr>
           <a:xfrm rot="21240000">
             <a:off x="5806440" y="868680"/>
-            <a:ext cx="1325520" cy="1325520"/>
+            <a:ext cx="1325160" cy="1325160"/>
           </a:xfrm>
           <a:prstGeom prst="roundRect">
             <a:avLst>
@@ -4569,7 +4809,7 @@
         <p:spPr>
           <a:xfrm>
             <a:off x="6080760" y="1143000"/>
-            <a:ext cx="776880" cy="776880"/>
+            <a:ext cx="776520" cy="776520"/>
           </a:xfrm>
           <a:prstGeom prst="ellipse">
             <a:avLst/>
@@ -4619,7 +4859,7 @@
         <p:spPr>
           <a:xfrm>
             <a:off x="6275160" y="1337400"/>
-            <a:ext cx="388440" cy="388440"/>
+            <a:ext cx="388080" cy="388080"/>
           </a:xfrm>
           <a:prstGeom prst="rect">
             <a:avLst/>
@@ -4638,8 +4878,8 @@
         </p:nvSpPr>
         <p:spPr>
           <a:xfrm rot="300000">
-            <a:off x="7269480" y="1417320"/>
-            <a:ext cx="1325520" cy="1325520"/>
+            <a:off x="7269120" y="1417320"/>
+            <a:ext cx="1325160" cy="1325160"/>
           </a:xfrm>
           <a:prstGeom prst="roundRect">
             <a:avLst>
@@ -4695,7 +4935,7 @@
         <p:spPr>
           <a:xfrm>
             <a:off x="7543800" y="1691640"/>
-            <a:ext cx="776880" cy="776880"/>
+            <a:ext cx="776520" cy="776520"/>
           </a:xfrm>
           <a:prstGeom prst="ellipse">
             <a:avLst/>
@@ -4745,7 +4985,7 @@
         <p:spPr>
           <a:xfrm>
             <a:off x="7738200" y="1886040"/>
-            <a:ext cx="388440" cy="388440"/>
+            <a:ext cx="388080" cy="388080"/>
           </a:xfrm>
           <a:prstGeom prst="rect">
             <a:avLst/>
@@ -4764,8 +5004,8 @@
         </p:nvSpPr>
         <p:spPr>
           <a:xfrm rot="240000">
-            <a:off x="5577840" y="2514240"/>
-            <a:ext cx="1325520" cy="1325520"/>
+            <a:off x="5577840" y="2513880"/>
+            <a:ext cx="1325160" cy="1325160"/>
           </a:xfrm>
           <a:prstGeom prst="roundRect">
             <a:avLst>
@@ -4821,7 +5061,7 @@
         <p:spPr>
           <a:xfrm>
             <a:off x="5852160" y="2788920"/>
-            <a:ext cx="776880" cy="776880"/>
+            <a:ext cx="776520" cy="776520"/>
           </a:xfrm>
           <a:prstGeom prst="ellipse">
             <a:avLst/>
@@ -4871,7 +5111,7 @@
         <p:spPr>
           <a:xfrm>
             <a:off x="6046560" y="2983320"/>
-            <a:ext cx="388440" cy="388440"/>
+            <a:ext cx="388080" cy="388080"/>
           </a:xfrm>
           <a:prstGeom prst="rect">
             <a:avLst/>
@@ -4890,8 +5130,8 @@
         </p:nvSpPr>
         <p:spPr>
           <a:xfrm rot="21300000">
-            <a:off x="7040880" y="3063240"/>
-            <a:ext cx="1325520" cy="1325520"/>
+            <a:off x="7040880" y="3062880"/>
+            <a:ext cx="1325160" cy="1325160"/>
           </a:xfrm>
           <a:prstGeom prst="roundRect">
             <a:avLst>
@@ -4947,7 +5187,7 @@
         <p:spPr>
           <a:xfrm>
             <a:off x="7315200" y="3337560"/>
-            <a:ext cx="776880" cy="776880"/>
+            <a:ext cx="776520" cy="776520"/>
           </a:xfrm>
           <a:prstGeom prst="ellipse">
             <a:avLst/>
@@ -4997,7 +5237,7 @@
         <p:spPr>
           <a:xfrm>
             <a:off x="7509600" y="3531960"/>
-            <a:ext cx="388440" cy="388440"/>
+            <a:ext cx="388080" cy="388080"/>
           </a:xfrm>
           <a:prstGeom prst="rect">
             <a:avLst/>
@@ -5021,7 +5261,7 @@
         <p:spPr>
           <a:xfrm>
             <a:off x="546120" y="279360"/>
-            <a:ext cx="1142640" cy="919080"/>
+            <a:ext cx="1142280" cy="918720"/>
           </a:xfrm>
           <a:prstGeom prst="rect">
             <a:avLst/>
@@ -5064,14 +5304,14 @@
       </p:grpSpPr>
       <p:sp>
         <p:nvSpPr>
-          <p:cNvPr id="218" name="Mancha azul"/>
+          <p:cNvPr id="217" name="Mancha azul"/>
           <p:cNvSpPr/>
           <p:nvPr/>
         </p:nvSpPr>
         <p:spPr>
           <a:xfrm>
             <a:off x="7132320" y="-1188720"/>
-            <a:ext cx="2925720" cy="2925720"/>
+            <a:ext cx="2925360" cy="2925360"/>
           </a:xfrm>
           <a:prstGeom prst="ellipse">
             <a:avLst/>
@@ -5110,7 +5350,7 @@
       </p:sp>
       <p:sp>
         <p:nvSpPr>
-          <p:cNvPr id="219" name="PlaceHolder 1"/>
+          <p:cNvPr id="218" name="PlaceHolder 1"/>
           <p:cNvSpPr>
             <a:spLocks noGrp="1"/>
           </p:cNvSpPr>
@@ -5121,7 +5361,7 @@
         <p:spPr>
           <a:xfrm>
             <a:off x="548640" y="365760"/>
-            <a:ext cx="8046360" cy="731160"/>
+            <a:ext cx="8046000" cy="730800"/>
           </a:xfrm>
           <a:prstGeom prst="rect">
             <a:avLst/>
@@ -5169,14 +5409,14 @@
       </p:sp>
       <p:sp>
         <p:nvSpPr>
-          <p:cNvPr id="220" name="Tarjeta Frontend"/>
+          <p:cNvPr id="219" name="Tarjeta Frontend"/>
           <p:cNvSpPr/>
           <p:nvPr/>
         </p:nvSpPr>
         <p:spPr>
           <a:xfrm>
             <a:off x="548640" y="1325880"/>
-            <a:ext cx="2514240" cy="1599840"/>
+            <a:ext cx="2513880" cy="1599480"/>
           </a:xfrm>
           <a:prstGeom prst="roundRect">
             <a:avLst>
@@ -5225,14 +5465,14 @@
       </p:sp>
       <p:sp>
         <p:nvSpPr>
-          <p:cNvPr id="221" name="Icono Frontend (fondo)"/>
+          <p:cNvPr id="220" name="Icono Frontend (fondo)"/>
           <p:cNvSpPr/>
           <p:nvPr/>
         </p:nvSpPr>
         <p:spPr>
           <a:xfrm>
             <a:off x="731520" y="1490400"/>
-            <a:ext cx="456840" cy="456840"/>
+            <a:ext cx="456480" cy="456480"/>
           </a:xfrm>
           <a:prstGeom prst="ellipse">
             <a:avLst/>
@@ -5271,7 +5511,7 @@
       </p:sp>
       <p:pic>
         <p:nvPicPr>
-          <p:cNvPr id="222" name="Icono Frontend" descr="Icono Frontend"/>
+          <p:cNvPr id="221" name="Icono Frontend" descr="Icono Frontend"/>
           <p:cNvPicPr/>
           <p:nvPr/>
         </p:nvPicPr>
@@ -5282,7 +5522,7 @@
         <p:spPr>
           <a:xfrm>
             <a:off x="846000" y="1604880"/>
-            <a:ext cx="228240" cy="228240"/>
+            <a:ext cx="227880" cy="227880"/>
           </a:xfrm>
           <a:prstGeom prst="rect">
             <a:avLst/>
@@ -5295,14 +5535,14 @@
       </p:pic>
       <p:sp>
         <p:nvSpPr>
-          <p:cNvPr id="223" name="Título Frontend"/>
+          <p:cNvPr id="222" name="Título Frontend"/>
           <p:cNvSpPr/>
           <p:nvPr/>
         </p:nvSpPr>
         <p:spPr>
           <a:xfrm>
             <a:off x="1325880" y="1490400"/>
-            <a:ext cx="1599840" cy="456840"/>
+            <a:ext cx="1599480" cy="456480"/>
           </a:xfrm>
           <a:prstGeom prst="rect">
             <a:avLst/>
@@ -5355,14 +5595,14 @@
       </p:sp>
       <p:sp>
         <p:nvSpPr>
-          <p:cNvPr id="224" name="Etiqueta React 18"/>
+          <p:cNvPr id="223" name="Etiqueta React 18"/>
           <p:cNvSpPr/>
           <p:nvPr/>
         </p:nvSpPr>
         <p:spPr>
           <a:xfrm>
             <a:off x="731520" y="2103120"/>
-            <a:ext cx="849960" cy="273960"/>
+            <a:ext cx="849600" cy="273600"/>
           </a:xfrm>
           <a:prstGeom prst="roundRect">
             <a:avLst>
@@ -5426,14 +5666,14 @@
       </p:sp>
       <p:sp>
         <p:nvSpPr>
-          <p:cNvPr id="225" name="Etiqueta TypeScript"/>
+          <p:cNvPr id="224" name="Etiqueta TypeScript"/>
           <p:cNvSpPr/>
           <p:nvPr/>
         </p:nvSpPr>
         <p:spPr>
           <a:xfrm>
             <a:off x="1654920" y="2103120"/>
-            <a:ext cx="996480" cy="273960"/>
+            <a:ext cx="996120" cy="273600"/>
           </a:xfrm>
           <a:prstGeom prst="roundRect">
             <a:avLst>
@@ -5497,14 +5737,14 @@
       </p:sp>
       <p:sp>
         <p:nvSpPr>
-          <p:cNvPr id="226" name="Etiqueta Vite"/>
+          <p:cNvPr id="225" name="Etiqueta Vite"/>
           <p:cNvSpPr/>
           <p:nvPr/>
         </p:nvSpPr>
         <p:spPr>
           <a:xfrm>
             <a:off x="731520" y="2450520"/>
-            <a:ext cx="566640" cy="273960"/>
+            <a:ext cx="566280" cy="273600"/>
           </a:xfrm>
           <a:prstGeom prst="roundRect">
             <a:avLst>
@@ -5568,14 +5808,14 @@
       </p:sp>
       <p:sp>
         <p:nvSpPr>
-          <p:cNvPr id="227" name="Etiqueta Tailwind CSS"/>
+          <p:cNvPr id="226" name="Etiqueta Tailwind CSS"/>
           <p:cNvSpPr/>
           <p:nvPr/>
         </p:nvSpPr>
         <p:spPr>
           <a:xfrm>
             <a:off x="1371600" y="2450520"/>
-            <a:ext cx="1142640" cy="273960"/>
+            <a:ext cx="1142280" cy="273600"/>
           </a:xfrm>
           <a:prstGeom prst="roundRect">
             <a:avLst>
@@ -5639,14 +5879,14 @@
       </p:sp>
       <p:sp>
         <p:nvSpPr>
-          <p:cNvPr id="228" name="Tarjeta Backend"/>
+          <p:cNvPr id="227" name="Tarjeta Backend"/>
           <p:cNvSpPr/>
           <p:nvPr/>
         </p:nvSpPr>
         <p:spPr>
           <a:xfrm>
             <a:off x="3314880" y="1325880"/>
-            <a:ext cx="2514240" cy="1599840"/>
+            <a:ext cx="2513880" cy="1599480"/>
           </a:xfrm>
           <a:prstGeom prst="roundRect">
             <a:avLst>
@@ -5695,14 +5935,14 @@
       </p:sp>
       <p:sp>
         <p:nvSpPr>
-          <p:cNvPr id="229" name="Icono Backend (fondo)"/>
+          <p:cNvPr id="228" name="Icono Backend (fondo)"/>
           <p:cNvSpPr/>
           <p:nvPr/>
         </p:nvSpPr>
         <p:spPr>
           <a:xfrm>
             <a:off x="3497760" y="1490400"/>
-            <a:ext cx="456840" cy="456840"/>
+            <a:ext cx="456480" cy="456480"/>
           </a:xfrm>
           <a:prstGeom prst="ellipse">
             <a:avLst/>
@@ -5741,7 +5981,7 @@
       </p:sp>
       <p:pic>
         <p:nvPicPr>
-          <p:cNvPr id="230" name="Icono Backend" descr="Icono Backend"/>
+          <p:cNvPr id="229" name="Icono Backend" descr="Icono Backend"/>
           <p:cNvPicPr/>
           <p:nvPr/>
         </p:nvPicPr>
@@ -5752,7 +5992,7 @@
         <p:spPr>
           <a:xfrm>
             <a:off x="3611880" y="1604880"/>
-            <a:ext cx="228240" cy="228240"/>
+            <a:ext cx="227880" cy="227880"/>
           </a:xfrm>
           <a:prstGeom prst="rect">
             <a:avLst/>
@@ -5765,14 +6005,14 @@
       </p:pic>
       <p:sp>
         <p:nvSpPr>
-          <p:cNvPr id="231" name="Título Backend"/>
+          <p:cNvPr id="230" name="Título Backend"/>
           <p:cNvSpPr/>
           <p:nvPr/>
         </p:nvSpPr>
         <p:spPr>
           <a:xfrm>
             <a:off x="4092120" y="1490400"/>
-            <a:ext cx="1599840" cy="456840"/>
+            <a:ext cx="1599480" cy="456480"/>
           </a:xfrm>
           <a:prstGeom prst="rect">
             <a:avLst/>
@@ -5825,14 +6065,14 @@
       </p:sp>
       <p:sp>
         <p:nvSpPr>
-          <p:cNvPr id="232" name="Etiqueta .NET 10"/>
+          <p:cNvPr id="231" name="Etiqueta .NET 10"/>
           <p:cNvSpPr/>
           <p:nvPr/>
         </p:nvSpPr>
         <p:spPr>
           <a:xfrm>
             <a:off x="3497760" y="2103120"/>
-            <a:ext cx="776880" cy="273960"/>
+            <a:ext cx="776520" cy="273600"/>
           </a:xfrm>
           <a:prstGeom prst="roundRect">
             <a:avLst>
@@ -5896,14 +6136,14 @@
       </p:sp>
       <p:sp>
         <p:nvSpPr>
-          <p:cNvPr id="233" name="Etiqueta ASP.NET Core"/>
+          <p:cNvPr id="232" name="Etiqueta ASP.NET Core"/>
           <p:cNvSpPr/>
           <p:nvPr/>
         </p:nvSpPr>
         <p:spPr>
           <a:xfrm>
             <a:off x="4348080" y="2103120"/>
-            <a:ext cx="1168200" cy="273960"/>
+            <a:ext cx="1167840" cy="273600"/>
           </a:xfrm>
           <a:prstGeom prst="roundRect">
             <a:avLst>
@@ -5967,14 +6207,14 @@
       </p:sp>
       <p:sp>
         <p:nvSpPr>
-          <p:cNvPr id="234" name="Etiqueta EF Core"/>
+          <p:cNvPr id="233" name="Etiqueta EF Core"/>
           <p:cNvSpPr/>
           <p:nvPr/>
         </p:nvSpPr>
         <p:spPr>
           <a:xfrm>
             <a:off x="4838760" y="2450520"/>
-            <a:ext cx="774360" cy="273960"/>
+            <a:ext cx="774000" cy="273600"/>
           </a:xfrm>
           <a:prstGeom prst="roundRect">
             <a:avLst>
@@ -6038,14 +6278,14 @@
       </p:sp>
       <p:sp>
         <p:nvSpPr>
-          <p:cNvPr id="235" name="Etiqueta MediatR"/>
+          <p:cNvPr id="234" name="Etiqueta MediatR"/>
           <p:cNvSpPr/>
           <p:nvPr/>
         </p:nvSpPr>
         <p:spPr>
           <a:xfrm>
             <a:off x="3492360" y="2450520"/>
-            <a:ext cx="1294920" cy="273960"/>
+            <a:ext cx="1294560" cy="273600"/>
           </a:xfrm>
           <a:prstGeom prst="roundRect">
             <a:avLst>
@@ -6109,14 +6349,14 @@
       </p:sp>
       <p:sp>
         <p:nvSpPr>
-          <p:cNvPr id="236" name="Tarjeta Datos"/>
+          <p:cNvPr id="235" name="Tarjeta Datos"/>
           <p:cNvSpPr/>
           <p:nvPr/>
         </p:nvSpPr>
         <p:spPr>
           <a:xfrm>
             <a:off x="6080760" y="1325880"/>
-            <a:ext cx="2514240" cy="1599840"/>
+            <a:ext cx="2513880" cy="1599480"/>
           </a:xfrm>
           <a:prstGeom prst="roundRect">
             <a:avLst>
@@ -6165,14 +6405,14 @@
       </p:sp>
       <p:sp>
         <p:nvSpPr>
-          <p:cNvPr id="237" name="Icono Datos (fondo)"/>
+          <p:cNvPr id="236" name="Icono Datos (fondo)"/>
           <p:cNvSpPr/>
           <p:nvPr/>
         </p:nvSpPr>
         <p:spPr>
           <a:xfrm>
             <a:off x="6263640" y="1490400"/>
-            <a:ext cx="456840" cy="456840"/>
+            <a:ext cx="456480" cy="456480"/>
           </a:xfrm>
           <a:prstGeom prst="ellipse">
             <a:avLst/>
@@ -6211,7 +6451,7 @@
       </p:sp>
       <p:pic>
         <p:nvPicPr>
-          <p:cNvPr id="238" name="Icono Datos" descr="Icono Datos"/>
+          <p:cNvPr id="237" name="Icono Datos" descr="Icono Datos"/>
           <p:cNvPicPr/>
           <p:nvPr/>
         </p:nvPicPr>
@@ -6222,7 +6462,7 @@
         <p:spPr>
           <a:xfrm>
             <a:off x="6378120" y="1604880"/>
-            <a:ext cx="228240" cy="228240"/>
+            <a:ext cx="227880" cy="227880"/>
           </a:xfrm>
           <a:prstGeom prst="rect">
             <a:avLst/>
@@ -6235,14 +6475,14 @@
       </p:pic>
       <p:sp>
         <p:nvSpPr>
-          <p:cNvPr id="239" name="Título Datos"/>
+          <p:cNvPr id="238" name="Título Datos"/>
           <p:cNvSpPr/>
           <p:nvPr/>
         </p:nvSpPr>
         <p:spPr>
           <a:xfrm>
             <a:off x="6858000" y="1490400"/>
-            <a:ext cx="1599840" cy="456840"/>
+            <a:ext cx="1599480" cy="456480"/>
           </a:xfrm>
           <a:prstGeom prst="rect">
             <a:avLst/>
@@ -6295,14 +6535,14 @@
       </p:sp>
       <p:sp>
         <p:nvSpPr>
-          <p:cNvPr id="240" name="Etiqueta PostgreSQL 17"/>
+          <p:cNvPr id="239" name="Etiqueta PostgreSQL 17"/>
           <p:cNvSpPr/>
           <p:nvPr/>
         </p:nvSpPr>
         <p:spPr>
           <a:xfrm>
             <a:off x="6263640" y="2103120"/>
-            <a:ext cx="1215720" cy="273960"/>
+            <a:ext cx="1215360" cy="273600"/>
           </a:xfrm>
           <a:prstGeom prst="roundRect">
             <a:avLst>
@@ -6366,14 +6606,14 @@
       </p:sp>
       <p:sp>
         <p:nvSpPr>
-          <p:cNvPr id="241" name="Etiqueta Docker"/>
+          <p:cNvPr id="240" name="Etiqueta Docker"/>
           <p:cNvSpPr/>
           <p:nvPr/>
         </p:nvSpPr>
         <p:spPr>
           <a:xfrm>
             <a:off x="7552800" y="2103120"/>
-            <a:ext cx="703800" cy="273960"/>
+            <a:ext cx="703440" cy="273600"/>
           </a:xfrm>
           <a:prstGeom prst="roundRect">
             <a:avLst>
@@ -6437,14 +6677,14 @@
       </p:sp>
       <p:sp>
         <p:nvSpPr>
-          <p:cNvPr id="242" name="Tarjeta IA"/>
+          <p:cNvPr id="241" name="Tarjeta IA"/>
           <p:cNvSpPr/>
           <p:nvPr/>
         </p:nvSpPr>
         <p:spPr>
           <a:xfrm>
             <a:off x="548640" y="3063240"/>
-            <a:ext cx="2514240" cy="1599840"/>
+            <a:ext cx="2513880" cy="1599480"/>
           </a:xfrm>
           <a:prstGeom prst="roundRect">
             <a:avLst>
@@ -6493,14 +6733,14 @@
       </p:sp>
       <p:sp>
         <p:nvSpPr>
-          <p:cNvPr id="243" name="Icono IA (fondo)"/>
+          <p:cNvPr id="242" name="Icono IA (fondo)"/>
           <p:cNvSpPr/>
           <p:nvPr/>
         </p:nvSpPr>
         <p:spPr>
           <a:xfrm>
             <a:off x="731520" y="3227760"/>
-            <a:ext cx="456840" cy="456840"/>
+            <a:ext cx="456480" cy="456480"/>
           </a:xfrm>
           <a:prstGeom prst="ellipse">
             <a:avLst/>
@@ -6539,7 +6779,7 @@
       </p:sp>
       <p:pic>
         <p:nvPicPr>
-          <p:cNvPr id="244" name="Icono IA" descr="Icono IA"/>
+          <p:cNvPr id="243" name="Icono IA" descr="Icono IA"/>
           <p:cNvPicPr/>
           <p:nvPr/>
         </p:nvPicPr>
@@ -6550,7 +6790,7 @@
         <p:spPr>
           <a:xfrm>
             <a:off x="846000" y="3342240"/>
-            <a:ext cx="228240" cy="228240"/>
+            <a:ext cx="227880" cy="227880"/>
           </a:xfrm>
           <a:prstGeom prst="rect">
             <a:avLst/>
@@ -6563,14 +6803,14 @@
       </p:pic>
       <p:sp>
         <p:nvSpPr>
-          <p:cNvPr id="245" name="Título IA"/>
+          <p:cNvPr id="244" name="Título IA"/>
           <p:cNvSpPr/>
           <p:nvPr/>
         </p:nvSpPr>
         <p:spPr>
           <a:xfrm>
             <a:off x="1325880" y="3227760"/>
-            <a:ext cx="1599840" cy="456840"/>
+            <a:ext cx="1599480" cy="456480"/>
           </a:xfrm>
           <a:prstGeom prst="rect">
             <a:avLst/>
@@ -6623,14 +6863,14 @@
       </p:sp>
       <p:sp>
         <p:nvSpPr>
-          <p:cNvPr id="246" name="Etiqueta API de Anthropic"/>
+          <p:cNvPr id="245" name="Etiqueta API de Anthropic"/>
           <p:cNvSpPr/>
           <p:nvPr/>
         </p:nvSpPr>
         <p:spPr>
           <a:xfrm>
             <a:off x="731520" y="3840480"/>
-            <a:ext cx="1425960" cy="273960"/>
+            <a:ext cx="1425600" cy="273600"/>
           </a:xfrm>
           <a:prstGeom prst="roundRect">
             <a:avLst>
@@ -6694,14 +6934,14 @@
       </p:sp>
       <p:sp>
         <p:nvSpPr>
-          <p:cNvPr id="247" name="Tarjeta Calidad"/>
+          <p:cNvPr id="246" name="Tarjeta Calidad"/>
           <p:cNvSpPr/>
           <p:nvPr/>
         </p:nvSpPr>
         <p:spPr>
           <a:xfrm>
             <a:off x="3314880" y="3063240"/>
-            <a:ext cx="2514240" cy="1599840"/>
+            <a:ext cx="2513880" cy="1599480"/>
           </a:xfrm>
           <a:prstGeom prst="roundRect">
             <a:avLst>
@@ -6750,14 +6990,14 @@
       </p:sp>
       <p:sp>
         <p:nvSpPr>
-          <p:cNvPr id="248" name="Icono Calidad (fondo)"/>
+          <p:cNvPr id="247" name="Icono Calidad (fondo)"/>
           <p:cNvSpPr/>
           <p:nvPr/>
         </p:nvSpPr>
         <p:spPr>
           <a:xfrm>
             <a:off x="3497760" y="3227760"/>
-            <a:ext cx="456840" cy="456840"/>
+            <a:ext cx="456480" cy="456480"/>
           </a:xfrm>
           <a:prstGeom prst="ellipse">
             <a:avLst/>
@@ -6796,7 +7036,7 @@
       </p:sp>
       <p:pic>
         <p:nvPicPr>
-          <p:cNvPr id="249" name="Icono Calidad" descr="Icono Calidad"/>
+          <p:cNvPr id="248" name="Icono Calidad" descr="Icono Calidad"/>
           <p:cNvPicPr/>
           <p:nvPr/>
         </p:nvPicPr>
@@ -6807,7 +7047,7 @@
         <p:spPr>
           <a:xfrm>
             <a:off x="3611880" y="3342240"/>
-            <a:ext cx="228240" cy="228240"/>
+            <a:ext cx="227880" cy="227880"/>
           </a:xfrm>
           <a:prstGeom prst="rect">
             <a:avLst/>
@@ -6820,14 +7060,14 @@
       </p:pic>
       <p:sp>
         <p:nvSpPr>
-          <p:cNvPr id="250" name="Título Calidad"/>
+          <p:cNvPr id="249" name="Título Calidad"/>
           <p:cNvSpPr/>
           <p:nvPr/>
         </p:nvSpPr>
         <p:spPr>
           <a:xfrm>
             <a:off x="4092120" y="3227760"/>
-            <a:ext cx="1599840" cy="456840"/>
+            <a:ext cx="1599480" cy="456480"/>
           </a:xfrm>
           <a:prstGeom prst="rect">
             <a:avLst/>
@@ -6880,14 +7120,14 @@
       </p:sp>
       <p:sp>
         <p:nvSpPr>
-          <p:cNvPr id="251" name="Etiqueta NUnit"/>
+          <p:cNvPr id="250" name="Etiqueta NUnit"/>
           <p:cNvSpPr/>
           <p:nvPr/>
         </p:nvSpPr>
         <p:spPr>
           <a:xfrm>
             <a:off x="3497760" y="3840480"/>
-            <a:ext cx="630720" cy="273960"/>
+            <a:ext cx="630360" cy="273600"/>
           </a:xfrm>
           <a:prstGeom prst="roundRect">
             <a:avLst>
@@ -6951,14 +7191,14 @@
       </p:sp>
       <p:sp>
         <p:nvSpPr>
-          <p:cNvPr id="252" name="Etiqueta Moq"/>
+          <p:cNvPr id="251" name="Etiqueta Moq"/>
           <p:cNvSpPr/>
           <p:nvPr/>
         </p:nvSpPr>
         <p:spPr>
           <a:xfrm>
             <a:off x="4201560" y="3840480"/>
-            <a:ext cx="493560" cy="273960"/>
+            <a:ext cx="493200" cy="273600"/>
           </a:xfrm>
           <a:prstGeom prst="roundRect">
             <a:avLst>
@@ -7022,14 +7262,14 @@
       </p:sp>
       <p:sp>
         <p:nvSpPr>
-          <p:cNvPr id="253" name="Etiqueta Testcontainers"/>
+          <p:cNvPr id="252" name="Etiqueta Testcontainers"/>
           <p:cNvSpPr/>
           <p:nvPr/>
         </p:nvSpPr>
         <p:spPr>
           <a:xfrm>
             <a:off x="3497760" y="4187880"/>
-            <a:ext cx="1279800" cy="273960"/>
+            <a:ext cx="1279440" cy="273600"/>
           </a:xfrm>
           <a:prstGeom prst="roundRect">
             <a:avLst>
@@ -7093,14 +7333,14 @@
       </p:sp>
       <p:sp>
         <p:nvSpPr>
-          <p:cNvPr id="254" name="Tarjeta Nube"/>
+          <p:cNvPr id="253" name="Tarjeta Nube"/>
           <p:cNvSpPr/>
           <p:nvPr/>
         </p:nvSpPr>
         <p:spPr>
           <a:xfrm>
             <a:off x="6080760" y="3063240"/>
-            <a:ext cx="2514240" cy="1599840"/>
+            <a:ext cx="2513880" cy="1599480"/>
           </a:xfrm>
           <a:prstGeom prst="roundRect">
             <a:avLst>
@@ -7149,14 +7389,14 @@
       </p:sp>
       <p:sp>
         <p:nvSpPr>
-          <p:cNvPr id="255" name="Icono Nube (fondo)"/>
+          <p:cNvPr id="254" name="Icono Nube (fondo)"/>
           <p:cNvSpPr/>
           <p:nvPr/>
         </p:nvSpPr>
         <p:spPr>
           <a:xfrm>
             <a:off x="6263640" y="3227760"/>
-            <a:ext cx="456840" cy="456840"/>
+            <a:ext cx="456480" cy="456480"/>
           </a:xfrm>
           <a:prstGeom prst="ellipse">
             <a:avLst/>
@@ -7195,7 +7435,7 @@
       </p:sp>
       <p:pic>
         <p:nvPicPr>
-          <p:cNvPr id="256" name="Icono Nube" descr="Icono Nube"/>
+          <p:cNvPr id="255" name="Icono Nube" descr="Icono Nube"/>
           <p:cNvPicPr/>
           <p:nvPr/>
         </p:nvPicPr>
@@ -7206,7 +7446,7 @@
         <p:spPr>
           <a:xfrm>
             <a:off x="6378120" y="3342240"/>
-            <a:ext cx="228240" cy="228240"/>
+            <a:ext cx="227880" cy="227880"/>
           </a:xfrm>
           <a:prstGeom prst="rect">
             <a:avLst/>
@@ -7219,14 +7459,14 @@
       </p:pic>
       <p:sp>
         <p:nvSpPr>
-          <p:cNvPr id="257" name="Título Nube"/>
+          <p:cNvPr id="256" name="Título Nube"/>
           <p:cNvSpPr/>
           <p:nvPr/>
         </p:nvSpPr>
         <p:spPr>
           <a:xfrm>
             <a:off x="6858000" y="3227760"/>
-            <a:ext cx="1599840" cy="456840"/>
+            <a:ext cx="1599480" cy="456480"/>
           </a:xfrm>
           <a:prstGeom prst="rect">
             <a:avLst/>
@@ -7279,14 +7519,14 @@
       </p:sp>
       <p:sp>
         <p:nvSpPr>
-          <p:cNvPr id="258" name="Etiqueta Azure"/>
+          <p:cNvPr id="257" name="Etiqueta Azure"/>
           <p:cNvSpPr/>
           <p:nvPr/>
         </p:nvSpPr>
         <p:spPr>
           <a:xfrm>
             <a:off x="6263640" y="3840480"/>
-            <a:ext cx="630720" cy="273960"/>
+            <a:ext cx="630360" cy="273600"/>
           </a:xfrm>
           <a:prstGeom prst="roundRect">
             <a:avLst>
@@ -7350,14 +7590,14 @@
       </p:sp>
       <p:sp>
         <p:nvSpPr>
-          <p:cNvPr id="259" name="Etiqueta Terraform"/>
+          <p:cNvPr id="258" name="Etiqueta Terraform"/>
           <p:cNvSpPr/>
           <p:nvPr/>
         </p:nvSpPr>
         <p:spPr>
           <a:xfrm>
             <a:off x="6967800" y="3840480"/>
-            <a:ext cx="923040" cy="273960"/>
+            <a:ext cx="922680" cy="273600"/>
           </a:xfrm>
           <a:prstGeom prst="roundRect">
             <a:avLst>
@@ -7421,14 +7661,14 @@
       </p:sp>
       <p:sp>
         <p:nvSpPr>
-          <p:cNvPr id="260" name="Nota Nube"/>
+          <p:cNvPr id="259" name="Nota Nube"/>
           <p:cNvSpPr/>
           <p:nvPr/>
         </p:nvSpPr>
         <p:spPr>
           <a:xfrm>
             <a:off x="6263640" y="4224600"/>
-            <a:ext cx="2148480" cy="273960"/>
+            <a:ext cx="2148120" cy="273600"/>
           </a:xfrm>
           <a:prstGeom prst="rect">
             <a:avLst/>
@@ -7481,7 +7721,7 @@
       </p:sp>
       <p:sp>
         <p:nvSpPr>
-          <p:cNvPr id="261" name="PlaceHolder 2"/>
+          <p:cNvPr id="260" name="PlaceHolder 2"/>
           <p:cNvSpPr>
             <a:spLocks noGrp="1"/>
           </p:cNvSpPr>
@@ -7492,7 +7732,7 @@
         <p:spPr>
           <a:xfrm>
             <a:off x="8229600" y="4754880"/>
-            <a:ext cx="456840" cy="228240"/>
+            <a:ext cx="456480" cy="227880"/>
           </a:xfrm>
           <a:prstGeom prst="rect">
             <a:avLst/>
@@ -7512,6 +7752,9 @@
                 <a:spcPct val="100000"/>
               </a:lnSpc>
               <a:buNone/>
+              <a:tabLst>
+                <a:tab pos="0" algn="l"/>
+              </a:tabLst>
               <a:defRPr lang="en-US" sz="1000" b="0" u="none" strike="noStrike">
                 <a:solidFill>
                   <a:srgbClr val="94A3B8"/>
@@ -7528,8 +7771,11 @@
                 <a:spcPct val="100000"/>
               </a:lnSpc>
               <a:buNone/>
+              <a:tabLst>
+                <a:tab pos="0" algn="l"/>
+              </a:tabLst>
             </a:pPr>
-            <a:fld id="{29B1BCB0-3DBF-4F2A-BED7-66EDA93A87AF}" type="slidenum">
+            <a:fld id="{C1FD8A72-5A80-4DFD-A32B-FC1ADF92DE05}" type="slidenum">
               <a:rPr lang="en-US" sz="1000" b="0" u="none" strike="noStrike">
                 <a:solidFill>
                   <a:srgbClr val="94A3B8"/>
@@ -7583,14 +7829,14 @@
       </p:grpSpPr>
       <p:sp>
         <p:nvSpPr>
-          <p:cNvPr id="262" name="Mancha menta"/>
+          <p:cNvPr id="261" name="Mancha menta"/>
           <p:cNvSpPr/>
           <p:nvPr/>
         </p:nvSpPr>
         <p:spPr>
           <a:xfrm>
             <a:off x="-1188720" y="3200400"/>
-            <a:ext cx="3291480" cy="3291480"/>
+            <a:ext cx="3291120" cy="3291120"/>
           </a:xfrm>
           <a:prstGeom prst="ellipse">
             <a:avLst/>
@@ -7629,7 +7875,7 @@
       </p:sp>
       <p:sp>
         <p:nvSpPr>
-          <p:cNvPr id="263" name="PlaceHolder 1"/>
+          <p:cNvPr id="262" name="PlaceHolder 1"/>
           <p:cNvSpPr>
             <a:spLocks noGrp="1"/>
           </p:cNvSpPr>
@@ -7640,7 +7886,7 @@
         <p:spPr>
           <a:xfrm>
             <a:off x="548640" y="365760"/>
-            <a:ext cx="8046360" cy="731160"/>
+            <a:ext cx="8046000" cy="730800"/>
           </a:xfrm>
           <a:prstGeom prst="rect">
             <a:avLst/>
@@ -7688,14 +7934,14 @@
       </p:sp>
       <p:sp>
         <p:nvSpPr>
-          <p:cNvPr id="264" name="Dato 18"/>
+          <p:cNvPr id="263" name="Dato 18"/>
           <p:cNvSpPr/>
           <p:nvPr/>
         </p:nvSpPr>
         <p:spPr>
           <a:xfrm>
             <a:off x="548640" y="1325880"/>
-            <a:ext cx="2514240" cy="1691280"/>
+            <a:ext cx="2513880" cy="1690920"/>
           </a:xfrm>
           <a:prstGeom prst="roundRect">
             <a:avLst>
@@ -7744,14 +7990,14 @@
       </p:sp>
       <p:sp>
         <p:nvSpPr>
-          <p:cNvPr id="265" name="Cifra 18"/>
+          <p:cNvPr id="264" name="Cifra 18"/>
           <p:cNvSpPr/>
           <p:nvPr/>
         </p:nvSpPr>
         <p:spPr>
           <a:xfrm>
             <a:off x="777240" y="1463040"/>
-            <a:ext cx="2057040" cy="868320"/>
+            <a:ext cx="2056680" cy="867960"/>
           </a:xfrm>
           <a:prstGeom prst="rect">
             <a:avLst/>
@@ -7805,14 +8051,14 @@
       </p:sp>
       <p:sp>
         <p:nvSpPr>
-          <p:cNvPr id="266" name="Etiqueta 18"/>
+          <p:cNvPr id="265" name="Etiqueta 18"/>
           <p:cNvSpPr/>
           <p:nvPr/>
         </p:nvSpPr>
         <p:spPr>
           <a:xfrm>
             <a:off x="777240" y="2377440"/>
-            <a:ext cx="2057040" cy="548280"/>
+            <a:ext cx="2056680" cy="547920"/>
           </a:xfrm>
           <a:prstGeom prst="rect">
             <a:avLst/>
@@ -7865,14 +8111,14 @@
       </p:sp>
       <p:sp>
         <p:nvSpPr>
-          <p:cNvPr id="267" name="Dato 1.253"/>
+          <p:cNvPr id="266" name="Dato 1.253"/>
           <p:cNvSpPr/>
           <p:nvPr/>
         </p:nvSpPr>
         <p:spPr>
           <a:xfrm>
             <a:off x="3314880" y="1325880"/>
-            <a:ext cx="2514240" cy="1691280"/>
+            <a:ext cx="2513880" cy="1690920"/>
           </a:xfrm>
           <a:prstGeom prst="roundRect">
             <a:avLst>
@@ -7921,14 +8167,14 @@
       </p:sp>
       <p:sp>
         <p:nvSpPr>
-          <p:cNvPr id="268" name="Cifra 1.253"/>
+          <p:cNvPr id="267" name="Cifra 1.253"/>
           <p:cNvSpPr/>
           <p:nvPr/>
         </p:nvSpPr>
         <p:spPr>
           <a:xfrm>
             <a:off x="3543480" y="1463040"/>
-            <a:ext cx="2057040" cy="868320"/>
+            <a:ext cx="2056680" cy="867960"/>
           </a:xfrm>
           <a:prstGeom prst="rect">
             <a:avLst/>
@@ -7982,14 +8228,14 @@
       </p:sp>
       <p:sp>
         <p:nvSpPr>
-          <p:cNvPr id="269" name="Etiqueta 1.253"/>
+          <p:cNvPr id="268" name="Etiqueta 1.253"/>
           <p:cNvSpPr/>
           <p:nvPr/>
         </p:nvSpPr>
         <p:spPr>
           <a:xfrm>
             <a:off x="3543480" y="2377440"/>
-            <a:ext cx="2057040" cy="548280"/>
+            <a:ext cx="2056680" cy="547920"/>
           </a:xfrm>
           <a:prstGeom prst="rect">
             <a:avLst/>
@@ -8042,14 +8288,14 @@
       </p:sp>
       <p:sp>
         <p:nvSpPr>
-          <p:cNvPr id="270" name="Dato 18.197"/>
+          <p:cNvPr id="269" name="Dato 18.197"/>
           <p:cNvSpPr/>
           <p:nvPr/>
         </p:nvSpPr>
         <p:spPr>
           <a:xfrm>
             <a:off x="6080760" y="1325880"/>
-            <a:ext cx="2514240" cy="1691280"/>
+            <a:ext cx="2513880" cy="1690920"/>
           </a:xfrm>
           <a:prstGeom prst="roundRect">
             <a:avLst>
@@ -8098,14 +8344,14 @@
       </p:sp>
       <p:sp>
         <p:nvSpPr>
-          <p:cNvPr id="271" name="Cifra 18.197"/>
+          <p:cNvPr id="270" name="Cifra 18.197"/>
           <p:cNvSpPr/>
           <p:nvPr/>
         </p:nvSpPr>
         <p:spPr>
           <a:xfrm>
             <a:off x="6309360" y="1463040"/>
-            <a:ext cx="2057040" cy="868320"/>
+            <a:ext cx="2056680" cy="867960"/>
           </a:xfrm>
           <a:prstGeom prst="rect">
             <a:avLst/>
@@ -8159,14 +8405,14 @@
       </p:sp>
       <p:sp>
         <p:nvSpPr>
-          <p:cNvPr id="272" name="Etiqueta 18.197"/>
+          <p:cNvPr id="271" name="Etiqueta 18.197"/>
           <p:cNvSpPr/>
           <p:nvPr/>
         </p:nvSpPr>
         <p:spPr>
           <a:xfrm>
             <a:off x="6309360" y="2377440"/>
-            <a:ext cx="2057040" cy="548280"/>
+            <a:ext cx="2056680" cy="547920"/>
           </a:xfrm>
           <a:prstGeom prst="rect">
             <a:avLst/>
@@ -8219,14 +8465,14 @@
       </p:sp>
       <p:sp>
         <p:nvSpPr>
-          <p:cNvPr id="273" name="Tarjeta Sesión segura"/>
+          <p:cNvPr id="272" name="Tarjeta Sesión segura"/>
           <p:cNvSpPr/>
           <p:nvPr/>
         </p:nvSpPr>
         <p:spPr>
           <a:xfrm>
             <a:off x="548640" y="3200400"/>
-            <a:ext cx="2514240" cy="1416960"/>
+            <a:ext cx="2513880" cy="1416600"/>
           </a:xfrm>
           <a:prstGeom prst="roundRect">
             <a:avLst>
@@ -8275,14 +8521,14 @@
       </p:sp>
       <p:sp>
         <p:nvSpPr>
-          <p:cNvPr id="274" name="Icono Sesión segura (fondo)"/>
+          <p:cNvPr id="273" name="Icono Sesión segura (fondo)"/>
           <p:cNvSpPr/>
           <p:nvPr/>
         </p:nvSpPr>
         <p:spPr>
           <a:xfrm>
             <a:off x="731520" y="3337560"/>
-            <a:ext cx="456840" cy="456840"/>
+            <a:ext cx="456480" cy="456480"/>
           </a:xfrm>
           <a:prstGeom prst="ellipse">
             <a:avLst/>
@@ -8321,7 +8567,7 @@
       </p:sp>
       <p:pic>
         <p:nvPicPr>
-          <p:cNvPr id="275" name="Icono Sesión segura" descr="Icono Sesión segura"/>
+          <p:cNvPr id="274" name="Icono Sesión segura" descr="Icono Sesión segura"/>
           <p:cNvPicPr/>
           <p:nvPr/>
         </p:nvPicPr>
@@ -8332,7 +8578,7 @@
         <p:spPr>
           <a:xfrm>
             <a:off x="846000" y="3452040"/>
-            <a:ext cx="228240" cy="228240"/>
+            <a:ext cx="227880" cy="227880"/>
           </a:xfrm>
           <a:prstGeom prst="rect">
             <a:avLst/>
@@ -8345,14 +8591,14 @@
       </p:pic>
       <p:sp>
         <p:nvSpPr>
-          <p:cNvPr id="276" name="Título Sesión segura"/>
+          <p:cNvPr id="275" name="Título Sesión segura"/>
           <p:cNvSpPr/>
           <p:nvPr/>
         </p:nvSpPr>
         <p:spPr>
           <a:xfrm>
             <a:off x="1325880" y="3337560"/>
-            <a:ext cx="1599840" cy="456840"/>
+            <a:ext cx="1599480" cy="456480"/>
           </a:xfrm>
           <a:prstGeom prst="rect">
             <a:avLst/>
@@ -8405,14 +8651,14 @@
       </p:sp>
       <p:sp>
         <p:nvSpPr>
-          <p:cNvPr id="277" name="Texto Sesión segura"/>
+          <p:cNvPr id="276" name="Texto Sesión segura"/>
           <p:cNvSpPr/>
           <p:nvPr/>
         </p:nvSpPr>
         <p:spPr>
           <a:xfrm>
             <a:off x="731520" y="3931920"/>
-            <a:ext cx="2148480" cy="594000"/>
+            <a:ext cx="2148120" cy="593640"/>
           </a:xfrm>
           <a:prstGeom prst="rect">
             <a:avLst/>
@@ -8465,14 +8711,14 @@
       </p:sp>
       <p:sp>
         <p:nvSpPr>
-          <p:cNvPr id="278" name="Tarjeta API sincronizada"/>
+          <p:cNvPr id="277" name="Tarjeta API sincronizada"/>
           <p:cNvSpPr/>
           <p:nvPr/>
         </p:nvSpPr>
         <p:spPr>
           <a:xfrm>
             <a:off x="3314880" y="3200400"/>
-            <a:ext cx="2514240" cy="1416960"/>
+            <a:ext cx="2513880" cy="1416600"/>
           </a:xfrm>
           <a:prstGeom prst="roundRect">
             <a:avLst>
@@ -8521,14 +8767,14 @@
       </p:sp>
       <p:sp>
         <p:nvSpPr>
-          <p:cNvPr id="279" name="Icono API sincronizada (fondo)"/>
+          <p:cNvPr id="278" name="Icono API sincronizada (fondo)"/>
           <p:cNvSpPr/>
           <p:nvPr/>
         </p:nvSpPr>
         <p:spPr>
           <a:xfrm>
             <a:off x="3497760" y="3337560"/>
-            <a:ext cx="456840" cy="456840"/>
+            <a:ext cx="456480" cy="456480"/>
           </a:xfrm>
           <a:prstGeom prst="ellipse">
             <a:avLst/>
@@ -8567,7 +8813,7 @@
       </p:sp>
       <p:pic>
         <p:nvPicPr>
-          <p:cNvPr id="280" name="Icono API sincronizada" descr="Icono API sincronizada"/>
+          <p:cNvPr id="279" name="Icono API sincronizada" descr="Icono API sincronizada"/>
           <p:cNvPicPr/>
           <p:nvPr/>
         </p:nvPicPr>
@@ -8578,7 +8824,7 @@
         <p:spPr>
           <a:xfrm>
             <a:off x="3611880" y="3452040"/>
-            <a:ext cx="228240" cy="228240"/>
+            <a:ext cx="227880" cy="227880"/>
           </a:xfrm>
           <a:prstGeom prst="rect">
             <a:avLst/>
@@ -8591,14 +8837,14 @@
       </p:pic>
       <p:sp>
         <p:nvSpPr>
-          <p:cNvPr id="281" name="Título API sincronizada"/>
+          <p:cNvPr id="280" name="Título API sincronizada"/>
           <p:cNvSpPr/>
           <p:nvPr/>
         </p:nvSpPr>
         <p:spPr>
           <a:xfrm>
             <a:off x="4092120" y="3337560"/>
-            <a:ext cx="1599840" cy="456840"/>
+            <a:ext cx="1599480" cy="456480"/>
           </a:xfrm>
           <a:prstGeom prst="rect">
             <a:avLst/>
@@ -8651,14 +8897,14 @@
       </p:sp>
       <p:sp>
         <p:nvSpPr>
-          <p:cNvPr id="282" name="Texto API sincronizada"/>
+          <p:cNvPr id="281" name="Texto API sincronizada"/>
           <p:cNvSpPr/>
           <p:nvPr/>
         </p:nvSpPr>
         <p:spPr>
           <a:xfrm>
             <a:off x="3497760" y="3931920"/>
-            <a:ext cx="2148480" cy="594000"/>
+            <a:ext cx="2148120" cy="593640"/>
           </a:xfrm>
           <a:prstGeom prst="rect">
             <a:avLst/>
@@ -8711,14 +8957,14 @@
       </p:sp>
       <p:sp>
         <p:nvSpPr>
-          <p:cNvPr id="283" name="Tarjeta Nube como código"/>
+          <p:cNvPr id="282" name="Tarjeta Nube como código"/>
           <p:cNvSpPr/>
           <p:nvPr/>
         </p:nvSpPr>
         <p:spPr>
           <a:xfrm>
             <a:off x="6080760" y="3200400"/>
-            <a:ext cx="2514240" cy="1416960"/>
+            <a:ext cx="2513880" cy="1416600"/>
           </a:xfrm>
           <a:prstGeom prst="roundRect">
             <a:avLst>
@@ -8767,14 +9013,14 @@
       </p:sp>
       <p:sp>
         <p:nvSpPr>
-          <p:cNvPr id="284" name="Icono Nube como código (fondo)"/>
+          <p:cNvPr id="283" name="Icono Nube como código (fondo)"/>
           <p:cNvSpPr/>
           <p:nvPr/>
         </p:nvSpPr>
         <p:spPr>
           <a:xfrm>
             <a:off x="6263640" y="3337560"/>
-            <a:ext cx="456840" cy="456840"/>
+            <a:ext cx="456480" cy="456480"/>
           </a:xfrm>
           <a:prstGeom prst="ellipse">
             <a:avLst/>
@@ -8813,7 +9059,7 @@
       </p:sp>
       <p:pic>
         <p:nvPicPr>
-          <p:cNvPr id="285" name="Icono Nube como código" descr="Icono Nube como código"/>
+          <p:cNvPr id="284" name="Icono Nube como código" descr="Icono Nube como código"/>
           <p:cNvPicPr/>
           <p:nvPr/>
         </p:nvPicPr>
@@ -8824,7 +9070,7 @@
         <p:spPr>
           <a:xfrm>
             <a:off x="6378120" y="3452040"/>
-            <a:ext cx="228240" cy="228240"/>
+            <a:ext cx="227880" cy="227880"/>
           </a:xfrm>
           <a:prstGeom prst="rect">
             <a:avLst/>
@@ -8837,14 +9083,14 @@
       </p:pic>
       <p:sp>
         <p:nvSpPr>
-          <p:cNvPr id="286" name="Título Nube como código"/>
+          <p:cNvPr id="285" name="Título Nube como código"/>
           <p:cNvSpPr/>
           <p:nvPr/>
         </p:nvSpPr>
         <p:spPr>
           <a:xfrm>
             <a:off x="6858000" y="3337560"/>
-            <a:ext cx="1599840" cy="456840"/>
+            <a:ext cx="1599480" cy="456480"/>
           </a:xfrm>
           <a:prstGeom prst="rect">
             <a:avLst/>
@@ -8897,14 +9143,14 @@
       </p:sp>
       <p:sp>
         <p:nvSpPr>
-          <p:cNvPr id="287" name="Texto Nube como código"/>
+          <p:cNvPr id="286" name="Texto Nube como código"/>
           <p:cNvSpPr/>
           <p:nvPr/>
         </p:nvSpPr>
         <p:spPr>
           <a:xfrm>
             <a:off x="6263640" y="3931920"/>
-            <a:ext cx="2148480" cy="594000"/>
+            <a:ext cx="2148120" cy="593640"/>
           </a:xfrm>
           <a:prstGeom prst="rect">
             <a:avLst/>
@@ -8957,7 +9203,7 @@
       </p:sp>
       <p:sp>
         <p:nvSpPr>
-          <p:cNvPr id="288" name="PlaceHolder 2"/>
+          <p:cNvPr id="287" name="PlaceHolder 2"/>
           <p:cNvSpPr>
             <a:spLocks noGrp="1"/>
           </p:cNvSpPr>
@@ -8968,7 +9214,7 @@
         <p:spPr>
           <a:xfrm>
             <a:off x="8229600" y="4754880"/>
-            <a:ext cx="456840" cy="228240"/>
+            <a:ext cx="456480" cy="227880"/>
           </a:xfrm>
           <a:prstGeom prst="rect">
             <a:avLst/>
@@ -8988,6 +9234,9 @@
                 <a:spcPct val="100000"/>
               </a:lnSpc>
               <a:buNone/>
+              <a:tabLst>
+                <a:tab pos="0" algn="l"/>
+              </a:tabLst>
               <a:defRPr lang="en-US" sz="1000" b="0" u="none" strike="noStrike">
                 <a:solidFill>
                   <a:srgbClr val="94A3B8"/>
@@ -9004,8 +9253,11 @@
                 <a:spcPct val="100000"/>
               </a:lnSpc>
               <a:buNone/>
+              <a:tabLst>
+                <a:tab pos="0" algn="l"/>
+              </a:tabLst>
             </a:pPr>
-            <a:fld id="{DD02B7A7-E7EB-46FB-BA55-7BE6A3BF13A7}" type="slidenum">
+            <a:fld id="{4AF74F39-BB30-4686-BEF1-211B03414198}" type="slidenum">
               <a:rPr lang="en-US" sz="1000" b="0" u="none" strike="noStrike">
                 <a:solidFill>
                   <a:srgbClr val="94A3B8"/>
@@ -9059,14 +9311,14 @@
       </p:grpSpPr>
       <p:sp>
         <p:nvSpPr>
-          <p:cNvPr id="289" name="Mancha rosa"/>
+          <p:cNvPr id="288" name="Mancha rosa"/>
           <p:cNvSpPr/>
           <p:nvPr/>
         </p:nvSpPr>
         <p:spPr>
           <a:xfrm>
             <a:off x="7040880" y="3017520"/>
-            <a:ext cx="3291480" cy="3291480"/>
+            <a:ext cx="3291120" cy="3291120"/>
           </a:xfrm>
           <a:prstGeom prst="ellipse">
             <a:avLst/>
@@ -9105,7 +9357,7 @@
       </p:sp>
       <p:sp>
         <p:nvSpPr>
-          <p:cNvPr id="290" name="PlaceHolder 1"/>
+          <p:cNvPr id="289" name="PlaceHolder 1"/>
           <p:cNvSpPr>
             <a:spLocks noGrp="1"/>
           </p:cNvSpPr>
@@ -9116,7 +9368,7 @@
         <p:spPr>
           <a:xfrm>
             <a:off x="548640" y="365760"/>
-            <a:ext cx="8046360" cy="731160"/>
+            <a:ext cx="8046000" cy="730800"/>
           </a:xfrm>
           <a:prstGeom prst="rect">
             <a:avLst/>
@@ -9164,14 +9416,14 @@
       </p:sp>
       <p:sp>
         <p:nvSpPr>
-          <p:cNvPr id="291" name="Tarjeta Segundo tutor"/>
+          <p:cNvPr id="290" name="Tarjeta Segundo tutor"/>
           <p:cNvSpPr/>
           <p:nvPr/>
         </p:nvSpPr>
         <p:spPr>
           <a:xfrm>
             <a:off x="548640" y="1554480"/>
-            <a:ext cx="2514240" cy="2514240"/>
+            <a:ext cx="2513880" cy="2513880"/>
           </a:xfrm>
           <a:prstGeom prst="roundRect">
             <a:avLst>
@@ -9220,14 +9472,14 @@
       </p:sp>
       <p:sp>
         <p:nvSpPr>
-          <p:cNvPr id="292" name="Icono Segundo tutor (fondo)"/>
+          <p:cNvPr id="291" name="Icono Segundo tutor (fondo)"/>
           <p:cNvSpPr/>
           <p:nvPr/>
         </p:nvSpPr>
         <p:spPr>
           <a:xfrm>
             <a:off x="822960" y="1783080"/>
-            <a:ext cx="731160" cy="731160"/>
+            <a:ext cx="730800" cy="730800"/>
           </a:xfrm>
           <a:prstGeom prst="ellipse">
             <a:avLst/>
@@ -9266,7 +9518,7 @@
       </p:sp>
       <p:pic>
         <p:nvPicPr>
-          <p:cNvPr id="293" name="Icono Segundo tutor" descr="Icono Segundo tutor"/>
+          <p:cNvPr id="292" name="Icono Segundo tutor" descr="Icono Segundo tutor"/>
           <p:cNvPicPr/>
           <p:nvPr/>
         </p:nvPicPr>
@@ -9277,7 +9529,7 @@
         <p:spPr>
           <a:xfrm>
             <a:off x="1005840" y="1965960"/>
-            <a:ext cx="365400" cy="365400"/>
+            <a:ext cx="365040" cy="365040"/>
           </a:xfrm>
           <a:prstGeom prst="rect">
             <a:avLst/>
@@ -9290,14 +9542,14 @@
       </p:pic>
       <p:sp>
         <p:nvSpPr>
-          <p:cNvPr id="294" name="Título Segundo tutor"/>
+          <p:cNvPr id="293" name="Título Segundo tutor"/>
           <p:cNvSpPr/>
           <p:nvPr/>
         </p:nvSpPr>
         <p:spPr>
           <a:xfrm>
             <a:off x="822960" y="2697480"/>
-            <a:ext cx="1965600" cy="365400"/>
+            <a:ext cx="1965240" cy="365040"/>
           </a:xfrm>
           <a:prstGeom prst="rect">
             <a:avLst/>
@@ -9350,14 +9602,14 @@
       </p:sp>
       <p:sp>
         <p:nvSpPr>
-          <p:cNvPr id="295" name="Texto Segundo tutor"/>
+          <p:cNvPr id="294" name="Texto Segundo tutor"/>
           <p:cNvSpPr/>
           <p:nvPr/>
         </p:nvSpPr>
         <p:spPr>
           <a:xfrm>
             <a:off x="822960" y="3154680"/>
-            <a:ext cx="1965600" cy="776880"/>
+            <a:ext cx="1965240" cy="776520"/>
           </a:xfrm>
           <a:prstGeom prst="rect">
             <a:avLst/>
@@ -9410,14 +9662,14 @@
       </p:sp>
       <p:sp>
         <p:nvSpPr>
-          <p:cNvPr id="296" name="Tarjeta Notificaciones"/>
+          <p:cNvPr id="295" name="Tarjeta Notificaciones"/>
           <p:cNvSpPr/>
           <p:nvPr/>
         </p:nvSpPr>
         <p:spPr>
           <a:xfrm>
             <a:off x="3314880" y="1554480"/>
-            <a:ext cx="2514240" cy="2514240"/>
+            <a:ext cx="2513880" cy="2513880"/>
           </a:xfrm>
           <a:prstGeom prst="roundRect">
             <a:avLst>
@@ -9466,14 +9718,14 @@
       </p:sp>
       <p:sp>
         <p:nvSpPr>
-          <p:cNvPr id="297" name="Icono Notificaciones (fondo)"/>
+          <p:cNvPr id="296" name="Icono Notificaciones (fondo)"/>
           <p:cNvSpPr/>
           <p:nvPr/>
         </p:nvSpPr>
         <p:spPr>
           <a:xfrm>
             <a:off x="3589200" y="1783080"/>
-            <a:ext cx="731160" cy="731160"/>
+            <a:ext cx="730800" cy="730800"/>
           </a:xfrm>
           <a:prstGeom prst="ellipse">
             <a:avLst/>
@@ -9512,7 +9764,7 @@
       </p:sp>
       <p:pic>
         <p:nvPicPr>
-          <p:cNvPr id="298" name="Icono Notificaciones" descr="Icono Notificaciones"/>
+          <p:cNvPr id="297" name="Icono Notificaciones" descr="Icono Notificaciones"/>
           <p:cNvPicPr/>
           <p:nvPr/>
         </p:nvPicPr>
@@ -9523,7 +9775,7 @@
         <p:spPr>
           <a:xfrm>
             <a:off x="3772080" y="1965960"/>
-            <a:ext cx="365400" cy="365400"/>
+            <a:ext cx="365040" cy="365040"/>
           </a:xfrm>
           <a:prstGeom prst="rect">
             <a:avLst/>
@@ -9536,14 +9788,14 @@
       </p:pic>
       <p:sp>
         <p:nvSpPr>
-          <p:cNvPr id="299" name="Título Notificaciones"/>
+          <p:cNvPr id="298" name="Título Notificaciones"/>
           <p:cNvSpPr/>
           <p:nvPr/>
         </p:nvSpPr>
         <p:spPr>
           <a:xfrm>
             <a:off x="3589200" y="2697480"/>
-            <a:ext cx="1965600" cy="365400"/>
+            <a:ext cx="1965240" cy="365040"/>
           </a:xfrm>
           <a:prstGeom prst="rect">
             <a:avLst/>
@@ -9596,14 +9848,14 @@
       </p:sp>
       <p:sp>
         <p:nvSpPr>
-          <p:cNvPr id="300" name="Texto Notificaciones"/>
+          <p:cNvPr id="299" name="Texto Notificaciones"/>
           <p:cNvSpPr/>
           <p:nvPr/>
         </p:nvSpPr>
         <p:spPr>
           <a:xfrm>
             <a:off x="3589200" y="3154680"/>
-            <a:ext cx="1965600" cy="776880"/>
+            <a:ext cx="1965240" cy="776520"/>
           </a:xfrm>
           <a:prstGeom prst="rect">
             <a:avLst/>
@@ -9656,14 +9908,14 @@
       </p:sp>
       <p:sp>
         <p:nvSpPr>
-          <p:cNvPr id="301" name="Tarjeta Fotos en objetos"/>
+          <p:cNvPr id="300" name="Tarjeta Fotos en objetos"/>
           <p:cNvSpPr/>
           <p:nvPr/>
         </p:nvSpPr>
         <p:spPr>
           <a:xfrm>
             <a:off x="6080760" y="1554480"/>
-            <a:ext cx="2514240" cy="2514240"/>
+            <a:ext cx="2513880" cy="2513880"/>
           </a:xfrm>
           <a:prstGeom prst="roundRect">
             <a:avLst>
@@ -9712,14 +9964,14 @@
       </p:sp>
       <p:sp>
         <p:nvSpPr>
-          <p:cNvPr id="302" name="Icono Fotos en objetos (fondo)"/>
+          <p:cNvPr id="301" name="Icono Fotos en objetos (fondo)"/>
           <p:cNvSpPr/>
           <p:nvPr/>
         </p:nvSpPr>
         <p:spPr>
           <a:xfrm>
             <a:off x="6355080" y="1783080"/>
-            <a:ext cx="731160" cy="731160"/>
+            <a:ext cx="730800" cy="730800"/>
           </a:xfrm>
           <a:prstGeom prst="ellipse">
             <a:avLst/>
@@ -9758,14 +10010,14 @@
       </p:sp>
       <p:sp>
         <p:nvSpPr>
-          <p:cNvPr id="303" name="Título Fotos en objetos"/>
+          <p:cNvPr id="302" name="Título Fotos en objetos"/>
           <p:cNvSpPr/>
           <p:nvPr/>
         </p:nvSpPr>
         <p:spPr>
           <a:xfrm>
             <a:off x="6355080" y="2697480"/>
-            <a:ext cx="1965600" cy="365400"/>
+            <a:ext cx="1965240" cy="365040"/>
           </a:xfrm>
           <a:prstGeom prst="rect">
             <a:avLst/>
@@ -9818,14 +10070,14 @@
       </p:sp>
       <p:sp>
         <p:nvSpPr>
-          <p:cNvPr id="304" name="Texto Fotos en objetos"/>
+          <p:cNvPr id="303" name="Texto Fotos en objetos"/>
           <p:cNvSpPr/>
           <p:nvPr/>
         </p:nvSpPr>
         <p:spPr>
           <a:xfrm>
             <a:off x="6355080" y="3154680"/>
-            <a:ext cx="1965600" cy="776880"/>
+            <a:ext cx="1965240" cy="776520"/>
           </a:xfrm>
           <a:prstGeom prst="rect">
             <a:avLst/>
@@ -9878,7 +10130,7 @@
       </p:sp>
       <p:sp>
         <p:nvSpPr>
-          <p:cNvPr id="305" name="PlaceHolder 2"/>
+          <p:cNvPr id="304" name="PlaceHolder 2"/>
           <p:cNvSpPr>
             <a:spLocks noGrp="1"/>
           </p:cNvSpPr>
@@ -9889,7 +10141,7 @@
         <p:spPr>
           <a:xfrm>
             <a:off x="8229600" y="4754880"/>
-            <a:ext cx="456840" cy="228240"/>
+            <a:ext cx="456480" cy="227880"/>
           </a:xfrm>
           <a:prstGeom prst="rect">
             <a:avLst/>
@@ -9909,6 +10161,9 @@
                 <a:spcPct val="100000"/>
               </a:lnSpc>
               <a:buNone/>
+              <a:tabLst>
+                <a:tab pos="0" algn="l"/>
+              </a:tabLst>
               <a:defRPr lang="en-US" sz="1000" b="0" u="none" strike="noStrike">
                 <a:solidFill>
                   <a:srgbClr val="94A3B8"/>
@@ -9925,8 +10180,11 @@
                 <a:spcPct val="100000"/>
               </a:lnSpc>
               <a:buNone/>
+              <a:tabLst>
+                <a:tab pos="0" algn="l"/>
+              </a:tabLst>
             </a:pPr>
-            <a:fld id="{100BC729-562C-485C-9076-D595DE9F438B}" type="slidenum">
+            <a:fld id="{53B6E60B-BDB1-4D75-AEFB-7BA6EEBA4495}" type="slidenum">
               <a:rPr lang="en-US" sz="1000" b="0" u="none" strike="noStrike">
                 <a:solidFill>
                   <a:srgbClr val="94A3B8"/>
@@ -9950,7 +10208,7 @@
       </p:sp>
       <p:pic>
         <p:nvPicPr>
-          <p:cNvPr id="306" name="Icono Fotos en objetos"/>
+          <p:cNvPr id="305" name="Icono Fotos en objetos"/>
           <p:cNvPicPr/>
           <p:nvPr/>
         </p:nvPicPr>
@@ -9967,7 +10225,7 @@
         <p:spPr>
           <a:xfrm>
             <a:off x="6537960" y="1965960"/>
-            <a:ext cx="365400" cy="365400"/>
+            <a:ext cx="365040" cy="365040"/>
           </a:xfrm>
           <a:prstGeom prst="rect">
             <a:avLst/>
@@ -10010,14 +10268,14 @@
       </p:grpSpPr>
       <p:sp>
         <p:nvSpPr>
-          <p:cNvPr id="307" name="Mancha violeta"/>
+          <p:cNvPr id="306" name="Mancha violeta"/>
           <p:cNvSpPr/>
           <p:nvPr/>
         </p:nvSpPr>
         <p:spPr>
           <a:xfrm>
             <a:off x="7132320" y="-1463040"/>
-            <a:ext cx="2925720" cy="2925720"/>
+            <a:ext cx="2925360" cy="2925360"/>
           </a:xfrm>
           <a:prstGeom prst="ellipse">
             <a:avLst/>
@@ -10056,7 +10314,7 @@
       </p:sp>
       <p:sp>
         <p:nvSpPr>
-          <p:cNvPr id="308" name="PlaceHolder 1"/>
+          <p:cNvPr id="307" name="PlaceHolder 1"/>
           <p:cNvSpPr>
             <a:spLocks noGrp="1"/>
           </p:cNvSpPr>
@@ -10067,7 +10325,7 @@
         <p:spPr>
           <a:xfrm>
             <a:off x="548640" y="365760"/>
-            <a:ext cx="8046360" cy="731160"/>
+            <a:ext cx="8046000" cy="730800"/>
           </a:xfrm>
           <a:prstGeom prst="rect">
             <a:avLst/>
@@ -10115,14 +10373,14 @@
       </p:sp>
       <p:sp>
         <p:nvSpPr>
-          <p:cNvPr id="309" name="Tarjeta Ayuda entre familias"/>
+          <p:cNvPr id="308" name="Tarjeta Ayuda entre familias"/>
           <p:cNvSpPr/>
           <p:nvPr/>
         </p:nvSpPr>
         <p:spPr>
           <a:xfrm>
             <a:off x="548640" y="1371600"/>
-            <a:ext cx="2514240" cy="1508400"/>
+            <a:ext cx="2513880" cy="1508040"/>
           </a:xfrm>
           <a:prstGeom prst="roundRect">
             <a:avLst>
@@ -10171,14 +10429,14 @@
       </p:sp>
       <p:sp>
         <p:nvSpPr>
-          <p:cNvPr id="310" name="Icono Ayuda entre familias (fondo)"/>
+          <p:cNvPr id="309" name="Icono Ayuda entre familias (fondo)"/>
           <p:cNvSpPr/>
           <p:nvPr/>
         </p:nvSpPr>
         <p:spPr>
           <a:xfrm>
             <a:off x="777240" y="1572840"/>
-            <a:ext cx="548280" cy="548280"/>
+            <a:ext cx="547920" cy="547920"/>
           </a:xfrm>
           <a:prstGeom prst="ellipse">
             <a:avLst/>
@@ -10217,7 +10475,7 @@
       </p:sp>
       <p:pic>
         <p:nvPicPr>
-          <p:cNvPr id="311" name="Icono Ayuda entre familias" descr="Icono Ayuda entre familias"/>
+          <p:cNvPr id="310" name="Icono Ayuda entre familias" descr="Icono Ayuda entre familias"/>
           <p:cNvPicPr/>
           <p:nvPr/>
         </p:nvPicPr>
@@ -10228,7 +10486,7 @@
         <p:spPr>
           <a:xfrm>
             <a:off x="914400" y="1710000"/>
-            <a:ext cx="273960" cy="273960"/>
+            <a:ext cx="273600" cy="273600"/>
           </a:xfrm>
           <a:prstGeom prst="rect">
             <a:avLst/>
@@ -10241,14 +10499,14 @@
       </p:pic>
       <p:sp>
         <p:nvSpPr>
-          <p:cNvPr id="312" name="Título Ayuda entre familias"/>
+          <p:cNvPr id="311" name="Título Ayuda entre familias"/>
           <p:cNvSpPr/>
           <p:nvPr/>
         </p:nvSpPr>
         <p:spPr>
           <a:xfrm>
             <a:off x="1463040" y="1572840"/>
-            <a:ext cx="1416960" cy="548280"/>
+            <a:ext cx="1416600" cy="547920"/>
           </a:xfrm>
           <a:prstGeom prst="rect">
             <a:avLst/>
@@ -10301,14 +10559,14 @@
       </p:sp>
       <p:sp>
         <p:nvSpPr>
-          <p:cNvPr id="313" name="Texto Ayuda entre familias"/>
+          <p:cNvPr id="312" name="Texto Ayuda entre familias"/>
           <p:cNvSpPr/>
           <p:nvPr/>
         </p:nvSpPr>
         <p:spPr>
           <a:xfrm>
             <a:off x="777240" y="2267640"/>
-            <a:ext cx="2057040" cy="548280"/>
+            <a:ext cx="2056680" cy="547920"/>
           </a:xfrm>
           <a:prstGeom prst="rect">
             <a:avLst/>
@@ -10361,14 +10619,14 @@
       </p:sp>
       <p:sp>
         <p:nvSpPr>
-          <p:cNvPr id="314" name="Tarjeta Buscador con IA"/>
+          <p:cNvPr id="313" name="Tarjeta Buscador con IA"/>
           <p:cNvSpPr/>
           <p:nvPr/>
         </p:nvSpPr>
         <p:spPr>
           <a:xfrm>
             <a:off x="3314880" y="1371600"/>
-            <a:ext cx="2514240" cy="1508400"/>
+            <a:ext cx="2513880" cy="1508040"/>
           </a:xfrm>
           <a:prstGeom prst="roundRect">
             <a:avLst>
@@ -10417,14 +10675,14 @@
       </p:sp>
       <p:sp>
         <p:nvSpPr>
-          <p:cNvPr id="315" name="Icono Buscador con IA (fondo)"/>
+          <p:cNvPr id="314" name="Icono Buscador con IA (fondo)"/>
           <p:cNvSpPr/>
           <p:nvPr/>
         </p:nvSpPr>
         <p:spPr>
           <a:xfrm>
             <a:off x="3543480" y="1572840"/>
-            <a:ext cx="548280" cy="548280"/>
+            <a:ext cx="547920" cy="547920"/>
           </a:xfrm>
           <a:prstGeom prst="ellipse">
             <a:avLst/>
@@ -10463,7 +10721,7 @@
       </p:sp>
       <p:pic>
         <p:nvPicPr>
-          <p:cNvPr id="316" name="Icono Buscador con IA" descr="Icono Buscador con IA"/>
+          <p:cNvPr id="315" name="Icono Buscador con IA" descr="Icono Buscador con IA"/>
           <p:cNvPicPr/>
           <p:nvPr/>
         </p:nvPicPr>
@@ -10474,7 +10732,7 @@
         <p:spPr>
           <a:xfrm>
             <a:off x="3680640" y="1710000"/>
-            <a:ext cx="273960" cy="273960"/>
+            <a:ext cx="273600" cy="273600"/>
           </a:xfrm>
           <a:prstGeom prst="rect">
             <a:avLst/>
@@ -10487,14 +10745,14 @@
       </p:pic>
       <p:sp>
         <p:nvSpPr>
-          <p:cNvPr id="317" name="Título Buscador con IA"/>
+          <p:cNvPr id="316" name="Título Buscador con IA"/>
           <p:cNvSpPr/>
           <p:nvPr/>
         </p:nvSpPr>
         <p:spPr>
           <a:xfrm>
             <a:off x="4229280" y="1572840"/>
-            <a:ext cx="1416960" cy="548280"/>
+            <a:ext cx="1416600" cy="547920"/>
           </a:xfrm>
           <a:prstGeom prst="rect">
             <a:avLst/>
@@ -10547,14 +10805,14 @@
       </p:sp>
       <p:sp>
         <p:nvSpPr>
-          <p:cNvPr id="318" name="Texto Buscador con IA"/>
+          <p:cNvPr id="317" name="Texto Buscador con IA"/>
           <p:cNvSpPr/>
           <p:nvPr/>
         </p:nvSpPr>
         <p:spPr>
           <a:xfrm>
             <a:off x="3543480" y="2267640"/>
-            <a:ext cx="2057040" cy="548280"/>
+            <a:ext cx="2056680" cy="547920"/>
           </a:xfrm>
           <a:prstGeom prst="rect">
             <a:avLst/>
@@ -10607,14 +10865,14 @@
       </p:sp>
       <p:sp>
         <p:nvSpPr>
-          <p:cNvPr id="319" name="Tarjeta Pagos de verdad"/>
+          <p:cNvPr id="318" name="Tarjeta Pagos de verdad"/>
           <p:cNvSpPr/>
           <p:nvPr/>
         </p:nvSpPr>
         <p:spPr>
           <a:xfrm>
             <a:off x="6080760" y="1371600"/>
-            <a:ext cx="2514240" cy="1508400"/>
+            <a:ext cx="2513880" cy="1508040"/>
           </a:xfrm>
           <a:prstGeom prst="roundRect">
             <a:avLst>
@@ -10663,14 +10921,14 @@
       </p:sp>
       <p:sp>
         <p:nvSpPr>
-          <p:cNvPr id="320" name="Icono Pagos de verdad (fondo)"/>
+          <p:cNvPr id="319" name="Icono Pagos de verdad (fondo)"/>
           <p:cNvSpPr/>
           <p:nvPr/>
         </p:nvSpPr>
         <p:spPr>
           <a:xfrm>
             <a:off x="6309360" y="1572840"/>
-            <a:ext cx="548280" cy="548280"/>
+            <a:ext cx="547920" cy="547920"/>
           </a:xfrm>
           <a:prstGeom prst="ellipse">
             <a:avLst/>
@@ -10709,7 +10967,7 @@
       </p:sp>
       <p:pic>
         <p:nvPicPr>
-          <p:cNvPr id="321" name="Icono Pagos de verdad" descr="Icono Pagos de verdad"/>
+          <p:cNvPr id="320" name="Icono Pagos de verdad" descr="Icono Pagos de verdad"/>
           <p:cNvPicPr/>
           <p:nvPr/>
         </p:nvPicPr>
@@ -10720,7 +10978,7 @@
         <p:spPr>
           <a:xfrm>
             <a:off x="6446520" y="1710000"/>
-            <a:ext cx="273960" cy="273960"/>
+            <a:ext cx="273600" cy="273600"/>
           </a:xfrm>
           <a:prstGeom prst="rect">
             <a:avLst/>
@@ -10733,14 +10991,14 @@
       </p:pic>
       <p:sp>
         <p:nvSpPr>
-          <p:cNvPr id="322" name="Título Pagos de verdad"/>
+          <p:cNvPr id="321" name="Título Pagos de verdad"/>
           <p:cNvSpPr/>
           <p:nvPr/>
         </p:nvSpPr>
         <p:spPr>
           <a:xfrm>
             <a:off x="6995160" y="1572840"/>
-            <a:ext cx="1416960" cy="548280"/>
+            <a:ext cx="1416600" cy="547920"/>
           </a:xfrm>
           <a:prstGeom prst="rect">
             <a:avLst/>
@@ -10793,14 +11051,14 @@
       </p:sp>
       <p:sp>
         <p:nvSpPr>
-          <p:cNvPr id="323" name="Texto Pagos de verdad"/>
+          <p:cNvPr id="322" name="Texto Pagos de verdad"/>
           <p:cNvSpPr/>
           <p:nvPr/>
         </p:nvSpPr>
         <p:spPr>
           <a:xfrm>
             <a:off x="6309360" y="2267640"/>
-            <a:ext cx="2057040" cy="548280"/>
+            <a:ext cx="2056680" cy="547920"/>
           </a:xfrm>
           <a:prstGeom prst="rect">
             <a:avLst/>
@@ -10853,14 +11111,14 @@
       </p:sp>
       <p:sp>
         <p:nvSpPr>
-          <p:cNvPr id="324" name="Tarjeta Avisos de colegio"/>
+          <p:cNvPr id="323" name="Tarjeta Avisos de colegio"/>
           <p:cNvSpPr/>
           <p:nvPr/>
         </p:nvSpPr>
         <p:spPr>
           <a:xfrm>
             <a:off x="548640" y="3063240"/>
-            <a:ext cx="2514240" cy="1508400"/>
+            <a:ext cx="2513880" cy="1508040"/>
           </a:xfrm>
           <a:prstGeom prst="roundRect">
             <a:avLst>
@@ -10909,14 +11167,14 @@
       </p:sp>
       <p:sp>
         <p:nvSpPr>
-          <p:cNvPr id="325" name="Icono Avisos de colegio (fondo)"/>
+          <p:cNvPr id="324" name="Icono Avisos de colegio (fondo)"/>
           <p:cNvSpPr/>
           <p:nvPr/>
         </p:nvSpPr>
         <p:spPr>
           <a:xfrm>
             <a:off x="777240" y="3264480"/>
-            <a:ext cx="548280" cy="548280"/>
+            <a:ext cx="547920" cy="547920"/>
           </a:xfrm>
           <a:prstGeom prst="ellipse">
             <a:avLst/>
@@ -10955,7 +11213,7 @@
       </p:sp>
       <p:pic>
         <p:nvPicPr>
-          <p:cNvPr id="326" name="Icono Avisos de colegio" descr="Icono Avisos de colegio"/>
+          <p:cNvPr id="325" name="Icono Avisos de colegio" descr="Icono Avisos de colegio"/>
           <p:cNvPicPr/>
           <p:nvPr/>
         </p:nvPicPr>
@@ -10966,7 +11224,7 @@
         <p:spPr>
           <a:xfrm>
             <a:off x="914400" y="3401640"/>
-            <a:ext cx="273960" cy="273960"/>
+            <a:ext cx="273600" cy="273600"/>
           </a:xfrm>
           <a:prstGeom prst="rect">
             <a:avLst/>
@@ -10979,14 +11237,14 @@
       </p:pic>
       <p:sp>
         <p:nvSpPr>
-          <p:cNvPr id="327" name="Título Avisos de colegio"/>
+          <p:cNvPr id="326" name="Título Avisos de colegio"/>
           <p:cNvSpPr/>
           <p:nvPr/>
         </p:nvSpPr>
         <p:spPr>
           <a:xfrm>
             <a:off x="1463040" y="3264480"/>
-            <a:ext cx="1416960" cy="548280"/>
+            <a:ext cx="1416600" cy="547920"/>
           </a:xfrm>
           <a:prstGeom prst="rect">
             <a:avLst/>
@@ -11039,14 +11297,14 @@
       </p:sp>
       <p:sp>
         <p:nvSpPr>
-          <p:cNvPr id="328" name="Texto Avisos de colegio"/>
+          <p:cNvPr id="327" name="Texto Avisos de colegio"/>
           <p:cNvSpPr/>
           <p:nvPr/>
         </p:nvSpPr>
         <p:spPr>
           <a:xfrm>
             <a:off x="777240" y="3959280"/>
-            <a:ext cx="2057040" cy="548280"/>
+            <a:ext cx="2056680" cy="547920"/>
           </a:xfrm>
           <a:prstGeom prst="rect">
             <a:avLst/>
@@ -11099,14 +11357,14 @@
       </p:sp>
       <p:sp>
         <p:nvSpPr>
-          <p:cNvPr id="329" name="Tarjeta Horario de la clase"/>
+          <p:cNvPr id="328" name="Tarjeta Horario de la clase"/>
           <p:cNvSpPr/>
           <p:nvPr/>
         </p:nvSpPr>
         <p:spPr>
           <a:xfrm>
             <a:off x="3314880" y="3063240"/>
-            <a:ext cx="2514240" cy="1508400"/>
+            <a:ext cx="2513880" cy="1508040"/>
           </a:xfrm>
           <a:prstGeom prst="roundRect">
             <a:avLst>
@@ -11155,14 +11413,14 @@
       </p:sp>
       <p:sp>
         <p:nvSpPr>
-          <p:cNvPr id="330" name="Icono Horario de la clase (fondo)"/>
+          <p:cNvPr id="329" name="Icono Horario de la clase (fondo)"/>
           <p:cNvSpPr/>
           <p:nvPr/>
         </p:nvSpPr>
         <p:spPr>
           <a:xfrm>
             <a:off x="3543480" y="3264480"/>
-            <a:ext cx="548280" cy="548280"/>
+            <a:ext cx="547920" cy="547920"/>
           </a:xfrm>
           <a:prstGeom prst="ellipse">
             <a:avLst/>
@@ -11201,14 +11459,14 @@
       </p:sp>
       <p:sp>
         <p:nvSpPr>
-          <p:cNvPr id="331" name="Título Horario de la clase"/>
+          <p:cNvPr id="330" name="Título Horario de la clase"/>
           <p:cNvSpPr/>
           <p:nvPr/>
         </p:nvSpPr>
         <p:spPr>
           <a:xfrm>
             <a:off x="4229280" y="3264480"/>
-            <a:ext cx="1416960" cy="548280"/>
+            <a:ext cx="1416600" cy="547920"/>
           </a:xfrm>
           <a:prstGeom prst="rect">
             <a:avLst/>
@@ -11261,14 +11519,14 @@
       </p:sp>
       <p:sp>
         <p:nvSpPr>
-          <p:cNvPr id="332" name="Texto Horario de la clase"/>
+          <p:cNvPr id="331" name="Texto Horario de la clase"/>
           <p:cNvSpPr/>
           <p:nvPr/>
         </p:nvSpPr>
         <p:spPr>
           <a:xfrm>
             <a:off x="3543480" y="3959280"/>
-            <a:ext cx="2057040" cy="548280"/>
+            <a:ext cx="2056680" cy="547920"/>
           </a:xfrm>
           <a:prstGeom prst="rect">
             <a:avLst/>
@@ -11321,14 +11579,14 @@
       </p:sp>
       <p:sp>
         <p:nvSpPr>
-          <p:cNvPr id="333" name="Tarjeta Varios colegios"/>
+          <p:cNvPr id="332" name="Tarjeta Varios colegios"/>
           <p:cNvSpPr/>
           <p:nvPr/>
         </p:nvSpPr>
         <p:spPr>
           <a:xfrm>
             <a:off x="6080760" y="3063240"/>
-            <a:ext cx="2514240" cy="1508400"/>
+            <a:ext cx="2513880" cy="1508040"/>
           </a:xfrm>
           <a:prstGeom prst="roundRect">
             <a:avLst>
@@ -11377,14 +11635,14 @@
       </p:sp>
       <p:sp>
         <p:nvSpPr>
-          <p:cNvPr id="334" name="Icono Varios colegios (fondo)"/>
+          <p:cNvPr id="333" name="Icono Varios colegios (fondo)"/>
           <p:cNvSpPr/>
           <p:nvPr/>
         </p:nvSpPr>
         <p:spPr>
           <a:xfrm>
             <a:off x="6309360" y="3264480"/>
-            <a:ext cx="548280" cy="548280"/>
+            <a:ext cx="547920" cy="547920"/>
           </a:xfrm>
           <a:prstGeom prst="ellipse">
             <a:avLst/>
@@ -11423,7 +11681,7 @@
       </p:sp>
       <p:pic>
         <p:nvPicPr>
-          <p:cNvPr id="335" name="Icono Varios colegios" descr="Icono Varios colegios"/>
+          <p:cNvPr id="334" name="Icono Varios colegios" descr="Icono Varios colegios"/>
           <p:cNvPicPr/>
           <p:nvPr/>
         </p:nvPicPr>
@@ -11434,7 +11692,7 @@
         <p:spPr>
           <a:xfrm>
             <a:off x="6446520" y="3401640"/>
-            <a:ext cx="273960" cy="273960"/>
+            <a:ext cx="273600" cy="273600"/>
           </a:xfrm>
           <a:prstGeom prst="rect">
             <a:avLst/>
@@ -11447,14 +11705,14 @@
       </p:pic>
       <p:sp>
         <p:nvSpPr>
-          <p:cNvPr id="336" name="Título Varios colegios"/>
+          <p:cNvPr id="335" name="Título Varios colegios"/>
           <p:cNvSpPr/>
           <p:nvPr/>
         </p:nvSpPr>
         <p:spPr>
           <a:xfrm>
             <a:off x="6995160" y="3264480"/>
-            <a:ext cx="1416960" cy="548280"/>
+            <a:ext cx="1416600" cy="547920"/>
           </a:xfrm>
           <a:prstGeom prst="rect">
             <a:avLst/>
@@ -11507,14 +11765,14 @@
       </p:sp>
       <p:sp>
         <p:nvSpPr>
-          <p:cNvPr id="337" name="Texto Varios colegios"/>
+          <p:cNvPr id="336" name="Texto Varios colegios"/>
           <p:cNvSpPr/>
           <p:nvPr/>
         </p:nvSpPr>
         <p:spPr>
           <a:xfrm>
             <a:off x="6309360" y="3959280"/>
-            <a:ext cx="2057040" cy="548280"/>
+            <a:ext cx="2056680" cy="547920"/>
           </a:xfrm>
           <a:prstGeom prst="rect">
             <a:avLst/>
@@ -11567,7 +11825,7 @@
       </p:sp>
       <p:sp>
         <p:nvSpPr>
-          <p:cNvPr id="338" name="PlaceHolder 2"/>
+          <p:cNvPr id="337" name="PlaceHolder 2"/>
           <p:cNvSpPr>
             <a:spLocks noGrp="1"/>
           </p:cNvSpPr>
@@ -11578,7 +11836,7 @@
         <p:spPr>
           <a:xfrm>
             <a:off x="8229600" y="4754880"/>
-            <a:ext cx="456840" cy="228240"/>
+            <a:ext cx="456480" cy="227880"/>
           </a:xfrm>
           <a:prstGeom prst="rect">
             <a:avLst/>
@@ -11598,6 +11856,9 @@
                 <a:spcPct val="100000"/>
               </a:lnSpc>
               <a:buNone/>
+              <a:tabLst>
+                <a:tab pos="0" algn="l"/>
+              </a:tabLst>
               <a:defRPr lang="en-US" sz="1000" b="0" u="none" strike="noStrike">
                 <a:solidFill>
                   <a:srgbClr val="94A3B8"/>
@@ -11614,8 +11875,11 @@
                 <a:spcPct val="100000"/>
               </a:lnSpc>
               <a:buNone/>
+              <a:tabLst>
+                <a:tab pos="0" algn="l"/>
+              </a:tabLst>
             </a:pPr>
-            <a:fld id="{D72F8706-2802-4F51-B8EC-8BFAA05BA593}" type="slidenum">
+            <a:fld id="{606B06F2-21A8-4864-A9A6-5C241601F24D}" type="slidenum">
               <a:rPr lang="en-US" sz="1000" b="0" u="none" strike="noStrike">
                 <a:solidFill>
                   <a:srgbClr val="94A3B8"/>
@@ -11639,7 +11903,7 @@
       </p:sp>
       <p:pic>
         <p:nvPicPr>
-          <p:cNvPr id="339" name="Icono Horario de la clase"/>
+          <p:cNvPr id="338" name="Icono Horario de la clase"/>
           <p:cNvPicPr/>
           <p:nvPr/>
         </p:nvPicPr>
@@ -11656,7 +11920,7 @@
         <p:spPr>
           <a:xfrm>
             <a:off x="3680640" y="3401640"/>
-            <a:ext cx="273960" cy="273960"/>
+            <a:ext cx="273600" cy="273600"/>
           </a:xfrm>
           <a:prstGeom prst="rect">
             <a:avLst/>
@@ -11699,14 +11963,14 @@
       </p:grpSpPr>
       <p:sp>
         <p:nvSpPr>
-          <p:cNvPr id="340" name="Mancha violeta"/>
+          <p:cNvPr id="339" name="Mancha violeta"/>
           <p:cNvSpPr/>
           <p:nvPr/>
         </p:nvSpPr>
         <p:spPr>
           <a:xfrm>
             <a:off x="6217920" y="-1463040"/>
-            <a:ext cx="4205880" cy="4205880"/>
+            <a:ext cx="4205520" cy="4205520"/>
           </a:xfrm>
           <a:prstGeom prst="ellipse">
             <a:avLst/>
@@ -11745,14 +12009,14 @@
       </p:sp>
       <p:sp>
         <p:nvSpPr>
-          <p:cNvPr id="341" name="Mancha rosa"/>
+          <p:cNvPr id="340" name="Mancha rosa"/>
           <p:cNvSpPr/>
           <p:nvPr/>
         </p:nvSpPr>
         <p:spPr>
           <a:xfrm>
             <a:off x="-1280160" y="3291840"/>
-            <a:ext cx="4023000" cy="4023000"/>
+            <a:ext cx="4022640" cy="4022640"/>
           </a:xfrm>
           <a:prstGeom prst="ellipse">
             <a:avLst/>
@@ -11791,14 +12055,14 @@
       </p:sp>
       <p:sp>
         <p:nvSpPr>
-          <p:cNvPr id="342" name="Gracias"/>
+          <p:cNvPr id="341" name="Gracias"/>
           <p:cNvSpPr/>
           <p:nvPr/>
         </p:nvSpPr>
         <p:spPr>
           <a:xfrm>
             <a:off x="548640" y="731520"/>
-            <a:ext cx="8046360" cy="1005480"/>
+            <a:ext cx="8046000" cy="1005120"/>
           </a:xfrm>
           <a:prstGeom prst="rect">
             <a:avLst/>
@@ -11852,14 +12116,14 @@
       </p:sp>
       <p:sp>
         <p:nvSpPr>
-          <p:cNvPr id="343" name="Invitación a probar"/>
+          <p:cNvPr id="342" name="Invitación a probar"/>
           <p:cNvSpPr/>
           <p:nvPr/>
         </p:nvSpPr>
         <p:spPr>
           <a:xfrm>
             <a:off x="548640" y="1828800"/>
-            <a:ext cx="8046360" cy="365400"/>
+            <a:ext cx="8046000" cy="365040"/>
           </a:xfrm>
           <a:prstGeom prst="rect">
             <a:avLst/>
@@ -11912,14 +12176,14 @@
       </p:sp>
       <p:sp>
         <p:nvSpPr>
-          <p:cNvPr id="344" name="Tarjeta de la cuenta de prueba"/>
+          <p:cNvPr id="343" name="Tarjeta de la cuenta de prueba"/>
           <p:cNvSpPr/>
           <p:nvPr/>
         </p:nvSpPr>
         <p:spPr>
           <a:xfrm>
             <a:off x="548640" y="2423160"/>
-            <a:ext cx="4845960" cy="1234080"/>
+            <a:ext cx="4845600" cy="1233720"/>
           </a:xfrm>
           <a:prstGeom prst="roundRect">
             <a:avLst>
@@ -11968,14 +12232,14 @@
       </p:sp>
       <p:sp>
         <p:nvSpPr>
-          <p:cNvPr id="345" name="Icono de la cuenta de prueba (fondo)"/>
+          <p:cNvPr id="344" name="Icono de la cuenta de prueba (fondo)"/>
           <p:cNvSpPr/>
           <p:nvPr/>
         </p:nvSpPr>
         <p:spPr>
           <a:xfrm>
             <a:off x="822960" y="2743200"/>
-            <a:ext cx="594000" cy="594000"/>
+            <a:ext cx="593640" cy="593640"/>
           </a:xfrm>
           <a:prstGeom prst="ellipse">
             <a:avLst/>
@@ -12014,7 +12278,7 @@
       </p:sp>
       <p:pic>
         <p:nvPicPr>
-          <p:cNvPr id="346" name="Icono de la cuenta de prueba" descr="Icono de la cuenta de prueba"/>
+          <p:cNvPr id="345" name="Icono de la cuenta de prueba" descr="Icono de la cuenta de prueba"/>
           <p:cNvPicPr/>
           <p:nvPr/>
         </p:nvPicPr>
@@ -12025,7 +12289,7 @@
         <p:spPr>
           <a:xfrm>
             <a:off x="971640" y="2891880"/>
-            <a:ext cx="297000" cy="297000"/>
+            <a:ext cx="296640" cy="296640"/>
           </a:xfrm>
           <a:prstGeom prst="rect">
             <a:avLst/>
@@ -12038,14 +12302,14 @@
       </p:pic>
       <p:sp>
         <p:nvSpPr>
-          <p:cNvPr id="347" name="Datos de la cuenta de prueba"/>
+          <p:cNvPr id="346" name="Datos de la cuenta de prueba"/>
           <p:cNvSpPr/>
           <p:nvPr/>
         </p:nvSpPr>
         <p:spPr>
           <a:xfrm>
             <a:off x="1645920" y="2560320"/>
-            <a:ext cx="3565800" cy="959760"/>
+            <a:ext cx="3565440" cy="959400"/>
           </a:xfrm>
           <a:prstGeom prst="rect">
             <a:avLst/>
@@ -12155,14 +12419,14 @@
       </p:sp>
       <p:sp>
         <p:nvSpPr>
-          <p:cNvPr id="348" name="Tarjeta decorativa LuHeart"/>
+          <p:cNvPr id="347" name="Tarjeta decorativa LuHeart"/>
           <p:cNvSpPr/>
           <p:nvPr/>
         </p:nvSpPr>
         <p:spPr>
           <a:xfrm rot="21240000">
-            <a:off x="6309000" y="2743200"/>
-            <a:ext cx="1096920" cy="1096920"/>
+            <a:off x="6308640" y="2743200"/>
+            <a:ext cx="1096560" cy="1096560"/>
           </a:xfrm>
           <a:prstGeom prst="roundRect">
             <a:avLst>
@@ -12211,14 +12475,14 @@
       </p:sp>
       <p:sp>
         <p:nvSpPr>
-          <p:cNvPr id="349" name="Icono LuHeart (fondo)"/>
+          <p:cNvPr id="348" name="Icono LuHeart (fondo)"/>
           <p:cNvSpPr/>
           <p:nvPr/>
         </p:nvSpPr>
         <p:spPr>
           <a:xfrm>
             <a:off x="6537960" y="2971800"/>
-            <a:ext cx="639720" cy="639720"/>
+            <a:ext cx="639360" cy="639360"/>
           </a:xfrm>
           <a:prstGeom prst="ellipse">
             <a:avLst/>
@@ -12257,7 +12521,7 @@
       </p:sp>
       <p:pic>
         <p:nvPicPr>
-          <p:cNvPr id="350" name="Icono LuHeart" descr="Icono LuHeart"/>
+          <p:cNvPr id="349" name="Icono LuHeart" descr="Icono LuHeart"/>
           <p:cNvPicPr/>
           <p:nvPr/>
         </p:nvPicPr>
@@ -12268,7 +12532,7 @@
         <p:spPr>
           <a:xfrm>
             <a:off x="6698160" y="3132000"/>
-            <a:ext cx="319680" cy="319680"/>
+            <a:ext cx="319320" cy="319320"/>
           </a:xfrm>
           <a:prstGeom prst="rect">
             <a:avLst/>
@@ -12281,14 +12545,14 @@
       </p:pic>
       <p:sp>
         <p:nvSpPr>
-          <p:cNvPr id="351" name="Tarjeta decorativa LuSparkles"/>
+          <p:cNvPr id="350" name="Tarjeta decorativa LuSparkles"/>
           <p:cNvSpPr/>
           <p:nvPr/>
         </p:nvSpPr>
         <p:spPr>
           <a:xfrm rot="300000">
-            <a:off x="7498080" y="3428640"/>
-            <a:ext cx="1096920" cy="1096920"/>
+            <a:off x="7498080" y="3428280"/>
+            <a:ext cx="1096560" cy="1096560"/>
           </a:xfrm>
           <a:prstGeom prst="roundRect">
             <a:avLst>
@@ -12337,14 +12601,14 @@
       </p:sp>
       <p:sp>
         <p:nvSpPr>
-          <p:cNvPr id="352" name="Icono LuSparkles (fondo)"/>
+          <p:cNvPr id="351" name="Icono LuSparkles (fondo)"/>
           <p:cNvSpPr/>
           <p:nvPr/>
         </p:nvSpPr>
         <p:spPr>
           <a:xfrm>
             <a:off x="7726680" y="3657600"/>
-            <a:ext cx="639720" cy="639720"/>
+            <a:ext cx="639360" cy="639360"/>
           </a:xfrm>
           <a:prstGeom prst="ellipse">
             <a:avLst/>
@@ -12383,7 +12647,7 @@
       </p:sp>
       <p:pic>
         <p:nvPicPr>
-          <p:cNvPr id="353" name="Icono LuSparkles" descr="Icono LuSparkles"/>
+          <p:cNvPr id="352" name="Icono LuSparkles" descr="Icono LuSparkles"/>
           <p:cNvPicPr/>
           <p:nvPr/>
         </p:nvPicPr>
@@ -12394,7 +12658,7 @@
         <p:spPr>
           <a:xfrm>
             <a:off x="7886880" y="3817800"/>
-            <a:ext cx="319680" cy="319680"/>
+            <a:ext cx="319320" cy="319320"/>
           </a:xfrm>
           <a:prstGeom prst="rect">
             <a:avLst/>
@@ -12407,7 +12671,7 @@
       </p:pic>
       <p:pic>
         <p:nvPicPr>
-          <p:cNvPr id="354" name="Logotipo SumiClas" descr="Logotipo de SumiClas"/>
+          <p:cNvPr id="353" name="Logotipo SumiClas" descr="Logotipo de SumiClas"/>
           <p:cNvPicPr/>
           <p:nvPr/>
         </p:nvPicPr>
@@ -12418,7 +12682,7 @@
         <p:spPr>
           <a:xfrm>
             <a:off x="7112160" y="507960"/>
-            <a:ext cx="1269720" cy="1022040"/>
+            <a:ext cx="1269360" cy="1021680"/>
           </a:xfrm>
           <a:prstGeom prst="rect">
             <a:avLst/>
@@ -12468,7 +12732,7 @@
         <p:spPr>
           <a:xfrm>
             <a:off x="6766560" y="2743200"/>
-            <a:ext cx="3291480" cy="3291480"/>
+            <a:ext cx="3291120" cy="3291120"/>
           </a:xfrm>
           <a:prstGeom prst="ellipse">
             <a:avLst/>
@@ -12518,7 +12782,7 @@
         <p:spPr>
           <a:xfrm>
             <a:off x="548640" y="365760"/>
-            <a:ext cx="8046360" cy="731160"/>
+            <a:ext cx="8046000" cy="730800"/>
           </a:xfrm>
           <a:prstGeom prst="rect">
             <a:avLst/>
@@ -12573,7 +12837,7 @@
         <p:spPr>
           <a:xfrm>
             <a:off x="548640" y="1417320"/>
-            <a:ext cx="4480200" cy="731160"/>
+            <a:ext cx="4479840" cy="730800"/>
           </a:xfrm>
           <a:prstGeom prst="roundRect">
             <a:avLst>
@@ -12629,7 +12893,7 @@
         <p:spPr>
           <a:xfrm>
             <a:off x="694800" y="1563480"/>
-            <a:ext cx="438480" cy="438480"/>
+            <a:ext cx="438120" cy="438120"/>
           </a:xfrm>
           <a:prstGeom prst="ellipse">
             <a:avLst/>
@@ -12675,7 +12939,7 @@
         <p:spPr>
           <a:xfrm>
             <a:off x="694800" y="1563480"/>
-            <a:ext cx="438480" cy="438480"/>
+            <a:ext cx="438120" cy="438120"/>
           </a:xfrm>
           <a:prstGeom prst="rect">
             <a:avLst/>
@@ -12735,7 +12999,7 @@
         <p:spPr>
           <a:xfrm>
             <a:off x="1298520" y="1417320"/>
-            <a:ext cx="3565800" cy="731160"/>
+            <a:ext cx="3565440" cy="730800"/>
           </a:xfrm>
           <a:prstGeom prst="rect">
             <a:avLst/>
@@ -12795,7 +13059,7 @@
         <p:spPr>
           <a:xfrm>
             <a:off x="1188720" y="2423160"/>
-            <a:ext cx="4480200" cy="731160"/>
+            <a:ext cx="4479840" cy="730800"/>
           </a:xfrm>
           <a:prstGeom prst="roundRect">
             <a:avLst>
@@ -12851,7 +13115,7 @@
         <p:spPr>
           <a:xfrm>
             <a:off x="1334880" y="2569320"/>
-            <a:ext cx="438480" cy="438480"/>
+            <a:ext cx="438120" cy="438120"/>
           </a:xfrm>
           <a:prstGeom prst="ellipse">
             <a:avLst/>
@@ -12897,7 +13161,7 @@
         <p:spPr>
           <a:xfrm>
             <a:off x="1334880" y="2569320"/>
-            <a:ext cx="438480" cy="438480"/>
+            <a:ext cx="438120" cy="438120"/>
           </a:xfrm>
           <a:prstGeom prst="rect">
             <a:avLst/>
@@ -12957,7 +13221,7 @@
         <p:spPr>
           <a:xfrm>
             <a:off x="1938600" y="2423160"/>
-            <a:ext cx="3565800" cy="731160"/>
+            <a:ext cx="3565440" cy="730800"/>
           </a:xfrm>
           <a:prstGeom prst="rect">
             <a:avLst/>
@@ -13017,7 +13281,7 @@
         <p:spPr>
           <a:xfrm>
             <a:off x="548640" y="3429000"/>
-            <a:ext cx="4480200" cy="731160"/>
+            <a:ext cx="4479840" cy="730800"/>
           </a:xfrm>
           <a:prstGeom prst="roundRect">
             <a:avLst>
@@ -13073,7 +13337,7 @@
         <p:spPr>
           <a:xfrm>
             <a:off x="694800" y="3575160"/>
-            <a:ext cx="438480" cy="438480"/>
+            <a:ext cx="438120" cy="438120"/>
           </a:xfrm>
           <a:prstGeom prst="ellipse">
             <a:avLst/>
@@ -13119,7 +13383,7 @@
         <p:spPr>
           <a:xfrm>
             <a:off x="694800" y="3575160"/>
-            <a:ext cx="438480" cy="438480"/>
+            <a:ext cx="438120" cy="438120"/>
           </a:xfrm>
           <a:prstGeom prst="rect">
             <a:avLst/>
@@ -13179,7 +13443,7 @@
         <p:spPr>
           <a:xfrm>
             <a:off x="1298520" y="3429000"/>
-            <a:ext cx="3565800" cy="731160"/>
+            <a:ext cx="3565440" cy="730800"/>
           </a:xfrm>
           <a:prstGeom prst="rect">
             <a:avLst/>
@@ -13239,7 +13503,7 @@
         <p:spPr>
           <a:xfrm>
             <a:off x="6583680" y="1554480"/>
-            <a:ext cx="1005480" cy="1005480"/>
+            <a:ext cx="1005120" cy="1005120"/>
           </a:xfrm>
           <a:prstGeom prst="ellipse">
             <a:avLst/>
@@ -13285,7 +13549,7 @@
         <p:spPr>
           <a:xfrm>
             <a:off x="6583680" y="1554480"/>
-            <a:ext cx="1005480" cy="1005480"/>
+            <a:ext cx="1005120" cy="1005120"/>
           </a:xfrm>
           <a:prstGeom prst="rect">
             <a:avLst/>
@@ -13346,7 +13610,7 @@
         <p:spPr>
           <a:xfrm>
             <a:off x="5989320" y="2880360"/>
-            <a:ext cx="2651400" cy="1279800"/>
+            <a:ext cx="2651040" cy="1279440"/>
           </a:xfrm>
           <a:prstGeom prst="rect">
             <a:avLst/>
@@ -13410,7 +13674,7 @@
         <p:spPr>
           <a:xfrm>
             <a:off x="8229600" y="4754880"/>
-            <a:ext cx="456840" cy="228240"/>
+            <a:ext cx="456480" cy="227880"/>
           </a:xfrm>
           <a:prstGeom prst="rect">
             <a:avLst/>
@@ -13430,6 +13694,9 @@
                 <a:spcPct val="100000"/>
               </a:lnSpc>
               <a:buNone/>
+              <a:tabLst>
+                <a:tab pos="0" algn="l"/>
+              </a:tabLst>
               <a:defRPr lang="en-US" sz="1000" b="0" u="none" strike="noStrike">
                 <a:solidFill>
                   <a:srgbClr val="94A3B8"/>
@@ -13446,8 +13713,11 @@
                 <a:spcPct val="100000"/>
               </a:lnSpc>
               <a:buNone/>
+              <a:tabLst>
+                <a:tab pos="0" algn="l"/>
+              </a:tabLst>
             </a:pPr>
-            <a:fld id="{23BE79CB-FF8F-47DE-A840-30491BA9001D}" type="slidenum">
+            <a:fld id="{6DA81CCC-6E48-43C9-BF93-AD09CD735B7A}" type="slidenum">
               <a:rPr lang="en-US" sz="1000" b="0" u="none" strike="noStrike">
                 <a:solidFill>
                   <a:srgbClr val="94A3B8"/>
@@ -13508,7 +13778,7 @@
         <p:spPr>
           <a:xfrm>
             <a:off x="-1188720" y="3108960"/>
-            <a:ext cx="3474360" cy="3474360"/>
+            <a:ext cx="3474000" cy="3474000"/>
           </a:xfrm>
           <a:prstGeom prst="ellipse">
             <a:avLst/>
@@ -13558,7 +13828,7 @@
         <p:spPr>
           <a:xfrm>
             <a:off x="548640" y="365760"/>
-            <a:ext cx="8046360" cy="731160"/>
+            <a:ext cx="8046000" cy="730800"/>
           </a:xfrm>
           <a:prstGeom prst="rect">
             <a:avLst/>
@@ -13613,7 +13883,7 @@
         <p:spPr>
           <a:xfrm>
             <a:off x="548640" y="1463040"/>
-            <a:ext cx="4023000" cy="1554120"/>
+            <a:ext cx="4022640" cy="1553760"/>
           </a:xfrm>
           <a:prstGeom prst="rect">
             <a:avLst/>
@@ -13673,7 +13943,7 @@
                 <a:uFillTx/>
                 <a:latin typeface="Calibri"/>
               </a:rPr>
-              <a:t> en una sola app para las familias de una clase.</a:t>
+              <a:t> en una sola web para las familias de una clase.</a:t>
             </a:r>
             <a:endParaRPr lang="es-ES" sz="2000" b="0" u="none" strike="noStrike">
               <a:solidFill>
@@ -13695,7 +13965,7 @@
         <p:spPr>
           <a:xfrm>
             <a:off x="548640" y="3246120"/>
-            <a:ext cx="4023000" cy="914040"/>
+            <a:ext cx="4022640" cy="913680"/>
           </a:xfrm>
           <a:prstGeom prst="rect">
             <a:avLst/>
@@ -13755,7 +14025,7 @@
         <p:spPr>
           <a:xfrm>
             <a:off x="5394960" y="1554480"/>
-            <a:ext cx="2651400" cy="2651400"/>
+            <a:ext cx="2651040" cy="2651040"/>
           </a:xfrm>
           <a:prstGeom prst="ellipse">
             <a:avLst/>
@@ -13801,7 +14071,7 @@
         <p:spPr>
           <a:xfrm>
             <a:off x="6153840" y="2313360"/>
-            <a:ext cx="1133640" cy="1133640"/>
+            <a:ext cx="1133280" cy="1133280"/>
           </a:xfrm>
           <a:prstGeom prst="ellipse">
             <a:avLst/>
@@ -13855,7 +14125,7 @@
         <p:spPr>
           <a:xfrm>
             <a:off x="6309360" y="1143000"/>
-            <a:ext cx="822600" cy="822600"/>
+            <a:ext cx="822240" cy="822240"/>
           </a:xfrm>
           <a:prstGeom prst="ellipse">
             <a:avLst/>
@@ -13902,7 +14172,7 @@
         <p:spPr>
           <a:xfrm>
             <a:off x="6346080" y="1179720"/>
-            <a:ext cx="749520" cy="749520"/>
+            <a:ext cx="749160" cy="749160"/>
           </a:xfrm>
           <a:prstGeom prst="ellipse">
             <a:avLst/>
@@ -13952,7 +14222,7 @@
         <p:spPr>
           <a:xfrm>
             <a:off x="6533280" y="1366920"/>
-            <a:ext cx="374400" cy="374400"/>
+            <a:ext cx="374040" cy="374040"/>
           </a:xfrm>
           <a:prstGeom prst="rect">
             <a:avLst/>
@@ -13972,7 +14242,7 @@
         <p:spPr>
           <a:xfrm>
             <a:off x="7570440" y="2059200"/>
-            <a:ext cx="822600" cy="822600"/>
+            <a:ext cx="822240" cy="822240"/>
           </a:xfrm>
           <a:prstGeom prst="ellipse">
             <a:avLst/>
@@ -14019,7 +14289,7 @@
         <p:spPr>
           <a:xfrm>
             <a:off x="7606800" y="2095560"/>
-            <a:ext cx="749520" cy="749520"/>
+            <a:ext cx="749160" cy="749160"/>
           </a:xfrm>
           <a:prstGeom prst="ellipse">
             <a:avLst/>
@@ -14069,7 +14339,7 @@
         <p:spPr>
           <a:xfrm>
             <a:off x="7794360" y="2283120"/>
-            <a:ext cx="374400" cy="374400"/>
+            <a:ext cx="374040" cy="374040"/>
           </a:xfrm>
           <a:prstGeom prst="rect">
             <a:avLst/>
@@ -14089,7 +14359,7 @@
         <p:spPr>
           <a:xfrm>
             <a:off x="7088760" y="3541680"/>
-            <a:ext cx="822600" cy="822600"/>
+            <a:ext cx="822240" cy="822240"/>
           </a:xfrm>
           <a:prstGeom prst="ellipse">
             <a:avLst/>
@@ -14136,7 +14406,7 @@
         <p:spPr>
           <a:xfrm>
             <a:off x="7125120" y="3578040"/>
-            <a:ext cx="749520" cy="749520"/>
+            <a:ext cx="749160" cy="749160"/>
           </a:xfrm>
           <a:prstGeom prst="ellipse">
             <a:avLst/>
@@ -14186,7 +14456,7 @@
         <p:spPr>
           <a:xfrm>
             <a:off x="7312680" y="3765600"/>
-            <a:ext cx="374400" cy="374400"/>
+            <a:ext cx="374040" cy="374040"/>
           </a:xfrm>
           <a:prstGeom prst="rect">
             <a:avLst/>
@@ -14206,7 +14476,7 @@
         <p:spPr>
           <a:xfrm>
             <a:off x="5529960" y="3541680"/>
-            <a:ext cx="822600" cy="822600"/>
+            <a:ext cx="822240" cy="822240"/>
           </a:xfrm>
           <a:prstGeom prst="ellipse">
             <a:avLst/>
@@ -14253,7 +14523,7 @@
         <p:spPr>
           <a:xfrm>
             <a:off x="5566680" y="3578040"/>
-            <a:ext cx="749520" cy="749520"/>
+            <a:ext cx="749160" cy="749160"/>
           </a:xfrm>
           <a:prstGeom prst="ellipse">
             <a:avLst/>
@@ -14303,7 +14573,7 @@
         <p:spPr>
           <a:xfrm>
             <a:off x="5753880" y="3765600"/>
-            <a:ext cx="374400" cy="374400"/>
+            <a:ext cx="374040" cy="374040"/>
           </a:xfrm>
           <a:prstGeom prst="rect">
             <a:avLst/>
@@ -14323,7 +14593,7 @@
         <p:spPr>
           <a:xfrm>
             <a:off x="5048280" y="2059200"/>
-            <a:ext cx="822600" cy="822600"/>
+            <a:ext cx="822240" cy="822240"/>
           </a:xfrm>
           <a:prstGeom prst="ellipse">
             <a:avLst/>
@@ -14370,7 +14640,7 @@
         <p:spPr>
           <a:xfrm>
             <a:off x="5085000" y="2095560"/>
-            <a:ext cx="749520" cy="749520"/>
+            <a:ext cx="749160" cy="749160"/>
           </a:xfrm>
           <a:prstGeom prst="ellipse">
             <a:avLst/>
@@ -14420,7 +14690,7 @@
         <p:spPr>
           <a:xfrm>
             <a:off x="5272560" y="2283120"/>
-            <a:ext cx="374400" cy="374400"/>
+            <a:ext cx="374040" cy="374040"/>
           </a:xfrm>
           <a:prstGeom prst="rect">
             <a:avLst/>
@@ -14444,7 +14714,7 @@
         <p:spPr>
           <a:xfrm>
             <a:off x="8229600" y="4754880"/>
-            <a:ext cx="456840" cy="228240"/>
+            <a:ext cx="456480" cy="227880"/>
           </a:xfrm>
           <a:prstGeom prst="rect">
             <a:avLst/>
@@ -14464,6 +14734,9 @@
                 <a:spcPct val="100000"/>
               </a:lnSpc>
               <a:buNone/>
+              <a:tabLst>
+                <a:tab pos="0" algn="l"/>
+              </a:tabLst>
               <a:defRPr lang="en-US" sz="1000" b="0" u="none" strike="noStrike">
                 <a:solidFill>
                   <a:srgbClr val="94A3B8"/>
@@ -14480,8 +14753,11 @@
                 <a:spcPct val="100000"/>
               </a:lnSpc>
               <a:buNone/>
+              <a:tabLst>
+                <a:tab pos="0" algn="l"/>
+              </a:tabLst>
             </a:pPr>
-            <a:fld id="{18A2728D-2B66-4BFA-AFDB-90E00E0F85ED}" type="slidenum">
+            <a:fld id="{DDCDAEE5-CB1B-4AA4-A24A-C83A35A897E8}" type="slidenum">
               <a:rPr lang="en-US" sz="1000" b="0" u="none" strike="noStrike">
                 <a:solidFill>
                   <a:srgbClr val="94A3B8"/>
@@ -14516,7 +14792,7 @@
         <p:spPr>
           <a:xfrm>
             <a:off x="6350040" y="2590920"/>
-            <a:ext cx="736200" cy="592560"/>
+            <a:ext cx="735840" cy="592200"/>
           </a:xfrm>
           <a:prstGeom prst="rect">
             <a:avLst/>
@@ -14566,7 +14842,7 @@
         <p:spPr>
           <a:xfrm>
             <a:off x="6949440" y="-1280160"/>
-            <a:ext cx="3108600" cy="3108600"/>
+            <a:ext cx="3108240" cy="3108240"/>
           </a:xfrm>
           <a:prstGeom prst="ellipse">
             <a:avLst/>
@@ -14616,7 +14892,7 @@
         <p:spPr>
           <a:xfrm>
             <a:off x="548640" y="365760"/>
-            <a:ext cx="8046360" cy="731160"/>
+            <a:ext cx="8046000" cy="730800"/>
           </a:xfrm>
           <a:prstGeom prst="rect">
             <a:avLst/>
@@ -14671,7 +14947,7 @@
         <p:spPr>
           <a:xfrm>
             <a:off x="548640" y="1417320"/>
-            <a:ext cx="2514240" cy="3017160"/>
+            <a:ext cx="2513880" cy="3016800"/>
           </a:xfrm>
           <a:prstGeom prst="roundRect">
             <a:avLst>
@@ -14727,7 +15003,7 @@
         <p:spPr>
           <a:xfrm>
             <a:off x="822960" y="1691640"/>
-            <a:ext cx="731160" cy="731160"/>
+            <a:ext cx="730800" cy="730800"/>
           </a:xfrm>
           <a:prstGeom prst="ellipse">
             <a:avLst/>
@@ -14777,7 +15053,7 @@
         <p:spPr>
           <a:xfrm>
             <a:off x="1005840" y="1874520"/>
-            <a:ext cx="365400" cy="365400"/>
+            <a:ext cx="365040" cy="365040"/>
           </a:xfrm>
           <a:prstGeom prst="rect">
             <a:avLst/>
@@ -14797,7 +15073,7 @@
         <p:spPr>
           <a:xfrm>
             <a:off x="822960" y="2606040"/>
-            <a:ext cx="1965600" cy="365400"/>
+            <a:ext cx="1965240" cy="365040"/>
           </a:xfrm>
           <a:prstGeom prst="rect">
             <a:avLst/>
@@ -14857,7 +15133,7 @@
         <p:spPr>
           <a:xfrm>
             <a:off x="822960" y="3063240"/>
-            <a:ext cx="1965600" cy="1234080"/>
+            <a:ext cx="1965240" cy="1233720"/>
           </a:xfrm>
           <a:prstGeom prst="rect">
             <a:avLst/>
@@ -14917,7 +15193,7 @@
         <p:spPr>
           <a:xfrm>
             <a:off x="3314880" y="1417320"/>
-            <a:ext cx="2514240" cy="3017160"/>
+            <a:ext cx="2513880" cy="3016800"/>
           </a:xfrm>
           <a:prstGeom prst="roundRect">
             <a:avLst>
@@ -14973,7 +15249,7 @@
         <p:spPr>
           <a:xfrm>
             <a:off x="3589200" y="1691640"/>
-            <a:ext cx="731160" cy="731160"/>
+            <a:ext cx="730800" cy="730800"/>
           </a:xfrm>
           <a:prstGeom prst="ellipse">
             <a:avLst/>
@@ -15023,7 +15299,7 @@
         <p:spPr>
           <a:xfrm>
             <a:off x="3772080" y="1874520"/>
-            <a:ext cx="365400" cy="365400"/>
+            <a:ext cx="365040" cy="365040"/>
           </a:xfrm>
           <a:prstGeom prst="rect">
             <a:avLst/>
@@ -15043,7 +15319,7 @@
         <p:spPr>
           <a:xfrm>
             <a:off x="3589200" y="2606040"/>
-            <a:ext cx="1965600" cy="365400"/>
+            <a:ext cx="1965240" cy="365040"/>
           </a:xfrm>
           <a:prstGeom prst="rect">
             <a:avLst/>
@@ -15103,7 +15379,7 @@
         <p:spPr>
           <a:xfrm>
             <a:off x="3589200" y="3063240"/>
-            <a:ext cx="1965600" cy="1234080"/>
+            <a:ext cx="1965240" cy="1233720"/>
           </a:xfrm>
           <a:prstGeom prst="rect">
             <a:avLst/>
@@ -15163,7 +15439,7 @@
         <p:spPr>
           <a:xfrm>
             <a:off x="6080760" y="1417320"/>
-            <a:ext cx="2514240" cy="3017160"/>
+            <a:ext cx="2513880" cy="3016800"/>
           </a:xfrm>
           <a:prstGeom prst="roundRect">
             <a:avLst>
@@ -15219,7 +15495,7 @@
         <p:spPr>
           <a:xfrm>
             <a:off x="6355080" y="1691640"/>
-            <a:ext cx="731160" cy="731160"/>
+            <a:ext cx="730800" cy="730800"/>
           </a:xfrm>
           <a:prstGeom prst="ellipse">
             <a:avLst/>
@@ -15269,7 +15545,7 @@
         <p:spPr>
           <a:xfrm>
             <a:off x="6537960" y="1874520"/>
-            <a:ext cx="365400" cy="365400"/>
+            <a:ext cx="365040" cy="365040"/>
           </a:xfrm>
           <a:prstGeom prst="rect">
             <a:avLst/>
@@ -15289,7 +15565,7 @@
         <p:spPr>
           <a:xfrm>
             <a:off x="6355080" y="2606040"/>
-            <a:ext cx="1965600" cy="365400"/>
+            <a:ext cx="1965240" cy="365040"/>
           </a:xfrm>
           <a:prstGeom prst="rect">
             <a:avLst/>
@@ -15349,7 +15625,7 @@
         <p:spPr>
           <a:xfrm>
             <a:off x="6355080" y="3063240"/>
-            <a:ext cx="1965600" cy="1234080"/>
+            <a:ext cx="1965240" cy="1233720"/>
           </a:xfrm>
           <a:prstGeom prst="rect">
             <a:avLst/>
@@ -15413,7 +15689,7 @@
         <p:spPr>
           <a:xfrm>
             <a:off x="8229600" y="4754880"/>
-            <a:ext cx="456840" cy="228240"/>
+            <a:ext cx="456480" cy="227880"/>
           </a:xfrm>
           <a:prstGeom prst="rect">
             <a:avLst/>
@@ -15433,6 +15709,9 @@
                 <a:spcPct val="100000"/>
               </a:lnSpc>
               <a:buNone/>
+              <a:tabLst>
+                <a:tab pos="0" algn="l"/>
+              </a:tabLst>
               <a:defRPr lang="en-US" sz="1000" b="0" u="none" strike="noStrike">
                 <a:solidFill>
                   <a:srgbClr val="94A3B8"/>
@@ -15449,8 +15728,11 @@
                 <a:spcPct val="100000"/>
               </a:lnSpc>
               <a:buNone/>
+              <a:tabLst>
+                <a:tab pos="0" algn="l"/>
+              </a:tabLst>
             </a:pPr>
-            <a:fld id="{B08F30CE-4F8D-4E62-9D24-A1DA5439E75B}" type="slidenum">
+            <a:fld id="{B6E4FC49-6BE3-4D18-B09F-190152AFB661}" type="slidenum">
               <a:rPr lang="en-US" sz="1000" b="0" u="none" strike="noStrike">
                 <a:solidFill>
                   <a:srgbClr val="94A3B8"/>
@@ -15511,7 +15793,7 @@
         <p:spPr>
           <a:xfrm>
             <a:off x="-1097280" y="-1188720"/>
-            <a:ext cx="2925720" cy="2925720"/>
+            <a:ext cx="2925360" cy="2925360"/>
           </a:xfrm>
           <a:prstGeom prst="ellipse">
             <a:avLst/>
@@ -15561,7 +15843,7 @@
         <p:spPr>
           <a:xfrm>
             <a:off x="548640" y="365760"/>
-            <a:ext cx="8046360" cy="731160"/>
+            <a:ext cx="8046000" cy="730800"/>
           </a:xfrm>
           <a:prstGeom prst="rect">
             <a:avLst/>
@@ -15616,7 +15898,7 @@
         <p:spPr>
           <a:xfrm>
             <a:off x="548640" y="1371600"/>
-            <a:ext cx="2514240" cy="1508400"/>
+            <a:ext cx="2513880" cy="1508040"/>
           </a:xfrm>
           <a:prstGeom prst="roundRect">
             <a:avLst>
@@ -15672,7 +15954,7 @@
         <p:spPr>
           <a:xfrm>
             <a:off x="777240" y="1572840"/>
-            <a:ext cx="548280" cy="548280"/>
+            <a:ext cx="547920" cy="547920"/>
           </a:xfrm>
           <a:prstGeom prst="ellipse">
             <a:avLst/>
@@ -15722,7 +16004,7 @@
         <p:spPr>
           <a:xfrm>
             <a:off x="914400" y="1710000"/>
-            <a:ext cx="273960" cy="273960"/>
+            <a:ext cx="273600" cy="273600"/>
           </a:xfrm>
           <a:prstGeom prst="rect">
             <a:avLst/>
@@ -15742,7 +16024,7 @@
         <p:spPr>
           <a:xfrm>
             <a:off x="1463040" y="1572840"/>
-            <a:ext cx="1416960" cy="548280"/>
+            <a:ext cx="1416600" cy="547920"/>
           </a:xfrm>
           <a:prstGeom prst="rect">
             <a:avLst/>
@@ -15802,7 +16084,7 @@
         <p:spPr>
           <a:xfrm>
             <a:off x="777240" y="2286000"/>
-            <a:ext cx="2057040" cy="456840"/>
+            <a:ext cx="2056680" cy="456480"/>
           </a:xfrm>
           <a:prstGeom prst="rect">
             <a:avLst/>
@@ -15862,7 +16144,7 @@
         <p:spPr>
           <a:xfrm>
             <a:off x="3314880" y="1371600"/>
-            <a:ext cx="2514240" cy="1508400"/>
+            <a:ext cx="2513880" cy="1508040"/>
           </a:xfrm>
           <a:prstGeom prst="roundRect">
             <a:avLst>
@@ -15918,7 +16200,7 @@
         <p:spPr>
           <a:xfrm>
             <a:off x="3543480" y="1572840"/>
-            <a:ext cx="548280" cy="548280"/>
+            <a:ext cx="547920" cy="547920"/>
           </a:xfrm>
           <a:prstGeom prst="ellipse">
             <a:avLst/>
@@ -15968,7 +16250,7 @@
         <p:spPr>
           <a:xfrm>
             <a:off x="3680640" y="1710000"/>
-            <a:ext cx="273960" cy="273960"/>
+            <a:ext cx="273600" cy="273600"/>
           </a:xfrm>
           <a:prstGeom prst="rect">
             <a:avLst/>
@@ -15988,7 +16270,7 @@
         <p:spPr>
           <a:xfrm>
             <a:off x="4229280" y="1572840"/>
-            <a:ext cx="1416960" cy="548280"/>
+            <a:ext cx="1416600" cy="547920"/>
           </a:xfrm>
           <a:prstGeom prst="rect">
             <a:avLst/>
@@ -16048,7 +16330,7 @@
         <p:spPr>
           <a:xfrm>
             <a:off x="3543480" y="2286000"/>
-            <a:ext cx="2057040" cy="456840"/>
+            <a:ext cx="2056680" cy="456480"/>
           </a:xfrm>
           <a:prstGeom prst="rect">
             <a:avLst/>
@@ -16108,7 +16390,7 @@
         <p:spPr>
           <a:xfrm>
             <a:off x="6080760" y="1371600"/>
-            <a:ext cx="2514240" cy="1508400"/>
+            <a:ext cx="2513880" cy="1508040"/>
           </a:xfrm>
           <a:prstGeom prst="roundRect">
             <a:avLst>
@@ -16164,7 +16446,7 @@
         <p:spPr>
           <a:xfrm>
             <a:off x="6309360" y="1572840"/>
-            <a:ext cx="548280" cy="548280"/>
+            <a:ext cx="547920" cy="547920"/>
           </a:xfrm>
           <a:prstGeom prst="ellipse">
             <a:avLst/>
@@ -16214,7 +16496,7 @@
         <p:spPr>
           <a:xfrm>
             <a:off x="6446520" y="1710000"/>
-            <a:ext cx="273960" cy="273960"/>
+            <a:ext cx="273600" cy="273600"/>
           </a:xfrm>
           <a:prstGeom prst="rect">
             <a:avLst/>
@@ -16234,7 +16516,7 @@
         <p:spPr>
           <a:xfrm>
             <a:off x="6995160" y="1572840"/>
-            <a:ext cx="1416960" cy="548280"/>
+            <a:ext cx="1416600" cy="547920"/>
           </a:xfrm>
           <a:prstGeom prst="rect">
             <a:avLst/>
@@ -16294,7 +16576,7 @@
         <p:spPr>
           <a:xfrm>
             <a:off x="6309360" y="2286000"/>
-            <a:ext cx="2057040" cy="456840"/>
+            <a:ext cx="2056680" cy="456480"/>
           </a:xfrm>
           <a:prstGeom prst="rect">
             <a:avLst/>
@@ -16354,7 +16636,7 @@
         <p:spPr>
           <a:xfrm>
             <a:off x="548640" y="3063240"/>
-            <a:ext cx="2514240" cy="1508400"/>
+            <a:ext cx="2513880" cy="1508040"/>
           </a:xfrm>
           <a:prstGeom prst="roundRect">
             <a:avLst>
@@ -16410,7 +16692,7 @@
         <p:spPr>
           <a:xfrm>
             <a:off x="777240" y="3264480"/>
-            <a:ext cx="548280" cy="548280"/>
+            <a:ext cx="547920" cy="547920"/>
           </a:xfrm>
           <a:prstGeom prst="ellipse">
             <a:avLst/>
@@ -16460,7 +16742,7 @@
         <p:spPr>
           <a:xfrm>
             <a:off x="914400" y="3401640"/>
-            <a:ext cx="273960" cy="273960"/>
+            <a:ext cx="273600" cy="273600"/>
           </a:xfrm>
           <a:prstGeom prst="rect">
             <a:avLst/>
@@ -16480,7 +16762,7 @@
         <p:spPr>
           <a:xfrm>
             <a:off x="1463040" y="3264480"/>
-            <a:ext cx="1416960" cy="548280"/>
+            <a:ext cx="1416600" cy="547920"/>
           </a:xfrm>
           <a:prstGeom prst="rect">
             <a:avLst/>
@@ -16540,7 +16822,7 @@
         <p:spPr>
           <a:xfrm>
             <a:off x="777240" y="3977640"/>
-            <a:ext cx="2057040" cy="456840"/>
+            <a:ext cx="2056680" cy="456480"/>
           </a:xfrm>
           <a:prstGeom prst="rect">
             <a:avLst/>
@@ -16600,7 +16882,7 @@
         <p:spPr>
           <a:xfrm>
             <a:off x="3314880" y="3063240"/>
-            <a:ext cx="2514240" cy="1508400"/>
+            <a:ext cx="2513880" cy="1508040"/>
           </a:xfrm>
           <a:prstGeom prst="roundRect">
             <a:avLst>
@@ -16656,7 +16938,7 @@
         <p:spPr>
           <a:xfrm>
             <a:off x="3543480" y="3264480"/>
-            <a:ext cx="548280" cy="548280"/>
+            <a:ext cx="547920" cy="547920"/>
           </a:xfrm>
           <a:prstGeom prst="ellipse">
             <a:avLst/>
@@ -16706,7 +16988,7 @@
         <p:spPr>
           <a:xfrm>
             <a:off x="3680640" y="3401640"/>
-            <a:ext cx="273960" cy="273960"/>
+            <a:ext cx="273600" cy="273600"/>
           </a:xfrm>
           <a:prstGeom prst="rect">
             <a:avLst/>
@@ -16726,7 +17008,7 @@
         <p:spPr>
           <a:xfrm>
             <a:off x="4229280" y="3264480"/>
-            <a:ext cx="1416960" cy="548280"/>
+            <a:ext cx="1416600" cy="547920"/>
           </a:xfrm>
           <a:prstGeom prst="rect">
             <a:avLst/>
@@ -16786,7 +17068,7 @@
         <p:spPr>
           <a:xfrm>
             <a:off x="3543480" y="3977640"/>
-            <a:ext cx="2057040" cy="456840"/>
+            <a:ext cx="2056680" cy="456480"/>
           </a:xfrm>
           <a:prstGeom prst="rect">
             <a:avLst/>
@@ -16846,7 +17128,7 @@
         <p:spPr>
           <a:xfrm>
             <a:off x="6080760" y="3063240"/>
-            <a:ext cx="2514240" cy="1508400"/>
+            <a:ext cx="2513880" cy="1508040"/>
           </a:xfrm>
           <a:prstGeom prst="roundRect">
             <a:avLst>
@@ -16902,7 +17184,7 @@
         <p:spPr>
           <a:xfrm>
             <a:off x="6309360" y="3264480"/>
-            <a:ext cx="548280" cy="548280"/>
+            <a:ext cx="547920" cy="547920"/>
           </a:xfrm>
           <a:prstGeom prst="ellipse">
             <a:avLst/>
@@ -16952,7 +17234,7 @@
         <p:spPr>
           <a:xfrm>
             <a:off x="6446520" y="3401640"/>
-            <a:ext cx="273960" cy="273960"/>
+            <a:ext cx="273600" cy="273600"/>
           </a:xfrm>
           <a:prstGeom prst="rect">
             <a:avLst/>
@@ -16972,7 +17254,7 @@
         <p:spPr>
           <a:xfrm>
             <a:off x="6995160" y="3264480"/>
-            <a:ext cx="1416960" cy="548280"/>
+            <a:ext cx="1416600" cy="547920"/>
           </a:xfrm>
           <a:prstGeom prst="rect">
             <a:avLst/>
@@ -17032,7 +17314,7 @@
         <p:spPr>
           <a:xfrm>
             <a:off x="6309360" y="3977640"/>
-            <a:ext cx="2057040" cy="456840"/>
+            <a:ext cx="2056680" cy="456480"/>
           </a:xfrm>
           <a:prstGeom prst="rect">
             <a:avLst/>
@@ -17096,7 +17378,7 @@
         <p:spPr>
           <a:xfrm>
             <a:off x="8229600" y="4754880"/>
-            <a:ext cx="456840" cy="228240"/>
+            <a:ext cx="456480" cy="227880"/>
           </a:xfrm>
           <a:prstGeom prst="rect">
             <a:avLst/>
@@ -17116,6 +17398,9 @@
                 <a:spcPct val="100000"/>
               </a:lnSpc>
               <a:buNone/>
+              <a:tabLst>
+                <a:tab pos="0" algn="l"/>
+              </a:tabLst>
               <a:defRPr lang="en-US" sz="1000" b="0" u="none" strike="noStrike">
                 <a:solidFill>
                   <a:srgbClr val="94A3B8"/>
@@ -17132,8 +17417,11 @@
                 <a:spcPct val="100000"/>
               </a:lnSpc>
               <a:buNone/>
+              <a:tabLst>
+                <a:tab pos="0" algn="l"/>
+              </a:tabLst>
             </a:pPr>
-            <a:fld id="{BCADA163-6471-46FD-A75A-8FECC0ADE2D9}" type="slidenum">
+            <a:fld id="{5C1C075D-B71B-4D83-942D-E53900452309}" type="slidenum">
               <a:rPr lang="en-US" sz="1000" b="0" u="none" strike="noStrike">
                 <a:solidFill>
                   <a:srgbClr val="94A3B8"/>
@@ -17194,7 +17482,7 @@
         <p:spPr>
           <a:xfrm>
             <a:off x="2926080" y="3291840"/>
-            <a:ext cx="3108600" cy="3108600"/>
+            <a:ext cx="3108240" cy="3108240"/>
           </a:xfrm>
           <a:prstGeom prst="ellipse">
             <a:avLst/>
@@ -17244,7 +17532,7 @@
         <p:spPr>
           <a:xfrm>
             <a:off x="548640" y="365760"/>
-            <a:ext cx="8046360" cy="731160"/>
+            <a:ext cx="8046000" cy="730800"/>
           </a:xfrm>
           <a:prstGeom prst="rect">
             <a:avLst/>
@@ -17299,7 +17587,7 @@
         <p:spPr>
           <a:xfrm>
             <a:off x="548640" y="1371600"/>
-            <a:ext cx="3885840" cy="2764440"/>
+            <a:ext cx="3885480" cy="2764080"/>
           </a:xfrm>
           <a:prstGeom prst="roundRect">
             <a:avLst>
@@ -17355,7 +17643,7 @@
         <p:spPr>
           <a:xfrm>
             <a:off x="694800" y="1476720"/>
-            <a:ext cx="82080" cy="82080"/>
+            <a:ext cx="81720" cy="81720"/>
           </a:xfrm>
           <a:prstGeom prst="ellipse">
             <a:avLst/>
@@ -17374,7 +17662,7 @@
           <a:fontRef idx="minor"/>
         </p:style>
         <p:txBody>
-          <a:bodyPr lIns="90000" tIns="13320" rIns="90000" bIns="13320" anchor="t">
+          <a:bodyPr lIns="41040" tIns="13320" rIns="41040" bIns="13320" anchor="t">
             <a:noAutofit/>
           </a:bodyPr>
           <a:p>
@@ -17399,7 +17687,7 @@
         <p:spPr>
           <a:xfrm>
             <a:off x="841320" y="1476720"/>
-            <a:ext cx="82080" cy="82080"/>
+            <a:ext cx="81720" cy="81720"/>
           </a:xfrm>
           <a:prstGeom prst="ellipse">
             <a:avLst/>
@@ -17418,7 +17706,7 @@
           <a:fontRef idx="minor"/>
         </p:style>
         <p:txBody>
-          <a:bodyPr lIns="90000" tIns="13320" rIns="90000" bIns="13320" anchor="t">
+          <a:bodyPr lIns="41040" tIns="13320" rIns="41040" bIns="13320" anchor="t">
             <a:noAutofit/>
           </a:bodyPr>
           <a:p>
@@ -17443,7 +17731,7 @@
         <p:spPr>
           <a:xfrm>
             <a:off x="987480" y="1476720"/>
-            <a:ext cx="82080" cy="82080"/>
+            <a:ext cx="81720" cy="81720"/>
           </a:xfrm>
           <a:prstGeom prst="ellipse">
             <a:avLst/>
@@ -17462,7 +17750,7 @@
           <a:fontRef idx="minor"/>
         </p:style>
         <p:txBody>
-          <a:bodyPr lIns="90000" tIns="13320" rIns="90000" bIns="13320" anchor="t">
+          <a:bodyPr lIns="41040" tIns="13320" rIns="41040" bIns="13320" anchor="t">
             <a:noAutofit/>
           </a:bodyPr>
           <a:p>
@@ -17487,7 +17775,7 @@
         <p:spPr>
           <a:xfrm>
             <a:off x="1261800" y="1426320"/>
-            <a:ext cx="1371240" cy="182520"/>
+            <a:ext cx="1370880" cy="182160"/>
           </a:xfrm>
           <a:prstGeom prst="roundRect">
             <a:avLst>
@@ -17558,7 +17846,7 @@
         <p:spPr>
           <a:xfrm>
             <a:off x="603360" y="1664280"/>
-            <a:ext cx="3776040" cy="2417040"/>
+            <a:ext cx="3775680" cy="2416680"/>
           </a:xfrm>
           <a:prstGeom prst="rect">
             <a:avLst/>
@@ -17578,7 +17866,7 @@
         <p:spPr>
           <a:xfrm>
             <a:off x="548640" y="4319280"/>
-            <a:ext cx="3885840" cy="365400"/>
+            <a:ext cx="3885480" cy="365040"/>
           </a:xfrm>
           <a:prstGeom prst="rect">
             <a:avLst/>
@@ -17649,7 +17937,7 @@
         <p:spPr>
           <a:xfrm>
             <a:off x="4709160" y="1371600"/>
-            <a:ext cx="3885840" cy="2764440"/>
+            <a:ext cx="3885480" cy="2764080"/>
           </a:xfrm>
           <a:prstGeom prst="roundRect">
             <a:avLst>
@@ -17705,7 +17993,7 @@
         <p:spPr>
           <a:xfrm>
             <a:off x="4855320" y="1476720"/>
-            <a:ext cx="82080" cy="82080"/>
+            <a:ext cx="81720" cy="81720"/>
           </a:xfrm>
           <a:prstGeom prst="ellipse">
             <a:avLst/>
@@ -17724,7 +18012,7 @@
           <a:fontRef idx="minor"/>
         </p:style>
         <p:txBody>
-          <a:bodyPr lIns="90000" tIns="13320" rIns="90000" bIns="13320" anchor="t">
+          <a:bodyPr lIns="41040" tIns="13320" rIns="41040" bIns="13320" anchor="t">
             <a:noAutofit/>
           </a:bodyPr>
           <a:p>
@@ -17749,7 +18037,7 @@
         <p:spPr>
           <a:xfrm>
             <a:off x="5001840" y="1476720"/>
-            <a:ext cx="82080" cy="82080"/>
+            <a:ext cx="81720" cy="81720"/>
           </a:xfrm>
           <a:prstGeom prst="ellipse">
             <a:avLst/>
@@ -17768,7 +18056,7 @@
           <a:fontRef idx="minor"/>
         </p:style>
         <p:txBody>
-          <a:bodyPr lIns="90000" tIns="13320" rIns="90000" bIns="13320" anchor="t">
+          <a:bodyPr lIns="41040" tIns="13320" rIns="41040" bIns="13320" anchor="t">
             <a:noAutofit/>
           </a:bodyPr>
           <a:p>
@@ -17793,7 +18081,7 @@
         <p:spPr>
           <a:xfrm>
             <a:off x="5148000" y="1476720"/>
-            <a:ext cx="82080" cy="82080"/>
+            <a:ext cx="81720" cy="81720"/>
           </a:xfrm>
           <a:prstGeom prst="ellipse">
             <a:avLst/>
@@ -17812,7 +18100,7 @@
           <a:fontRef idx="minor"/>
         </p:style>
         <p:txBody>
-          <a:bodyPr lIns="90000" tIns="13320" rIns="90000" bIns="13320" anchor="t">
+          <a:bodyPr lIns="41040" tIns="13320" rIns="41040" bIns="13320" anchor="t">
             <a:noAutofit/>
           </a:bodyPr>
           <a:p>
@@ -17837,7 +18125,7 @@
         <p:spPr>
           <a:xfrm>
             <a:off x="5422320" y="1426320"/>
-            <a:ext cx="1371240" cy="182520"/>
+            <a:ext cx="1370880" cy="182160"/>
           </a:xfrm>
           <a:prstGeom prst="roundRect">
             <a:avLst>
@@ -17908,7 +18196,7 @@
         <p:spPr>
           <a:xfrm>
             <a:off x="4763880" y="1664280"/>
-            <a:ext cx="3776040" cy="2417040"/>
+            <a:ext cx="3775680" cy="2416680"/>
           </a:xfrm>
           <a:prstGeom prst="rect">
             <a:avLst/>
@@ -17928,7 +18216,7 @@
         <p:spPr>
           <a:xfrm>
             <a:off x="4709160" y="4319280"/>
-            <a:ext cx="3885840" cy="365400"/>
+            <a:ext cx="3885480" cy="365040"/>
           </a:xfrm>
           <a:prstGeom prst="rect">
             <a:avLst/>
@@ -18003,7 +18291,7 @@
         <p:spPr>
           <a:xfrm>
             <a:off x="8229600" y="4754880"/>
-            <a:ext cx="456840" cy="228240"/>
+            <a:ext cx="456480" cy="227880"/>
           </a:xfrm>
           <a:prstGeom prst="rect">
             <a:avLst/>
@@ -18023,6 +18311,9 @@
                 <a:spcPct val="100000"/>
               </a:lnSpc>
               <a:buNone/>
+              <a:tabLst>
+                <a:tab pos="0" algn="l"/>
+              </a:tabLst>
               <a:defRPr lang="en-US" sz="1000" b="0" u="none" strike="noStrike">
                 <a:solidFill>
                   <a:srgbClr val="94A3B8"/>
@@ -18039,8 +18330,11 @@
                 <a:spcPct val="100000"/>
               </a:lnSpc>
               <a:buNone/>
+              <a:tabLst>
+                <a:tab pos="0" algn="l"/>
+              </a:tabLst>
             </a:pPr>
-            <a:fld id="{C343CEF7-9D48-4106-93FC-60B403622A14}" type="slidenum">
+            <a:fld id="{81EC194F-9D65-4AC2-B85A-E437177DD9C0}" type="slidenum">
               <a:rPr lang="en-US" sz="1000" b="0" u="none" strike="noStrike">
                 <a:solidFill>
                   <a:srgbClr val="94A3B8"/>
@@ -18101,7 +18395,7 @@
         <p:spPr>
           <a:xfrm>
             <a:off x="6949440" y="3108960"/>
-            <a:ext cx="3291480" cy="3291480"/>
+            <a:ext cx="3291120" cy="3291120"/>
           </a:xfrm>
           <a:prstGeom prst="ellipse">
             <a:avLst/>
@@ -18151,7 +18445,7 @@
         <p:spPr>
           <a:xfrm>
             <a:off x="548640" y="365760"/>
-            <a:ext cx="8046360" cy="731160"/>
+            <a:ext cx="8046000" cy="730800"/>
           </a:xfrm>
           <a:prstGeom prst="rect">
             <a:avLst/>
@@ -18206,7 +18500,7 @@
         <p:spPr>
           <a:xfrm>
             <a:off x="548640" y="1371600"/>
-            <a:ext cx="3885840" cy="2764440"/>
+            <a:ext cx="3885480" cy="2764080"/>
           </a:xfrm>
           <a:prstGeom prst="roundRect">
             <a:avLst>
@@ -18262,7 +18556,7 @@
         <p:spPr>
           <a:xfrm>
             <a:off x="694800" y="1476720"/>
-            <a:ext cx="82080" cy="82080"/>
+            <a:ext cx="81720" cy="81720"/>
           </a:xfrm>
           <a:prstGeom prst="ellipse">
             <a:avLst/>
@@ -18281,7 +18575,7 @@
           <a:fontRef idx="minor"/>
         </p:style>
         <p:txBody>
-          <a:bodyPr lIns="90000" tIns="13320" rIns="90000" bIns="13320" anchor="t">
+          <a:bodyPr lIns="41040" tIns="13320" rIns="41040" bIns="13320" anchor="t">
             <a:noAutofit/>
           </a:bodyPr>
           <a:p>
@@ -18306,7 +18600,7 @@
         <p:spPr>
           <a:xfrm>
             <a:off x="841320" y="1476720"/>
-            <a:ext cx="82080" cy="82080"/>
+            <a:ext cx="81720" cy="81720"/>
           </a:xfrm>
           <a:prstGeom prst="ellipse">
             <a:avLst/>
@@ -18325,7 +18619,7 @@
           <a:fontRef idx="minor"/>
         </p:style>
         <p:txBody>
-          <a:bodyPr lIns="90000" tIns="13320" rIns="90000" bIns="13320" anchor="t">
+          <a:bodyPr lIns="41040" tIns="13320" rIns="41040" bIns="13320" anchor="t">
             <a:noAutofit/>
           </a:bodyPr>
           <a:p>
@@ -18350,7 +18644,7 @@
         <p:spPr>
           <a:xfrm>
             <a:off x="987480" y="1476720"/>
-            <a:ext cx="82080" cy="82080"/>
+            <a:ext cx="81720" cy="81720"/>
           </a:xfrm>
           <a:prstGeom prst="ellipse">
             <a:avLst/>
@@ -18369,7 +18663,7 @@
           <a:fontRef idx="minor"/>
         </p:style>
         <p:txBody>
-          <a:bodyPr lIns="90000" tIns="13320" rIns="90000" bIns="13320" anchor="t">
+          <a:bodyPr lIns="41040" tIns="13320" rIns="41040" bIns="13320" anchor="t">
             <a:noAutofit/>
           </a:bodyPr>
           <a:p>
@@ -18394,7 +18688,7 @@
         <p:spPr>
           <a:xfrm>
             <a:off x="1261800" y="1426320"/>
-            <a:ext cx="1371240" cy="182520"/>
+            <a:ext cx="1370880" cy="182160"/>
           </a:xfrm>
           <a:prstGeom prst="roundRect">
             <a:avLst>
@@ -18465,7 +18759,7 @@
         <p:spPr>
           <a:xfrm>
             <a:off x="603360" y="1664280"/>
-            <a:ext cx="3776040" cy="2417040"/>
+            <a:ext cx="3775680" cy="2416680"/>
           </a:xfrm>
           <a:prstGeom prst="rect">
             <a:avLst/>
@@ -18485,7 +18779,7 @@
         <p:spPr>
           <a:xfrm>
             <a:off x="548640" y="4319280"/>
-            <a:ext cx="3885840" cy="365400"/>
+            <a:ext cx="3885480" cy="365040"/>
           </a:xfrm>
           <a:prstGeom prst="rect">
             <a:avLst/>
@@ -18556,7 +18850,7 @@
         <p:spPr>
           <a:xfrm>
             <a:off x="4709160" y="1371600"/>
-            <a:ext cx="3885840" cy="2764440"/>
+            <a:ext cx="3885480" cy="2764080"/>
           </a:xfrm>
           <a:prstGeom prst="roundRect">
             <a:avLst>
@@ -18612,7 +18906,7 @@
         <p:spPr>
           <a:xfrm>
             <a:off x="4855320" y="1476720"/>
-            <a:ext cx="82080" cy="82080"/>
+            <a:ext cx="81720" cy="81720"/>
           </a:xfrm>
           <a:prstGeom prst="ellipse">
             <a:avLst/>
@@ -18631,7 +18925,7 @@
           <a:fontRef idx="minor"/>
         </p:style>
         <p:txBody>
-          <a:bodyPr lIns="90000" tIns="13320" rIns="90000" bIns="13320" anchor="t">
+          <a:bodyPr lIns="41040" tIns="13320" rIns="41040" bIns="13320" anchor="t">
             <a:noAutofit/>
           </a:bodyPr>
           <a:p>
@@ -18656,7 +18950,7 @@
         <p:spPr>
           <a:xfrm>
             <a:off x="5001840" y="1476720"/>
-            <a:ext cx="82080" cy="82080"/>
+            <a:ext cx="81720" cy="81720"/>
           </a:xfrm>
           <a:prstGeom prst="ellipse">
             <a:avLst/>
@@ -18675,7 +18969,7 @@
           <a:fontRef idx="minor"/>
         </p:style>
         <p:txBody>
-          <a:bodyPr lIns="90000" tIns="13320" rIns="90000" bIns="13320" anchor="t">
+          <a:bodyPr lIns="41040" tIns="13320" rIns="41040" bIns="13320" anchor="t">
             <a:noAutofit/>
           </a:bodyPr>
           <a:p>
@@ -18700,7 +18994,7 @@
         <p:spPr>
           <a:xfrm>
             <a:off x="5148000" y="1476720"/>
-            <a:ext cx="82080" cy="82080"/>
+            <a:ext cx="81720" cy="81720"/>
           </a:xfrm>
           <a:prstGeom prst="ellipse">
             <a:avLst/>
@@ -18719,7 +19013,7 @@
           <a:fontRef idx="minor"/>
         </p:style>
         <p:txBody>
-          <a:bodyPr lIns="90000" tIns="13320" rIns="90000" bIns="13320" anchor="t">
+          <a:bodyPr lIns="41040" tIns="13320" rIns="41040" bIns="13320" anchor="t">
             <a:noAutofit/>
           </a:bodyPr>
           <a:p>
@@ -18744,7 +19038,7 @@
         <p:spPr>
           <a:xfrm>
             <a:off x="5422320" y="1426320"/>
-            <a:ext cx="1371240" cy="182520"/>
+            <a:ext cx="1370880" cy="182160"/>
           </a:xfrm>
           <a:prstGeom prst="roundRect">
             <a:avLst>
@@ -18815,7 +19109,7 @@
         <p:spPr>
           <a:xfrm>
             <a:off x="4763880" y="1664280"/>
-            <a:ext cx="3776040" cy="2417040"/>
+            <a:ext cx="3775680" cy="2416680"/>
           </a:xfrm>
           <a:prstGeom prst="rect">
             <a:avLst/>
@@ -18835,7 +19129,7 @@
         <p:spPr>
           <a:xfrm>
             <a:off x="4709160" y="4319280"/>
-            <a:ext cx="3885840" cy="365400"/>
+            <a:ext cx="3885480" cy="365040"/>
           </a:xfrm>
           <a:prstGeom prst="rect">
             <a:avLst/>
@@ -18910,7 +19204,7 @@
         <p:spPr>
           <a:xfrm>
             <a:off x="8229600" y="4754880"/>
-            <a:ext cx="456840" cy="228240"/>
+            <a:ext cx="456480" cy="227880"/>
           </a:xfrm>
           <a:prstGeom prst="rect">
             <a:avLst/>
@@ -18930,6 +19224,9 @@
                 <a:spcPct val="100000"/>
               </a:lnSpc>
               <a:buNone/>
+              <a:tabLst>
+                <a:tab pos="0" algn="l"/>
+              </a:tabLst>
               <a:defRPr lang="en-US" sz="1000" b="0" u="none" strike="noStrike">
                 <a:solidFill>
                   <a:srgbClr val="94A3B8"/>
@@ -18946,8 +19243,11 @@
                 <a:spcPct val="100000"/>
               </a:lnSpc>
               <a:buNone/>
+              <a:tabLst>
+                <a:tab pos="0" algn="l"/>
+              </a:tabLst>
             </a:pPr>
-            <a:fld id="{6A24DDA7-AE8C-4918-88D0-F147DDD138BF}" type="slidenum">
+            <a:fld id="{E08A06BB-D329-4599-80B0-C22C2414C302}" type="slidenum">
               <a:rPr lang="en-US" sz="1000" b="0" u="none" strike="noStrike">
                 <a:solidFill>
                   <a:srgbClr val="94A3B8"/>
@@ -19008,7 +19308,7 @@
         <p:spPr>
           <a:xfrm>
             <a:off x="-1097280" y="3017520"/>
-            <a:ext cx="3291480" cy="3291480"/>
+            <a:ext cx="3291120" cy="3291120"/>
           </a:xfrm>
           <a:prstGeom prst="ellipse">
             <a:avLst/>
@@ -19058,7 +19358,7 @@
         <p:spPr>
           <a:xfrm>
             <a:off x="548640" y="365760"/>
-            <a:ext cx="8046360" cy="731160"/>
+            <a:ext cx="8046000" cy="730800"/>
           </a:xfrm>
           <a:prstGeom prst="rect">
             <a:avLst/>
@@ -19113,7 +19413,7 @@
         <p:spPr>
           <a:xfrm>
             <a:off x="548640" y="1371600"/>
-            <a:ext cx="4571640" cy="3062880"/>
+            <a:ext cx="4571280" cy="3062520"/>
           </a:xfrm>
           <a:prstGeom prst="roundRect">
             <a:avLst>
@@ -19169,7 +19469,7 @@
         <p:spPr>
           <a:xfrm>
             <a:off x="822960" y="1600200"/>
-            <a:ext cx="548280" cy="548280"/>
+            <a:ext cx="547920" cy="547920"/>
           </a:xfrm>
           <a:prstGeom prst="ellipse">
             <a:avLst/>
@@ -19219,7 +19519,7 @@
         <p:spPr>
           <a:xfrm>
             <a:off x="960120" y="1737360"/>
-            <a:ext cx="273960" cy="273960"/>
+            <a:ext cx="273600" cy="273600"/>
           </a:xfrm>
           <a:prstGeom prst="rect">
             <a:avLst/>
@@ -19239,7 +19539,7 @@
         <p:spPr>
           <a:xfrm>
             <a:off x="1508760" y="1600200"/>
-            <a:ext cx="2742840" cy="548280"/>
+            <a:ext cx="2742480" cy="547920"/>
           </a:xfrm>
           <a:prstGeom prst="rect">
             <a:avLst/>
@@ -19299,7 +19599,7 @@
         <p:spPr>
           <a:xfrm>
             <a:off x="4206240" y="1737360"/>
-            <a:ext cx="685440" cy="273960"/>
+            <a:ext cx="685080" cy="273600"/>
           </a:xfrm>
           <a:prstGeom prst="roundRect">
             <a:avLst>
@@ -19368,7 +19668,7 @@
         <p:spPr>
           <a:xfrm>
             <a:off x="822960" y="2286000"/>
-            <a:ext cx="4023000" cy="1645560"/>
+            <a:ext cx="4022640" cy="1645200"/>
           </a:xfrm>
           <a:prstGeom prst="rect">
             <a:avLst/>
@@ -19406,7 +19706,7 @@
                 <a:uFillTx/>
                 <a:latin typeface="Calibri"/>
               </a:rPr>
-              <a:t>Esta semana toca excursión al Museo del Prado: no olvidéis la autorización firmada y los 8 euros. El miércoles hay reunión de padres a las 17:30. Quedan deberes de Matemáticas y Lengua para mañana, y ya se puede pagar el regalo de la maestra.</a:t>
+              <a:t>Esta semana toca excursión al Museo del Prado: no olvidéis la autorización firmada y los 8 euros. </a:t>
             </a:r>
             <a:endParaRPr lang="es-ES" sz="1500" b="0" u="none" strike="noStrike">
               <a:solidFill>
@@ -19417,37 +19717,24 @@
               <a:latin typeface="Arial"/>
             </a:endParaRPr>
           </a:p>
-        </p:txBody>
-      </p:sp>
-      <p:sp>
-        <p:nvSpPr>
-          <p:cNvPr id="168" name="Pie del resumen"/>
-          <p:cNvSpPr/>
-          <p:nvPr/>
-        </p:nvSpPr>
-        <p:spPr>
-          <a:xfrm>
-            <a:off x="822960" y="4023360"/>
-            <a:ext cx="4023000" cy="273960"/>
-          </a:xfrm>
-          <a:prstGeom prst="rect">
-            <a:avLst/>
-          </a:prstGeom>
-          <a:noFill/>
-          <a:ln w="0">
-            <a:noFill/>
-          </a:ln>
-        </p:spPr>
-        <p:style>
-          <a:lnRef idx="0"/>
-          <a:fillRef idx="0"/>
-          <a:effectRef idx="0"/>
-          <a:fontRef idx="minor"/>
-        </p:style>
-        <p:txBody>
-          <a:bodyPr lIns="0" tIns="0" rIns="0" bIns="0" anchor="t">
-            <a:noAutofit/>
-          </a:bodyPr>
+          <a:p>
+            <a:pPr defTabSz="914400">
+              <a:lnSpc>
+                <a:spcPct val="100000"/>
+              </a:lnSpc>
+              <a:tabLst>
+                <a:tab pos="0" algn="l"/>
+              </a:tabLst>
+            </a:pPr>
+            <a:endParaRPr lang="es-ES" sz="1500" b="0" u="none" strike="noStrike">
+              <a:solidFill>
+                <a:srgbClr val="FFFFFF"/>
+              </a:solidFill>
+              <a:effectLst/>
+              <a:uFillTx/>
+              <a:latin typeface="Arial"/>
+            </a:endParaRPr>
+          </a:p>
           <a:p>
             <a:pPr defTabSz="914400">
               <a:lnSpc>
@@ -19458,17 +19745,17 @@
               </a:tabLst>
             </a:pPr>
             <a:r>
-              <a:rPr lang="en-US" sz="1200" b="0" u="none" strike="noStrike">
-                <a:solidFill>
-                  <a:srgbClr val="94A3B8"/>
+              <a:rPr lang="en-US" sz="1500" b="0" u="none" strike="noStrike">
+                <a:solidFill>
+                  <a:schemeClr val="dk1"/>
                 </a:solidFill>
                 <a:effectLst/>
                 <a:uFillTx/>
                 <a:latin typeface="Calibri"/>
               </a:rPr>
-              <a:t>Generado con IA · ejemplo ilustrativo</a:t>
+              <a:t>El miércoles hay reunión de padres a las 17:30.</a:t>
             </a:r>
-            <a:endParaRPr lang="es-ES" sz="1200" b="0" u="none" strike="noStrike">
+            <a:endParaRPr lang="es-ES" sz="1500" b="0" u="none" strike="noStrike">
               <a:solidFill>
                 <a:srgbClr val="FFFFFF"/>
               </a:solidFill>
@@ -19477,18 +19764,65 @@
               <a:latin typeface="Arial"/>
             </a:endParaRPr>
           </a:p>
-        </p:txBody>
-      </p:sp>
-      <p:sp>
-        <p:nvSpPr>
-          <p:cNvPr id="169" name="Dato Una vez por clase y semana"/>
+          <a:p>
+            <a:pPr defTabSz="914400">
+              <a:lnSpc>
+                <a:spcPct val="100000"/>
+              </a:lnSpc>
+              <a:tabLst>
+                <a:tab pos="0" algn="l"/>
+              </a:tabLst>
+            </a:pPr>
+            <a:endParaRPr lang="es-ES" sz="1500" b="0" u="none" strike="noStrike">
+              <a:solidFill>
+                <a:srgbClr val="FFFFFF"/>
+              </a:solidFill>
+              <a:effectLst/>
+              <a:uFillTx/>
+              <a:latin typeface="Arial"/>
+            </a:endParaRPr>
+          </a:p>
+          <a:p>
+            <a:pPr defTabSz="914400">
+              <a:lnSpc>
+                <a:spcPct val="100000"/>
+              </a:lnSpc>
+              <a:tabLst>
+                <a:tab pos="0" algn="l"/>
+              </a:tabLst>
+            </a:pPr>
+            <a:r>
+              <a:rPr lang="en-US" sz="1500" b="0" u="none" strike="noStrike">
+                <a:solidFill>
+                  <a:schemeClr val="dk1"/>
+                </a:solidFill>
+                <a:effectLst/>
+                <a:uFillTx/>
+                <a:latin typeface="Calibri"/>
+              </a:rPr>
+              <a:t>Quedan deberes de Matemáticas y Lengua para mañana, y ya se puede pagar el regalo de la maestra.</a:t>
+            </a:r>
+            <a:endParaRPr lang="es-ES" sz="1500" b="0" u="none" strike="noStrike">
+              <a:solidFill>
+                <a:srgbClr val="FFFFFF"/>
+              </a:solidFill>
+              <a:effectLst/>
+              <a:uFillTx/>
+              <a:latin typeface="Arial"/>
+            </a:endParaRPr>
+          </a:p>
+        </p:txBody>
+      </p:sp>
+      <p:sp>
+        <p:nvSpPr>
+          <p:cNvPr id="168" name="Dato Una vez por clase y semana"/>
           <p:cNvSpPr/>
           <p:nvPr/>
         </p:nvSpPr>
         <p:spPr>
           <a:xfrm>
             <a:off x="5486400" y="1371600"/>
-            <a:ext cx="3108600" cy="1005480"/>
+            <a:ext cx="3108240" cy="1005120"/>
           </a:xfrm>
           <a:prstGeom prst="roundRect">
             <a:avLst>
@@ -19537,14 +19871,14 @@
       </p:sp>
       <p:sp>
         <p:nvSpPr>
-          <p:cNvPr id="170" name="Icono Una vez por clase y semana (fondo)"/>
+          <p:cNvPr id="169" name="Icono Una vez por clase y semana (fondo)"/>
           <p:cNvSpPr/>
           <p:nvPr/>
         </p:nvSpPr>
         <p:spPr>
           <a:xfrm>
             <a:off x="5669280" y="1600200"/>
-            <a:ext cx="548280" cy="548280"/>
+            <a:ext cx="547920" cy="547920"/>
           </a:xfrm>
           <a:prstGeom prst="ellipse">
             <a:avLst/>
@@ -19583,7 +19917,7 @@
       </p:sp>
       <p:pic>
         <p:nvPicPr>
-          <p:cNvPr id="171" name="Icono Una vez por clase y semana" descr="Icono Una vez por clase y semana"/>
+          <p:cNvPr id="170" name="Icono Una vez por clase y semana" descr="Icono Una vez por clase y semana"/>
           <p:cNvPicPr/>
           <p:nvPr/>
         </p:nvPicPr>
@@ -19594,7 +19928,7 @@
         <p:spPr>
           <a:xfrm>
             <a:off x="5806440" y="1737360"/>
-            <a:ext cx="273960" cy="273960"/>
+            <a:ext cx="273600" cy="273600"/>
           </a:xfrm>
           <a:prstGeom prst="rect">
             <a:avLst/>
@@ -19607,14 +19941,14 @@
       </p:pic>
       <p:sp>
         <p:nvSpPr>
-          <p:cNvPr id="172" name="Título Una vez por clase y semana"/>
+          <p:cNvPr id="171" name="Título Una vez por clase y semana"/>
           <p:cNvSpPr/>
           <p:nvPr/>
         </p:nvSpPr>
         <p:spPr>
           <a:xfrm>
             <a:off x="6355080" y="1463040"/>
-            <a:ext cx="2148480" cy="319680"/>
+            <a:ext cx="2148120" cy="319320"/>
           </a:xfrm>
           <a:prstGeom prst="rect">
             <a:avLst/>
@@ -19667,14 +20001,14 @@
       </p:sp>
       <p:sp>
         <p:nvSpPr>
-          <p:cNvPr id="173" name="Texto Una vez por clase y semana"/>
+          <p:cNvPr id="172" name="Texto Una vez por clase y semana"/>
           <p:cNvSpPr/>
           <p:nvPr/>
         </p:nvSpPr>
         <p:spPr>
           <a:xfrm>
             <a:off x="6355080" y="1828800"/>
-            <a:ext cx="2148480" cy="456840"/>
+            <a:ext cx="2148120" cy="456480"/>
           </a:xfrm>
           <a:prstGeom prst="rect">
             <a:avLst/>
@@ -19727,14 +20061,14 @@
       </p:sp>
       <p:sp>
         <p:nvSpPr>
-          <p:cNvPr id="174" name="Dato De 3 a 5 frases"/>
+          <p:cNvPr id="173" name="Dato De 3 a 5 frases"/>
           <p:cNvSpPr/>
           <p:nvPr/>
         </p:nvSpPr>
         <p:spPr>
           <a:xfrm>
             <a:off x="5486400" y="2468880"/>
-            <a:ext cx="3108600" cy="1005480"/>
+            <a:ext cx="3108240" cy="1005120"/>
           </a:xfrm>
           <a:prstGeom prst="roundRect">
             <a:avLst>
@@ -19783,14 +20117,14 @@
       </p:sp>
       <p:sp>
         <p:nvSpPr>
-          <p:cNvPr id="175" name="Icono De 3 a 5 frases (fondo)"/>
+          <p:cNvPr id="174" name="Icono De 3 a 5 frases (fondo)"/>
           <p:cNvSpPr/>
           <p:nvPr/>
         </p:nvSpPr>
         <p:spPr>
           <a:xfrm>
             <a:off x="5669280" y="2697480"/>
-            <a:ext cx="548280" cy="548280"/>
+            <a:ext cx="547920" cy="547920"/>
           </a:xfrm>
           <a:prstGeom prst="ellipse">
             <a:avLst/>
@@ -19829,7 +20163,7 @@
       </p:sp>
       <p:pic>
         <p:nvPicPr>
-          <p:cNvPr id="176" name="Icono De 3 a 5 frases" descr="Icono De 3 a 5 frases"/>
+          <p:cNvPr id="175" name="Icono De 3 a 5 frases" descr="Icono De 3 a 5 frases"/>
           <p:cNvPicPr/>
           <p:nvPr/>
         </p:nvPicPr>
@@ -19840,7 +20174,7 @@
         <p:spPr>
           <a:xfrm>
             <a:off x="5806440" y="2834640"/>
-            <a:ext cx="273960" cy="273960"/>
+            <a:ext cx="273600" cy="273600"/>
           </a:xfrm>
           <a:prstGeom prst="rect">
             <a:avLst/>
@@ -19853,14 +20187,14 @@
       </p:pic>
       <p:sp>
         <p:nvSpPr>
-          <p:cNvPr id="177" name="Título De 3 a 5 frases"/>
+          <p:cNvPr id="176" name="Título De 3 a 5 frases"/>
           <p:cNvSpPr/>
           <p:nvPr/>
         </p:nvSpPr>
         <p:spPr>
           <a:xfrm>
             <a:off x="6355080" y="2560320"/>
-            <a:ext cx="2148480" cy="319680"/>
+            <a:ext cx="2148120" cy="319320"/>
           </a:xfrm>
           <a:prstGeom prst="rect">
             <a:avLst/>
@@ -19913,14 +20247,14 @@
       </p:sp>
       <p:sp>
         <p:nvSpPr>
-          <p:cNvPr id="178" name="Texto De 3 a 5 frases"/>
+          <p:cNvPr id="177" name="Texto De 3 a 5 frases"/>
           <p:cNvSpPr/>
           <p:nvPr/>
         </p:nvSpPr>
         <p:spPr>
           <a:xfrm>
             <a:off x="6355080" y="2926080"/>
-            <a:ext cx="2148480" cy="456840"/>
+            <a:ext cx="2148120" cy="456480"/>
           </a:xfrm>
           <a:prstGeom prst="rect">
             <a:avLst/>
@@ -19973,14 +20307,14 @@
       </p:sp>
       <p:sp>
         <p:nvSpPr>
-          <p:cNvPr id="179" name="Dato Sin nombres de menores"/>
+          <p:cNvPr id="178" name="Dato Sin nombres de menores"/>
           <p:cNvSpPr/>
           <p:nvPr/>
         </p:nvSpPr>
         <p:spPr>
           <a:xfrm>
             <a:off x="5486400" y="3566160"/>
-            <a:ext cx="3108600" cy="1005480"/>
+            <a:ext cx="3108240" cy="1005120"/>
           </a:xfrm>
           <a:prstGeom prst="roundRect">
             <a:avLst>
@@ -20029,14 +20363,14 @@
       </p:sp>
       <p:sp>
         <p:nvSpPr>
-          <p:cNvPr id="180" name="Icono Sin nombres de menores (fondo)"/>
+          <p:cNvPr id="179" name="Icono Sin nombres de menores (fondo)"/>
           <p:cNvSpPr/>
           <p:nvPr/>
         </p:nvSpPr>
         <p:spPr>
           <a:xfrm>
             <a:off x="5669280" y="3794760"/>
-            <a:ext cx="548280" cy="548280"/>
+            <a:ext cx="547920" cy="547920"/>
           </a:xfrm>
           <a:prstGeom prst="ellipse">
             <a:avLst/>
@@ -20075,7 +20409,7 @@
       </p:sp>
       <p:pic>
         <p:nvPicPr>
-          <p:cNvPr id="181" name="Icono Sin nombres de menores" descr="Icono Sin nombres de menores"/>
+          <p:cNvPr id="180" name="Icono Sin nombres de menores" descr="Icono Sin nombres de menores"/>
           <p:cNvPicPr/>
           <p:nvPr/>
         </p:nvPicPr>
@@ -20086,7 +20420,7 @@
         <p:spPr>
           <a:xfrm>
             <a:off x="5806440" y="3931920"/>
-            <a:ext cx="273960" cy="273960"/>
+            <a:ext cx="273600" cy="273600"/>
           </a:xfrm>
           <a:prstGeom prst="rect">
             <a:avLst/>
@@ -20099,14 +20433,14 @@
       </p:pic>
       <p:sp>
         <p:nvSpPr>
-          <p:cNvPr id="182" name="Título Sin nombres de menores"/>
+          <p:cNvPr id="181" name="Título Sin nombres de menores"/>
           <p:cNvSpPr/>
           <p:nvPr/>
         </p:nvSpPr>
         <p:spPr>
           <a:xfrm>
             <a:off x="6355080" y="3657600"/>
-            <a:ext cx="2148480" cy="319680"/>
+            <a:ext cx="2148120" cy="319320"/>
           </a:xfrm>
           <a:prstGeom prst="rect">
             <a:avLst/>
@@ -20159,14 +20493,14 @@
       </p:sp>
       <p:sp>
         <p:nvSpPr>
-          <p:cNvPr id="183" name="Texto Sin nombres de menores"/>
+          <p:cNvPr id="182" name="Texto Sin nombres de menores"/>
           <p:cNvSpPr/>
           <p:nvPr/>
         </p:nvSpPr>
         <p:spPr>
           <a:xfrm>
             <a:off x="6355080" y="4023360"/>
-            <a:ext cx="2148480" cy="456840"/>
+            <a:ext cx="2148120" cy="456480"/>
           </a:xfrm>
           <a:prstGeom prst="rect">
             <a:avLst/>
@@ -20219,7 +20553,7 @@
       </p:sp>
       <p:sp>
         <p:nvSpPr>
-          <p:cNvPr id="184" name="PlaceHolder 2"/>
+          <p:cNvPr id="183" name="PlaceHolder 2"/>
           <p:cNvSpPr>
             <a:spLocks noGrp="1"/>
           </p:cNvSpPr>
@@ -20230,7 +20564,7 @@
         <p:spPr>
           <a:xfrm>
             <a:off x="8229600" y="4754880"/>
-            <a:ext cx="456840" cy="228240"/>
+            <a:ext cx="456480" cy="227880"/>
           </a:xfrm>
           <a:prstGeom prst="rect">
             <a:avLst/>
@@ -20250,6 +20584,9 @@
                 <a:spcPct val="100000"/>
               </a:lnSpc>
               <a:buNone/>
+              <a:tabLst>
+                <a:tab pos="0" algn="l"/>
+              </a:tabLst>
               <a:defRPr lang="en-US" sz="1000" b="0" u="none" strike="noStrike">
                 <a:solidFill>
                   <a:srgbClr val="94A3B8"/>
@@ -20266,8 +20603,11 @@
                 <a:spcPct val="100000"/>
               </a:lnSpc>
               <a:buNone/>
+              <a:tabLst>
+                <a:tab pos="0" algn="l"/>
+              </a:tabLst>
             </a:pPr>
-            <a:fld id="{981B31ED-EBD5-427B-A832-6D1DDDAC2896}" type="slidenum">
+            <a:fld id="{EED8393A-D149-4374-B6B0-B1A71F6A1C31}" type="slidenum">
               <a:rPr lang="en-US" sz="1000" b="0" u="none" strike="noStrike">
                 <a:solidFill>
                   <a:srgbClr val="94A3B8"/>
@@ -20321,14 +20661,14 @@
       </p:grpSpPr>
       <p:sp>
         <p:nvSpPr>
-          <p:cNvPr id="185" name="Mancha violeta"/>
+          <p:cNvPr id="184" name="Mancha violeta"/>
           <p:cNvSpPr/>
           <p:nvPr/>
         </p:nvSpPr>
         <p:spPr>
           <a:xfrm>
             <a:off x="7132320" y="-1463040"/>
-            <a:ext cx="2925720" cy="2925720"/>
+            <a:ext cx="2925360" cy="2925360"/>
           </a:xfrm>
           <a:prstGeom prst="ellipse">
             <a:avLst/>
@@ -20367,7 +20707,7 @@
       </p:sp>
       <p:sp>
         <p:nvSpPr>
-          <p:cNvPr id="186" name="PlaceHolder 1"/>
+          <p:cNvPr id="185" name="PlaceHolder 1"/>
           <p:cNvSpPr>
             <a:spLocks noGrp="1"/>
           </p:cNvSpPr>
@@ -20378,7 +20718,7 @@
         <p:spPr>
           <a:xfrm>
             <a:off x="548640" y="365760"/>
-            <a:ext cx="8046360" cy="731160"/>
+            <a:ext cx="8046000" cy="730800"/>
           </a:xfrm>
           <a:prstGeom prst="rect">
             <a:avLst/>
@@ -20426,14 +20766,14 @@
       </p:sp>
       <p:sp>
         <p:nvSpPr>
-          <p:cNvPr id="187" name="Tarjeta Perfil editable"/>
+          <p:cNvPr id="186" name="Tarjeta Perfil editable"/>
           <p:cNvSpPr/>
           <p:nvPr/>
         </p:nvSpPr>
         <p:spPr>
           <a:xfrm>
             <a:off x="548640" y="1371600"/>
-            <a:ext cx="2514240" cy="1508400"/>
+            <a:ext cx="2513880" cy="1508040"/>
           </a:xfrm>
           <a:prstGeom prst="roundRect">
             <a:avLst>
@@ -20482,14 +20822,14 @@
       </p:sp>
       <p:sp>
         <p:nvSpPr>
-          <p:cNvPr id="188" name="Icono Perfil editable (fondo)"/>
+          <p:cNvPr id="187" name="Icono Perfil editable (fondo)"/>
           <p:cNvSpPr/>
           <p:nvPr/>
         </p:nvSpPr>
         <p:spPr>
           <a:xfrm>
             <a:off x="777240" y="1572840"/>
-            <a:ext cx="548280" cy="548280"/>
+            <a:ext cx="547920" cy="547920"/>
           </a:xfrm>
           <a:prstGeom prst="ellipse">
             <a:avLst/>
@@ -20528,14 +20868,14 @@
       </p:sp>
       <p:sp>
         <p:nvSpPr>
-          <p:cNvPr id="189" name="Título Perfil editable"/>
+          <p:cNvPr id="188" name="Título Perfil editable"/>
           <p:cNvSpPr/>
           <p:nvPr/>
         </p:nvSpPr>
         <p:spPr>
           <a:xfrm>
             <a:off x="1463040" y="1572840"/>
-            <a:ext cx="1416960" cy="548280"/>
+            <a:ext cx="1416600" cy="547920"/>
           </a:xfrm>
           <a:prstGeom prst="rect">
             <a:avLst/>
@@ -20588,14 +20928,14 @@
       </p:sp>
       <p:sp>
         <p:nvSpPr>
-          <p:cNvPr id="190" name="Texto Perfil editable"/>
+          <p:cNvPr id="189" name="Texto Perfil editable"/>
           <p:cNvSpPr/>
           <p:nvPr/>
         </p:nvSpPr>
         <p:spPr>
           <a:xfrm>
             <a:off x="777240" y="2267640"/>
-            <a:ext cx="2057040" cy="548280"/>
+            <a:ext cx="2056680" cy="547920"/>
           </a:xfrm>
           <a:prstGeom prst="rect">
             <a:avLst/>
@@ -20648,14 +20988,14 @@
       </p:sp>
       <p:sp>
         <p:nvSpPr>
-          <p:cNvPr id="191" name="Tarjeta Contraseña"/>
+          <p:cNvPr id="190" name="Tarjeta Contraseña"/>
           <p:cNvSpPr/>
           <p:nvPr/>
         </p:nvSpPr>
         <p:spPr>
           <a:xfrm>
             <a:off x="3314880" y="1371600"/>
-            <a:ext cx="2514240" cy="1508400"/>
+            <a:ext cx="2513880" cy="1508040"/>
           </a:xfrm>
           <a:prstGeom prst="roundRect">
             <a:avLst>
@@ -20704,14 +21044,14 @@
       </p:sp>
       <p:sp>
         <p:nvSpPr>
-          <p:cNvPr id="192" name="Icono Contraseña (fondo)"/>
+          <p:cNvPr id="191" name="Icono Contraseña (fondo)"/>
           <p:cNvSpPr/>
           <p:nvPr/>
         </p:nvSpPr>
         <p:spPr>
           <a:xfrm>
             <a:off x="3543480" y="1572840"/>
-            <a:ext cx="548280" cy="548280"/>
+            <a:ext cx="547920" cy="547920"/>
           </a:xfrm>
           <a:prstGeom prst="ellipse">
             <a:avLst/>
@@ -20750,14 +21090,14 @@
       </p:sp>
       <p:sp>
         <p:nvSpPr>
-          <p:cNvPr id="193" name="Título Contraseña"/>
+          <p:cNvPr id="192" name="Título Contraseña"/>
           <p:cNvSpPr/>
           <p:nvPr/>
         </p:nvSpPr>
         <p:spPr>
           <a:xfrm>
             <a:off x="4229280" y="1572840"/>
-            <a:ext cx="1416960" cy="548280"/>
+            <a:ext cx="1416600" cy="547920"/>
           </a:xfrm>
           <a:prstGeom prst="rect">
             <a:avLst/>
@@ -20810,14 +21150,14 @@
       </p:sp>
       <p:sp>
         <p:nvSpPr>
-          <p:cNvPr id="194" name="Texto Contraseña"/>
+          <p:cNvPr id="193" name="Texto Contraseña"/>
           <p:cNvSpPr/>
           <p:nvPr/>
         </p:nvSpPr>
         <p:spPr>
           <a:xfrm>
             <a:off x="3543480" y="2267640"/>
-            <a:ext cx="2057040" cy="548280"/>
+            <a:ext cx="2056680" cy="547920"/>
           </a:xfrm>
           <a:prstGeom prst="rect">
             <a:avLst/>
@@ -20870,14 +21210,14 @@
       </p:sp>
       <p:sp>
         <p:nvSpPr>
-          <p:cNvPr id="195" name="Tarjeta Editar y borrar"/>
+          <p:cNvPr id="194" name="Tarjeta Editar y borrar"/>
           <p:cNvSpPr/>
           <p:nvPr/>
         </p:nvSpPr>
         <p:spPr>
           <a:xfrm>
             <a:off x="6080760" y="1371600"/>
-            <a:ext cx="2514240" cy="1508400"/>
+            <a:ext cx="2513880" cy="1508040"/>
           </a:xfrm>
           <a:prstGeom prst="roundRect">
             <a:avLst>
@@ -20926,14 +21266,14 @@
       </p:sp>
       <p:sp>
         <p:nvSpPr>
-          <p:cNvPr id="196" name="Icono Editar y borrar (fondo)"/>
+          <p:cNvPr id="195" name="Icono Editar y borrar (fondo)"/>
           <p:cNvSpPr/>
           <p:nvPr/>
         </p:nvSpPr>
         <p:spPr>
           <a:xfrm>
             <a:off x="6309360" y="1572840"/>
-            <a:ext cx="548280" cy="548280"/>
+            <a:ext cx="547920" cy="547920"/>
           </a:xfrm>
           <a:prstGeom prst="ellipse">
             <a:avLst/>
@@ -20972,14 +21312,14 @@
       </p:sp>
       <p:sp>
         <p:nvSpPr>
-          <p:cNvPr id="197" name="Título Editar y borrar"/>
+          <p:cNvPr id="196" name="Título Editar y borrar"/>
           <p:cNvSpPr/>
           <p:nvPr/>
         </p:nvSpPr>
         <p:spPr>
           <a:xfrm>
             <a:off x="6995160" y="1572840"/>
-            <a:ext cx="1416960" cy="548280"/>
+            <a:ext cx="1416600" cy="547920"/>
           </a:xfrm>
           <a:prstGeom prst="rect">
             <a:avLst/>
@@ -21032,14 +21372,14 @@
       </p:sp>
       <p:sp>
         <p:nvSpPr>
-          <p:cNvPr id="198" name="Texto Editar y borrar"/>
+          <p:cNvPr id="197" name="Texto Editar y borrar"/>
           <p:cNvSpPr/>
           <p:nvPr/>
         </p:nvSpPr>
         <p:spPr>
           <a:xfrm>
             <a:off x="6309360" y="2267640"/>
-            <a:ext cx="2057040" cy="548280"/>
+            <a:ext cx="2056680" cy="547920"/>
           </a:xfrm>
           <a:prstGeom prst="rect">
             <a:avLst/>
@@ -21092,14 +21432,14 @@
       </p:sp>
       <p:sp>
         <p:nvSpPr>
-          <p:cNvPr id="199" name="Tarjeta Roles por clase"/>
+          <p:cNvPr id="198" name="Tarjeta Roles por clase"/>
           <p:cNvSpPr/>
           <p:nvPr/>
         </p:nvSpPr>
         <p:spPr>
           <a:xfrm>
             <a:off x="548640" y="3063240"/>
-            <a:ext cx="2514240" cy="1508400"/>
+            <a:ext cx="2513880" cy="1508040"/>
           </a:xfrm>
           <a:prstGeom prst="roundRect">
             <a:avLst>
@@ -21148,14 +21488,14 @@
       </p:sp>
       <p:sp>
         <p:nvSpPr>
-          <p:cNvPr id="200" name="Icono Roles por clase (fondo)"/>
+          <p:cNvPr id="199" name="Icono Roles por clase (fondo)"/>
           <p:cNvSpPr/>
           <p:nvPr/>
         </p:nvSpPr>
         <p:spPr>
           <a:xfrm>
             <a:off x="777240" y="3264480"/>
-            <a:ext cx="548280" cy="548280"/>
+            <a:ext cx="547920" cy="547920"/>
           </a:xfrm>
           <a:prstGeom prst="ellipse">
             <a:avLst/>
@@ -21194,14 +21534,14 @@
       </p:sp>
       <p:sp>
         <p:nvSpPr>
-          <p:cNvPr id="201" name="Título Roles por clase"/>
+          <p:cNvPr id="200" name="Título Roles por clase"/>
           <p:cNvSpPr/>
           <p:nvPr/>
         </p:nvSpPr>
         <p:spPr>
           <a:xfrm>
             <a:off x="1463040" y="3264480"/>
-            <a:ext cx="1416960" cy="548280"/>
+            <a:ext cx="1416600" cy="547920"/>
           </a:xfrm>
           <a:prstGeom prst="rect">
             <a:avLst/>
@@ -21254,14 +21594,14 @@
       </p:sp>
       <p:sp>
         <p:nvSpPr>
-          <p:cNvPr id="202" name="Texto Roles por clase"/>
+          <p:cNvPr id="201" name="Texto Roles por clase"/>
           <p:cNvSpPr/>
           <p:nvPr/>
         </p:nvSpPr>
         <p:spPr>
           <a:xfrm>
             <a:off x="777240" y="3959280"/>
-            <a:ext cx="2057040" cy="548280"/>
+            <a:ext cx="2056680" cy="547920"/>
           </a:xfrm>
           <a:prstGeom prst="rect">
             <a:avLst/>
@@ -21314,14 +21654,14 @@
       </p:sp>
       <p:sp>
         <p:nvSpPr>
-          <p:cNvPr id="203" name="Tarjeta Solo tu clase"/>
+          <p:cNvPr id="202" name="Tarjeta Solo tu clase"/>
           <p:cNvSpPr/>
           <p:nvPr/>
         </p:nvSpPr>
         <p:spPr>
           <a:xfrm>
             <a:off x="3314880" y="3063240"/>
-            <a:ext cx="2514240" cy="1508400"/>
+            <a:ext cx="2513880" cy="1508040"/>
           </a:xfrm>
           <a:prstGeom prst="roundRect">
             <a:avLst>
@@ -21370,14 +21710,14 @@
       </p:sp>
       <p:sp>
         <p:nvSpPr>
-          <p:cNvPr id="204" name="Icono Solo tu clase (fondo)"/>
+          <p:cNvPr id="203" name="Icono Solo tu clase (fondo)"/>
           <p:cNvSpPr/>
           <p:nvPr/>
         </p:nvSpPr>
         <p:spPr>
           <a:xfrm>
             <a:off x="3543480" y="3264480"/>
-            <a:ext cx="548280" cy="548280"/>
+            <a:ext cx="547920" cy="547920"/>
           </a:xfrm>
           <a:prstGeom prst="ellipse">
             <a:avLst/>
@@ -21416,14 +21756,14 @@
       </p:sp>
       <p:sp>
         <p:nvSpPr>
-          <p:cNvPr id="205" name="Título Solo tu clase"/>
+          <p:cNvPr id="204" name="Título Solo tu clase"/>
           <p:cNvSpPr/>
           <p:nvPr/>
         </p:nvSpPr>
         <p:spPr>
           <a:xfrm>
             <a:off x="4229280" y="3264480"/>
-            <a:ext cx="1416960" cy="548280"/>
+            <a:ext cx="1416600" cy="547920"/>
           </a:xfrm>
           <a:prstGeom prst="rect">
             <a:avLst/>
@@ -21476,14 +21816,14 @@
       </p:sp>
       <p:sp>
         <p:nvSpPr>
-          <p:cNvPr id="206" name="Texto Solo tu clase"/>
+          <p:cNvPr id="205" name="Texto Solo tu clase"/>
           <p:cNvSpPr/>
           <p:nvPr/>
         </p:nvSpPr>
         <p:spPr>
           <a:xfrm>
             <a:off x="3543480" y="3959280"/>
-            <a:ext cx="2057040" cy="548280"/>
+            <a:ext cx="2056680" cy="547920"/>
           </a:xfrm>
           <a:prstGeom prst="rect">
             <a:avLst/>
@@ -21536,14 +21876,14 @@
       </p:sp>
       <p:sp>
         <p:nvSpPr>
-          <p:cNvPr id="207" name="Tarjeta Páginas legales"/>
+          <p:cNvPr id="206" name="Tarjeta Páginas legales"/>
           <p:cNvSpPr/>
           <p:nvPr/>
         </p:nvSpPr>
         <p:spPr>
           <a:xfrm>
             <a:off x="6080760" y="3063240"/>
-            <a:ext cx="2514240" cy="1508400"/>
+            <a:ext cx="2513880" cy="1508040"/>
           </a:xfrm>
           <a:prstGeom prst="roundRect">
             <a:avLst>
@@ -21592,14 +21932,14 @@
       </p:sp>
       <p:sp>
         <p:nvSpPr>
-          <p:cNvPr id="208" name="Icono Páginas legales (fondo)"/>
+          <p:cNvPr id="207" name="Icono Páginas legales (fondo)"/>
           <p:cNvSpPr/>
           <p:nvPr/>
         </p:nvSpPr>
         <p:spPr>
           <a:xfrm>
             <a:off x="6309360" y="3264480"/>
-            <a:ext cx="548280" cy="548280"/>
+            <a:ext cx="547920" cy="547920"/>
           </a:xfrm>
           <a:prstGeom prst="ellipse">
             <a:avLst/>
@@ -21638,14 +21978,14 @@
       </p:sp>
       <p:sp>
         <p:nvSpPr>
-          <p:cNvPr id="209" name="Título Páginas legales"/>
+          <p:cNvPr id="208" name="Título Páginas legales"/>
           <p:cNvSpPr/>
           <p:nvPr/>
         </p:nvSpPr>
         <p:spPr>
           <a:xfrm>
             <a:off x="6995160" y="3264480"/>
-            <a:ext cx="1416960" cy="548280"/>
+            <a:ext cx="1416600" cy="547920"/>
           </a:xfrm>
           <a:prstGeom prst="rect">
             <a:avLst/>
@@ -21698,14 +22038,14 @@
       </p:sp>
       <p:sp>
         <p:nvSpPr>
-          <p:cNvPr id="210" name="Texto Páginas legales"/>
+          <p:cNvPr id="209" name="Texto Páginas legales"/>
           <p:cNvSpPr/>
           <p:nvPr/>
         </p:nvSpPr>
         <p:spPr>
           <a:xfrm>
             <a:off x="6309360" y="3959280"/>
-            <a:ext cx="2057040" cy="548280"/>
+            <a:ext cx="2056680" cy="547920"/>
           </a:xfrm>
           <a:prstGeom prst="rect">
             <a:avLst/>
@@ -21758,7 +22098,7 @@
       </p:sp>
       <p:sp>
         <p:nvSpPr>
-          <p:cNvPr id="211" name="PlaceHolder 2"/>
+          <p:cNvPr id="210" name="PlaceHolder 2"/>
           <p:cNvSpPr>
             <a:spLocks noGrp="1"/>
           </p:cNvSpPr>
@@ -21769,7 +22109,7 @@
         <p:spPr>
           <a:xfrm>
             <a:off x="8229600" y="4754880"/>
-            <a:ext cx="456840" cy="228240"/>
+            <a:ext cx="456480" cy="227880"/>
           </a:xfrm>
           <a:prstGeom prst="rect">
             <a:avLst/>
@@ -21789,6 +22129,9 @@
                 <a:spcPct val="100000"/>
               </a:lnSpc>
               <a:buNone/>
+              <a:tabLst>
+                <a:tab pos="0" algn="l"/>
+              </a:tabLst>
               <a:defRPr lang="en-US" sz="1000" b="0" u="none" strike="noStrike">
                 <a:solidFill>
                   <a:srgbClr val="94A3B8"/>
@@ -21805,8 +22148,11 @@
                 <a:spcPct val="100000"/>
               </a:lnSpc>
               <a:buNone/>
+              <a:tabLst>
+                <a:tab pos="0" algn="l"/>
+              </a:tabLst>
             </a:pPr>
-            <a:fld id="{7B5ECD8D-71B4-49B9-B2F0-B75CB1D7275F}" type="slidenum">
+            <a:fld id="{0C8F9203-FFE9-49CD-86BD-B114DDA4E672}" type="slidenum">
               <a:rPr lang="en-US" sz="1000" b="0" u="none" strike="noStrike">
                 <a:solidFill>
                   <a:srgbClr val="94A3B8"/>
@@ -21830,7 +22176,7 @@
       </p:sp>
       <p:pic>
         <p:nvPicPr>
-          <p:cNvPr id="212" name="Icono Perfil editable"/>
+          <p:cNvPr id="211" name="Icono Perfil editable"/>
           <p:cNvPicPr/>
           <p:nvPr/>
         </p:nvPicPr>
@@ -21847,7 +22193,7 @@
         <p:spPr>
           <a:xfrm>
             <a:off x="914400" y="1710000"/>
-            <a:ext cx="273960" cy="273960"/>
+            <a:ext cx="273600" cy="273600"/>
           </a:xfrm>
           <a:prstGeom prst="rect">
             <a:avLst/>
@@ -21860,7 +22206,7 @@
       </p:pic>
       <p:pic>
         <p:nvPicPr>
-          <p:cNvPr id="213" name="Icono Contraseña"/>
+          <p:cNvPr id="212" name="Icono Contraseña"/>
           <p:cNvPicPr/>
           <p:nvPr/>
         </p:nvPicPr>
@@ -21877,7 +22223,7 @@
         <p:spPr>
           <a:xfrm>
             <a:off x="3680640" y="1710000"/>
-            <a:ext cx="273960" cy="273960"/>
+            <a:ext cx="273600" cy="273600"/>
           </a:xfrm>
           <a:prstGeom prst="rect">
             <a:avLst/>
@@ -21890,7 +22236,7 @@
       </p:pic>
       <p:pic>
         <p:nvPicPr>
-          <p:cNvPr id="214" name="Icono Editar y borrar"/>
+          <p:cNvPr id="213" name="Icono Editar y borrar"/>
           <p:cNvPicPr/>
           <p:nvPr/>
         </p:nvPicPr>
@@ -21907,7 +22253,7 @@
         <p:spPr>
           <a:xfrm>
             <a:off x="6446520" y="1710000"/>
-            <a:ext cx="273960" cy="273960"/>
+            <a:ext cx="273600" cy="273600"/>
           </a:xfrm>
           <a:prstGeom prst="rect">
             <a:avLst/>
@@ -21920,7 +22266,7 @@
       </p:pic>
       <p:pic>
         <p:nvPicPr>
-          <p:cNvPr id="215" name="Icono Roles por clase"/>
+          <p:cNvPr id="214" name="Icono Roles por clase"/>
           <p:cNvPicPr/>
           <p:nvPr/>
         </p:nvPicPr>
@@ -21937,7 +22283,7 @@
         <p:spPr>
           <a:xfrm>
             <a:off x="914400" y="3401640"/>
-            <a:ext cx="273960" cy="273960"/>
+            <a:ext cx="273600" cy="273600"/>
           </a:xfrm>
           <a:prstGeom prst="rect">
             <a:avLst/>
@@ -21950,7 +22296,7 @@
       </p:pic>
       <p:pic>
         <p:nvPicPr>
-          <p:cNvPr id="216" name="Icono Solo tu clase"/>
+          <p:cNvPr id="215" name="Icono Solo tu clase"/>
           <p:cNvPicPr/>
           <p:nvPr/>
         </p:nvPicPr>
@@ -21967,7 +22313,7 @@
         <p:spPr>
           <a:xfrm>
             <a:off x="3680640" y="3401640"/>
-            <a:ext cx="273960" cy="273960"/>
+            <a:ext cx="273600" cy="273600"/>
           </a:xfrm>
           <a:prstGeom prst="rect">
             <a:avLst/>
@@ -21980,7 +22326,7 @@
       </p:pic>
       <p:pic>
         <p:nvPicPr>
-          <p:cNvPr id="217" name="Icono Páginas legales"/>
+          <p:cNvPr id="216" name="Icono Páginas legales"/>
           <p:cNvPicPr/>
           <p:nvPr/>
         </p:nvPicPr>
@@ -21997,7 +22343,7 @@
         <p:spPr>
           <a:xfrm>
             <a:off x="6446520" y="3401640"/>
-            <a:ext cx="273960" cy="273960"/>
+            <a:ext cx="273600" cy="273600"/>
           </a:xfrm>
           <a:prstGeom prst="rect">
             <a:avLst/>
